--- a/claude-course/slides.pptx
+++ b/claude-course/slides.pptx
@@ -2103,7 +2103,7 @@
     <p:bg>
       <p:bgPr>
         <a:solidFill>
-          <a:srgbClr val="2E1F14"/>
+          <a:srgbClr val="F6F2EC"/>
         </a:solidFill>
       </p:bgPr>
     </p:bg>
@@ -2129,21 +2129,121 @@
         </p:nvSpPr>
         <p:spPr>
           <a:xfrm>
-            <a:off x="5591556" y="914400"/>
+            <a:off x="11109960" y="-685800"/>
+            <a:ext cx="1920240" cy="1920240"/>
+          </a:xfrm>
+          <a:prstGeom prst="irregularSeal1">
+            <a:avLst/>
+          </a:prstGeom>
+          <a:solidFill>
+            <a:srgbClr val="AD3A38"/>
+          </a:solidFill>
+          <a:ln/>
+        </p:spPr>
+      </p:sp>
+      <p:sp>
+        <p:nvSpPr>
+          <p:cNvPr id="3" name="Shape 1"/>
+          <p:cNvSpPr/>
+          <p:nvPr/>
+        </p:nvSpPr>
+        <p:spPr>
+          <a:xfrm>
+            <a:off x="-777240" y="5440680"/>
+            <a:ext cx="1920240" cy="1920240"/>
+          </a:xfrm>
+          <a:prstGeom prst="irregularSeal1">
+            <a:avLst/>
+          </a:prstGeom>
+          <a:solidFill>
+            <a:srgbClr val="AD3A38"/>
+          </a:solidFill>
+          <a:ln/>
+        </p:spPr>
+      </p:sp>
+      <p:sp>
+        <p:nvSpPr>
+          <p:cNvPr id="4" name="Shape 2"/>
+          <p:cNvSpPr/>
+          <p:nvPr/>
+        </p:nvSpPr>
+        <p:spPr>
+          <a:xfrm>
+            <a:off x="1051560" y="914400"/>
+            <a:ext cx="914400" cy="914400"/>
+          </a:xfrm>
+          <a:prstGeom prst="ellipse">
+            <a:avLst/>
+          </a:prstGeom>
+          <a:solidFill>
+            <a:srgbClr val="FFCB64"/>
+          </a:solidFill>
+          <a:ln/>
+        </p:spPr>
+      </p:sp>
+      <p:sp>
+        <p:nvSpPr>
+          <p:cNvPr id="5" name="Shape 3"/>
+          <p:cNvSpPr/>
+          <p:nvPr/>
+        </p:nvSpPr>
+        <p:spPr>
+          <a:xfrm>
+            <a:off x="10195560" y="5212080"/>
+            <a:ext cx="914400" cy="914400"/>
+          </a:xfrm>
+          <a:prstGeom prst="ellipse">
+            <a:avLst/>
+          </a:prstGeom>
+          <a:solidFill>
+            <a:srgbClr val="FFCB64"/>
+          </a:solidFill>
+          <a:ln/>
+        </p:spPr>
+      </p:sp>
+      <p:sp>
+        <p:nvSpPr>
+          <p:cNvPr id="6" name="Shape 4"/>
+          <p:cNvSpPr/>
+          <p:nvPr/>
+        </p:nvSpPr>
+        <p:spPr>
+          <a:xfrm>
+            <a:off x="10881360" y="5943600"/>
+            <a:ext cx="914400" cy="914400"/>
+          </a:xfrm>
+          <a:prstGeom prst="irregularSeal1">
+            <a:avLst/>
+          </a:prstGeom>
+          <a:solidFill>
+            <a:srgbClr val="C65E52"/>
+          </a:solidFill>
+          <a:ln/>
+        </p:spPr>
+      </p:sp>
+      <p:sp>
+        <p:nvSpPr>
+          <p:cNvPr id="7" name="Shape 5"/>
+          <p:cNvSpPr/>
+          <p:nvPr/>
+        </p:nvSpPr>
+        <p:spPr>
+          <a:xfrm>
+            <a:off x="5591556" y="868680"/>
             <a:ext cx="1005840" cy="1005840"/>
           </a:xfrm>
           <a:prstGeom prst="ellipse">
             <a:avLst/>
           </a:prstGeom>
           <a:solidFill>
-            <a:srgbClr val="7A4A26"/>
+            <a:srgbClr val="AD3A38"/>
           </a:solidFill>
           <a:ln/>
         </p:spPr>
       </p:sp>
       <p:pic>
         <p:nvPicPr>
-          <p:cNvPr id="3" name="Image 0" descr="preencoded.png">    </p:cNvPr>
+          <p:cNvPr id="8" name="Image 0" descr="preencoded.png">    </p:cNvPr>
           <p:cNvPicPr>
             <a:picLocks noChangeAspect="1"/>
           </p:cNvPicPr>
@@ -2157,7 +2257,7 @@
         </p:blipFill>
         <p:spPr>
           <a:xfrm>
-            <a:off x="5853074" y="1175918"/>
+            <a:off x="5853074" y="1130198"/>
             <a:ext cx="482803" cy="482803"/>
           </a:xfrm>
           <a:prstGeom prst="rect">
@@ -2167,13 +2267,13 @@
       </p:pic>
       <p:sp>
         <p:nvSpPr>
-          <p:cNvPr id="4" name="Text 1"/>
-          <p:cNvSpPr/>
-          <p:nvPr/>
-        </p:nvSpPr>
-        <p:spPr>
-          <a:xfrm>
-            <a:off x="731520" y="2103120"/>
+          <p:cNvPr id="9" name="Text 6"/>
+          <p:cNvSpPr/>
+          <p:nvPr/>
+        </p:nvSpPr>
+        <p:spPr>
+          <a:xfrm>
+            <a:off x="731520" y="2057400"/>
             <a:ext cx="10725912" cy="1097280"/>
           </a:xfrm>
           <a:prstGeom prst="rect">
@@ -2192,7 +2292,7 @@
             <a:r>
               <a:rPr lang="en-US" sz="4800" b="1" dirty="0">
                 <a:solidFill>
-                  <a:srgbClr val="FFFFFF"/>
+                  <a:srgbClr val="AD3A38"/>
                 </a:solidFill>
                 <a:latin typeface="Tahoma" pitchFamily="34" charset="0"/>
                 <a:ea typeface="Tahoma" pitchFamily="34" charset="-122"/>
@@ -2206,13 +2306,13 @@
       </p:sp>
       <p:sp>
         <p:nvSpPr>
-          <p:cNvPr id="5" name="Text 2"/>
-          <p:cNvSpPr/>
-          <p:nvPr/>
-        </p:nvSpPr>
-        <p:spPr>
-          <a:xfrm>
-            <a:off x="731520" y="3200400"/>
+          <p:cNvPr id="10" name="Text 7"/>
+          <p:cNvSpPr/>
+          <p:nvPr/>
+        </p:nvSpPr>
+        <p:spPr>
+          <a:xfrm>
+            <a:off x="731520" y="3154680"/>
             <a:ext cx="10725912" cy="548640"/>
           </a:xfrm>
           <a:prstGeom prst="rect">
@@ -2231,7 +2331,7 @@
             <a:r>
               <a:rPr lang="en-US" sz="2000" dirty="0">
                 <a:solidFill>
-                  <a:srgbClr val="C08552"/>
+                  <a:srgbClr val="C65E52"/>
                 </a:solidFill>
                 <a:latin typeface="Tahoma" pitchFamily="34" charset="0"/>
                 <a:ea typeface="Tahoma" pitchFamily="34" charset="-122"/>
@@ -2245,13 +2345,13 @@
       </p:sp>
       <p:sp>
         <p:nvSpPr>
-          <p:cNvPr id="6" name="Shape 3"/>
-          <p:cNvSpPr/>
-          <p:nvPr/>
-        </p:nvSpPr>
-        <p:spPr>
-          <a:xfrm>
-            <a:off x="1431036" y="4297680"/>
+          <p:cNvPr id="11" name="Shape 8"/>
+          <p:cNvSpPr/>
+          <p:nvPr/>
+        </p:nvSpPr>
+        <p:spPr>
+          <a:xfrm>
+            <a:off x="1431036" y="4251960"/>
             <a:ext cx="2926080" cy="566928"/>
           </a:xfrm>
           <a:prstGeom prst="roundRect">
@@ -2260,20 +2360,20 @@
             </a:avLst>
           </a:prstGeom>
           <a:solidFill>
-            <a:srgbClr val="42301F"/>
-          </a:solidFill>
-          <a:ln/>
-        </p:spPr>
-      </p:sp>
-      <p:sp>
-        <p:nvSpPr>
-          <p:cNvPr id="7" name="Text 4"/>
-          <p:cNvSpPr/>
-          <p:nvPr/>
-        </p:nvSpPr>
-        <p:spPr>
-          <a:xfrm>
-            <a:off x="1431036" y="4297680"/>
+            <a:srgbClr val="F3BE72"/>
+          </a:solidFill>
+          <a:ln/>
+        </p:spPr>
+      </p:sp>
+      <p:sp>
+        <p:nvSpPr>
+          <p:cNvPr id="12" name="Text 9"/>
+          <p:cNvSpPr/>
+          <p:nvPr/>
+        </p:nvSpPr>
+        <p:spPr>
+          <a:xfrm>
+            <a:off x="1431036" y="4251960"/>
             <a:ext cx="2926080" cy="566928"/>
           </a:xfrm>
           <a:prstGeom prst="rect">
@@ -2290,9 +2390,9 @@
               <a:buNone/>
             </a:pPr>
             <a:r>
-              <a:rPr lang="en-US" sz="1400" dirty="0">
-                <a:solidFill>
-                  <a:srgbClr val="EFE3D5"/>
+              <a:rPr lang="en-US" sz="1400" b="1" dirty="0">
+                <a:solidFill>
+                  <a:srgbClr val="2E2420"/>
                 </a:solidFill>
                 <a:latin typeface="Tahoma" pitchFamily="34" charset="0"/>
                 <a:ea typeface="Tahoma" pitchFamily="34" charset="-122"/>
@@ -2306,13 +2406,13 @@
       </p:sp>
       <p:sp>
         <p:nvSpPr>
-          <p:cNvPr id="8" name="Shape 5"/>
-          <p:cNvSpPr/>
-          <p:nvPr/>
-        </p:nvSpPr>
-        <p:spPr>
-          <a:xfrm>
-            <a:off x="4631436" y="4297680"/>
+          <p:cNvPr id="13" name="Shape 10"/>
+          <p:cNvSpPr/>
+          <p:nvPr/>
+        </p:nvSpPr>
+        <p:spPr>
+          <a:xfrm>
+            <a:off x="4631436" y="4251960"/>
             <a:ext cx="2926080" cy="566928"/>
           </a:xfrm>
           <a:prstGeom prst="roundRect">
@@ -2321,20 +2421,20 @@
             </a:avLst>
           </a:prstGeom>
           <a:solidFill>
-            <a:srgbClr val="42301F"/>
-          </a:solidFill>
-          <a:ln/>
-        </p:spPr>
-      </p:sp>
-      <p:sp>
-        <p:nvSpPr>
-          <p:cNvPr id="9" name="Text 6"/>
-          <p:cNvSpPr/>
-          <p:nvPr/>
-        </p:nvSpPr>
-        <p:spPr>
-          <a:xfrm>
-            <a:off x="4631436" y="4297680"/>
+            <a:srgbClr val="F3BE72"/>
+          </a:solidFill>
+          <a:ln/>
+        </p:spPr>
+      </p:sp>
+      <p:sp>
+        <p:nvSpPr>
+          <p:cNvPr id="14" name="Text 11"/>
+          <p:cNvSpPr/>
+          <p:nvPr/>
+        </p:nvSpPr>
+        <p:spPr>
+          <a:xfrm>
+            <a:off x="4631436" y="4251960"/>
             <a:ext cx="2926080" cy="566928"/>
           </a:xfrm>
           <a:prstGeom prst="rect">
@@ -2351,9 +2451,9 @@
               <a:buNone/>
             </a:pPr>
             <a:r>
-              <a:rPr lang="en-US" sz="1400" dirty="0">
-                <a:solidFill>
-                  <a:srgbClr val="EFE3D5"/>
+              <a:rPr lang="en-US" sz="1400" b="1" dirty="0">
+                <a:solidFill>
+                  <a:srgbClr val="2E2420"/>
                 </a:solidFill>
                 <a:latin typeface="Tahoma" pitchFamily="34" charset="0"/>
                 <a:ea typeface="Tahoma" pitchFamily="34" charset="-122"/>
@@ -2367,13 +2467,13 @@
       </p:sp>
       <p:sp>
         <p:nvSpPr>
-          <p:cNvPr id="10" name="Shape 7"/>
-          <p:cNvSpPr/>
-          <p:nvPr/>
-        </p:nvSpPr>
-        <p:spPr>
-          <a:xfrm>
-            <a:off x="7831836" y="4297680"/>
+          <p:cNvPr id="15" name="Shape 12"/>
+          <p:cNvSpPr/>
+          <p:nvPr/>
+        </p:nvSpPr>
+        <p:spPr>
+          <a:xfrm>
+            <a:off x="7831836" y="4251960"/>
             <a:ext cx="2926080" cy="566928"/>
           </a:xfrm>
           <a:prstGeom prst="roundRect">
@@ -2382,20 +2482,20 @@
             </a:avLst>
           </a:prstGeom>
           <a:solidFill>
-            <a:srgbClr val="42301F"/>
-          </a:solidFill>
-          <a:ln/>
-        </p:spPr>
-      </p:sp>
-      <p:sp>
-        <p:nvSpPr>
-          <p:cNvPr id="11" name="Text 8"/>
-          <p:cNvSpPr/>
-          <p:nvPr/>
-        </p:nvSpPr>
-        <p:spPr>
-          <a:xfrm>
-            <a:off x="7831836" y="4297680"/>
+            <a:srgbClr val="F3BE72"/>
+          </a:solidFill>
+          <a:ln/>
+        </p:spPr>
+      </p:sp>
+      <p:sp>
+        <p:nvSpPr>
+          <p:cNvPr id="16" name="Text 13"/>
+          <p:cNvSpPr/>
+          <p:nvPr/>
+        </p:nvSpPr>
+        <p:spPr>
+          <a:xfrm>
+            <a:off x="7831836" y="4251960"/>
             <a:ext cx="2926080" cy="566928"/>
           </a:xfrm>
           <a:prstGeom prst="rect">
@@ -2412,9 +2512,9 @@
               <a:buNone/>
             </a:pPr>
             <a:r>
-              <a:rPr lang="en-US" sz="1400" dirty="0">
-                <a:solidFill>
-                  <a:srgbClr val="EFE3D5"/>
+              <a:rPr lang="en-US" sz="1400" b="1" dirty="0">
+                <a:solidFill>
+                  <a:srgbClr val="2E2420"/>
                 </a:solidFill>
                 <a:latin typeface="Tahoma" pitchFamily="34" charset="0"/>
                 <a:ea typeface="Tahoma" pitchFamily="34" charset="-122"/>
@@ -2428,13 +2528,13 @@
       </p:sp>
       <p:sp>
         <p:nvSpPr>
-          <p:cNvPr id="12" name="Text 9"/>
-          <p:cNvSpPr/>
-          <p:nvPr/>
-        </p:nvSpPr>
-        <p:spPr>
-          <a:xfrm>
-            <a:off x="731520" y="5852160"/>
+          <p:cNvPr id="17" name="Text 14"/>
+          <p:cNvSpPr/>
+          <p:nvPr/>
+        </p:nvSpPr>
+        <p:spPr>
+          <a:xfrm>
+            <a:off x="731520" y="5806440"/>
             <a:ext cx="10725912" cy="457200"/>
           </a:xfrm>
           <a:prstGeom prst="rect">
@@ -2479,7 +2579,7 @@
     <p:bg>
       <p:bgPr>
         <a:solidFill>
-          <a:srgbClr val="FFFFFF"/>
+          <a:srgbClr val="F6F2EC"/>
         </a:solidFill>
       </p:bgPr>
     </p:bg>
@@ -2499,14 +2599,54 @@
       </p:grpSpPr>
       <p:sp>
         <p:nvSpPr>
-          <p:cNvPr id="2" name="Text 0"/>
+          <p:cNvPr id="2" name="Shape 0"/>
+          <p:cNvSpPr/>
+          <p:nvPr/>
+        </p:nvSpPr>
+        <p:spPr>
+          <a:xfrm>
+            <a:off x="11475720" y="-411480"/>
+            <a:ext cx="1188720" cy="1188720"/>
+          </a:xfrm>
+          <a:prstGeom prst="irregularSeal1">
+            <a:avLst/>
+          </a:prstGeom>
+          <a:solidFill>
+            <a:srgbClr val="AD3A38"/>
+          </a:solidFill>
+          <a:ln/>
+        </p:spPr>
+      </p:sp>
+      <p:sp>
+        <p:nvSpPr>
+          <p:cNvPr id="3" name="Shape 1"/>
+          <p:cNvSpPr/>
+          <p:nvPr/>
+        </p:nvSpPr>
+        <p:spPr>
+          <a:xfrm>
+            <a:off x="-411480" y="6080760"/>
+            <a:ext cx="1005840" cy="1005840"/>
+          </a:xfrm>
+          <a:prstGeom prst="ellipse">
+            <a:avLst/>
+          </a:prstGeom>
+          <a:solidFill>
+            <a:srgbClr val="FFCB64"/>
+          </a:solidFill>
+          <a:ln/>
+        </p:spPr>
+      </p:sp>
+      <p:sp>
+        <p:nvSpPr>
+          <p:cNvPr id="4" name="Text 2"/>
           <p:cNvSpPr/>
           <p:nvPr/>
         </p:nvSpPr>
         <p:spPr>
           <a:xfrm>
             <a:off x="640080" y="411480"/>
-            <a:ext cx="10972800" cy="731520"/>
+            <a:ext cx="10515600" cy="731520"/>
           </a:xfrm>
           <a:prstGeom prst="rect">
             <a:avLst/>
@@ -2524,7 +2664,7 @@
             <a:r>
               <a:rPr lang="en-US" sz="3200" b="1" dirty="0">
                 <a:solidFill>
-                  <a:srgbClr val="3B2A1A"/>
+                  <a:srgbClr val="AD3A38"/>
                 </a:solidFill>
                 <a:latin typeface="Tahoma" pitchFamily="34" charset="0"/>
                 <a:ea typeface="Tahoma" pitchFamily="34" charset="-122"/>
@@ -2538,7 +2678,7 @@
       </p:sp>
       <p:sp>
         <p:nvSpPr>
-          <p:cNvPr id="3" name="Shape 1"/>
+          <p:cNvPr id="5" name="Shape 3"/>
           <p:cNvSpPr/>
           <p:nvPr/>
         </p:nvSpPr>
@@ -2553,14 +2693,14 @@
             </a:avLst>
           </a:prstGeom>
           <a:solidFill>
-            <a:srgbClr val="F4ECE3"/>
-          </a:solidFill>
-          <a:ln/>
-        </p:spPr>
-      </p:sp>
-      <p:sp>
-        <p:nvSpPr>
-          <p:cNvPr id="4" name="Shape 2"/>
+            <a:srgbClr val="FBEBD0"/>
+          </a:solidFill>
+          <a:ln/>
+        </p:spPr>
+      </p:sp>
+      <p:sp>
+        <p:nvSpPr>
+          <p:cNvPr id="6" name="Shape 4"/>
           <p:cNvSpPr/>
           <p:nvPr/>
         </p:nvSpPr>
@@ -2573,14 +2713,14 @@
             <a:avLst/>
           </a:prstGeom>
           <a:solidFill>
-            <a:srgbClr val="7A4A26"/>
+            <a:srgbClr val="AD3A38"/>
           </a:solidFill>
           <a:ln/>
         </p:spPr>
       </p:sp>
       <p:pic>
         <p:nvPicPr>
-          <p:cNvPr id="5" name="Image 0" descr="preencoded.png">    </p:cNvPr>
+          <p:cNvPr id="7" name="Image 0" descr="preencoded.png">    </p:cNvPr>
           <p:cNvPicPr>
             <a:picLocks noChangeAspect="1"/>
           </p:cNvPicPr>
@@ -2604,7 +2744,7 @@
       </p:pic>
       <p:sp>
         <p:nvSpPr>
-          <p:cNvPr id="6" name="Text 3"/>
+          <p:cNvPr id="8" name="Text 5"/>
           <p:cNvSpPr/>
           <p:nvPr/>
         </p:nvSpPr>
@@ -2629,7 +2769,7 @@
             <a:r>
               <a:rPr lang="en-US" sz="1800" b="1" dirty="0">
                 <a:solidFill>
-                  <a:srgbClr val="3B2A1A"/>
+                  <a:srgbClr val="2E2420"/>
                 </a:solidFill>
                 <a:latin typeface="Tahoma" pitchFamily="34" charset="0"/>
                 <a:ea typeface="Tahoma" pitchFamily="34" charset="-122"/>
@@ -2643,7 +2783,7 @@
       </p:sp>
       <p:sp>
         <p:nvSpPr>
-          <p:cNvPr id="7" name="Text 4"/>
+          <p:cNvPr id="9" name="Text 6"/>
           <p:cNvSpPr/>
           <p:nvPr/>
         </p:nvSpPr>
@@ -2668,7 +2808,7 @@
             <a:r>
               <a:rPr lang="en-US" sz="1350" dirty="0">
                 <a:solidFill>
-                  <a:srgbClr val="7A4A26"/>
+                  <a:srgbClr val="AD3A38"/>
                 </a:solidFill>
                 <a:latin typeface="Tahoma" pitchFamily="34" charset="0"/>
                 <a:ea typeface="Tahoma" pitchFamily="34" charset="-122"/>
@@ -2682,7 +2822,7 @@
       </p:sp>
       <p:sp>
         <p:nvSpPr>
-          <p:cNvPr id="8" name="Text 5"/>
+          <p:cNvPr id="10" name="Text 7"/>
           <p:cNvSpPr/>
           <p:nvPr/>
         </p:nvSpPr>
@@ -2721,7 +2861,7 @@
       </p:sp>
       <p:sp>
         <p:nvSpPr>
-          <p:cNvPr id="9" name="Shape 6"/>
+          <p:cNvPr id="11" name="Shape 8"/>
           <p:cNvSpPr/>
           <p:nvPr/>
         </p:nvSpPr>
@@ -2736,14 +2876,14 @@
             </a:avLst>
           </a:prstGeom>
           <a:solidFill>
-            <a:srgbClr val="F4ECE3"/>
-          </a:solidFill>
-          <a:ln/>
-        </p:spPr>
-      </p:sp>
-      <p:sp>
-        <p:nvSpPr>
-          <p:cNvPr id="10" name="Shape 7"/>
+            <a:srgbClr val="FBEBD0"/>
+          </a:solidFill>
+          <a:ln/>
+        </p:spPr>
+      </p:sp>
+      <p:sp>
+        <p:nvSpPr>
+          <p:cNvPr id="12" name="Shape 9"/>
           <p:cNvSpPr/>
           <p:nvPr/>
         </p:nvSpPr>
@@ -2756,14 +2896,14 @@
             <a:avLst/>
           </a:prstGeom>
           <a:solidFill>
-            <a:srgbClr val="7A4A26"/>
+            <a:srgbClr val="AD3A38"/>
           </a:solidFill>
           <a:ln/>
         </p:spPr>
       </p:sp>
       <p:pic>
         <p:nvPicPr>
-          <p:cNvPr id="11" name="Image 1" descr="preencoded.png">    </p:cNvPr>
+          <p:cNvPr id="13" name="Image 1" descr="preencoded.png">    </p:cNvPr>
           <p:cNvPicPr>
             <a:picLocks noChangeAspect="1"/>
           </p:cNvPicPr>
@@ -2787,7 +2927,7 @@
       </p:pic>
       <p:sp>
         <p:nvSpPr>
-          <p:cNvPr id="12" name="Text 8"/>
+          <p:cNvPr id="14" name="Text 10"/>
           <p:cNvSpPr/>
           <p:nvPr/>
         </p:nvSpPr>
@@ -2812,7 +2952,7 @@
             <a:r>
               <a:rPr lang="en-US" sz="1800" b="1" dirty="0">
                 <a:solidFill>
-                  <a:srgbClr val="3B2A1A"/>
+                  <a:srgbClr val="2E2420"/>
                 </a:solidFill>
                 <a:latin typeface="Tahoma" pitchFamily="34" charset="0"/>
                 <a:ea typeface="Tahoma" pitchFamily="34" charset="-122"/>
@@ -2826,7 +2966,7 @@
       </p:sp>
       <p:sp>
         <p:nvSpPr>
-          <p:cNvPr id="13" name="Text 9"/>
+          <p:cNvPr id="15" name="Text 11"/>
           <p:cNvSpPr/>
           <p:nvPr/>
         </p:nvSpPr>
@@ -2851,7 +2991,7 @@
             <a:r>
               <a:rPr lang="en-US" sz="1350" dirty="0">
                 <a:solidFill>
-                  <a:srgbClr val="7A4A26"/>
+                  <a:srgbClr val="AD3A38"/>
                 </a:solidFill>
                 <a:latin typeface="Tahoma" pitchFamily="34" charset="0"/>
                 <a:ea typeface="Tahoma" pitchFamily="34" charset="-122"/>
@@ -2865,7 +3005,7 @@
       </p:sp>
       <p:sp>
         <p:nvSpPr>
-          <p:cNvPr id="14" name="Text 10"/>
+          <p:cNvPr id="16" name="Text 12"/>
           <p:cNvSpPr/>
           <p:nvPr/>
         </p:nvSpPr>
@@ -2904,7 +3044,7 @@
       </p:sp>
       <p:sp>
         <p:nvSpPr>
-          <p:cNvPr id="15" name="Shape 11"/>
+          <p:cNvPr id="17" name="Shape 13"/>
           <p:cNvSpPr/>
           <p:nvPr/>
         </p:nvSpPr>
@@ -2919,14 +3059,14 @@
             </a:avLst>
           </a:prstGeom>
           <a:solidFill>
-            <a:srgbClr val="F4ECE3"/>
-          </a:solidFill>
-          <a:ln/>
-        </p:spPr>
-      </p:sp>
-      <p:sp>
-        <p:nvSpPr>
-          <p:cNvPr id="16" name="Shape 12"/>
+            <a:srgbClr val="FBEBD0"/>
+          </a:solidFill>
+          <a:ln/>
+        </p:spPr>
+      </p:sp>
+      <p:sp>
+        <p:nvSpPr>
+          <p:cNvPr id="18" name="Shape 14"/>
           <p:cNvSpPr/>
           <p:nvPr/>
         </p:nvSpPr>
@@ -2939,14 +3079,14 @@
             <a:avLst/>
           </a:prstGeom>
           <a:solidFill>
-            <a:srgbClr val="7A4A26"/>
+            <a:srgbClr val="AD3A38"/>
           </a:solidFill>
           <a:ln/>
         </p:spPr>
       </p:sp>
       <p:pic>
         <p:nvPicPr>
-          <p:cNvPr id="17" name="Image 2" descr="preencoded.png">    </p:cNvPr>
+          <p:cNvPr id="19" name="Image 2" descr="preencoded.png">    </p:cNvPr>
           <p:cNvPicPr>
             <a:picLocks noChangeAspect="1"/>
           </p:cNvPicPr>
@@ -2970,7 +3110,7 @@
       </p:pic>
       <p:sp>
         <p:nvSpPr>
-          <p:cNvPr id="18" name="Text 13"/>
+          <p:cNvPr id="20" name="Text 15"/>
           <p:cNvSpPr/>
           <p:nvPr/>
         </p:nvSpPr>
@@ -2995,7 +3135,7 @@
             <a:r>
               <a:rPr lang="en-US" sz="1800" b="1" dirty="0">
                 <a:solidFill>
-                  <a:srgbClr val="3B2A1A"/>
+                  <a:srgbClr val="2E2420"/>
                 </a:solidFill>
                 <a:latin typeface="Tahoma" pitchFamily="34" charset="0"/>
                 <a:ea typeface="Tahoma" pitchFamily="34" charset="-122"/>
@@ -3009,7 +3149,7 @@
       </p:sp>
       <p:sp>
         <p:nvSpPr>
-          <p:cNvPr id="19" name="Text 14"/>
+          <p:cNvPr id="21" name="Text 16"/>
           <p:cNvSpPr/>
           <p:nvPr/>
         </p:nvSpPr>
@@ -3034,7 +3174,7 @@
             <a:r>
               <a:rPr lang="en-US" sz="1350" dirty="0">
                 <a:solidFill>
-                  <a:srgbClr val="7A4A26"/>
+                  <a:srgbClr val="AD3A38"/>
                 </a:solidFill>
                 <a:latin typeface="Tahoma" pitchFamily="34" charset="0"/>
                 <a:ea typeface="Tahoma" pitchFamily="34" charset="-122"/>
@@ -3048,7 +3188,7 @@
       </p:sp>
       <p:sp>
         <p:nvSpPr>
-          <p:cNvPr id="20" name="Text 15"/>
+          <p:cNvPr id="22" name="Text 17"/>
           <p:cNvSpPr/>
           <p:nvPr/>
         </p:nvSpPr>
@@ -3099,7 +3239,7 @@
     <p:bg>
       <p:bgPr>
         <a:solidFill>
-          <a:srgbClr val="FFFFFF"/>
+          <a:srgbClr val="F6F2EC"/>
         </a:solidFill>
       </p:bgPr>
     </p:bg>
@@ -3119,14 +3259,54 @@
       </p:grpSpPr>
       <p:sp>
         <p:nvSpPr>
-          <p:cNvPr id="2" name="Text 0"/>
+          <p:cNvPr id="2" name="Shape 0"/>
+          <p:cNvSpPr/>
+          <p:nvPr/>
+        </p:nvSpPr>
+        <p:spPr>
+          <a:xfrm>
+            <a:off x="11475720" y="-411480"/>
+            <a:ext cx="1188720" cy="1188720"/>
+          </a:xfrm>
+          <a:prstGeom prst="irregularSeal1">
+            <a:avLst/>
+          </a:prstGeom>
+          <a:solidFill>
+            <a:srgbClr val="AD3A38"/>
+          </a:solidFill>
+          <a:ln/>
+        </p:spPr>
+      </p:sp>
+      <p:sp>
+        <p:nvSpPr>
+          <p:cNvPr id="3" name="Shape 1"/>
+          <p:cNvSpPr/>
+          <p:nvPr/>
+        </p:nvSpPr>
+        <p:spPr>
+          <a:xfrm>
+            <a:off x="-411480" y="6080760"/>
+            <a:ext cx="1005840" cy="1005840"/>
+          </a:xfrm>
+          <a:prstGeom prst="ellipse">
+            <a:avLst/>
+          </a:prstGeom>
+          <a:solidFill>
+            <a:srgbClr val="FFCB64"/>
+          </a:solidFill>
+          <a:ln/>
+        </p:spPr>
+      </p:sp>
+      <p:sp>
+        <p:nvSpPr>
+          <p:cNvPr id="4" name="Text 2"/>
           <p:cNvSpPr/>
           <p:nvPr/>
         </p:nvSpPr>
         <p:spPr>
           <a:xfrm>
             <a:off x="640080" y="411480"/>
-            <a:ext cx="10972800" cy="731520"/>
+            <a:ext cx="10515600" cy="731520"/>
           </a:xfrm>
           <a:prstGeom prst="rect">
             <a:avLst/>
@@ -3144,7 +3324,7 @@
             <a:r>
               <a:rPr lang="en-US" sz="3200" b="1" dirty="0">
                 <a:solidFill>
-                  <a:srgbClr val="3B2A1A"/>
+                  <a:srgbClr val="AD3A38"/>
                 </a:solidFill>
                 <a:latin typeface="Tahoma" pitchFamily="34" charset="0"/>
                 <a:ea typeface="Tahoma" pitchFamily="34" charset="-122"/>
@@ -3158,7 +3338,7 @@
       </p:sp>
       <p:sp>
         <p:nvSpPr>
-          <p:cNvPr id="3" name="Shape 1"/>
+          <p:cNvPr id="5" name="Shape 3"/>
           <p:cNvSpPr/>
           <p:nvPr/>
         </p:nvSpPr>
@@ -3171,14 +3351,14 @@
             <a:avLst/>
           </a:prstGeom>
           <a:solidFill>
-            <a:srgbClr val="7A4A26"/>
-          </a:solidFill>
-          <a:ln/>
-        </p:spPr>
-      </p:sp>
-      <p:sp>
-        <p:nvSpPr>
-          <p:cNvPr id="4" name="Text 2"/>
+            <a:srgbClr val="AD3A38"/>
+          </a:solidFill>
+          <a:ln/>
+        </p:spPr>
+      </p:sp>
+      <p:sp>
+        <p:nvSpPr>
+          <p:cNvPr id="6" name="Text 4"/>
           <p:cNvSpPr/>
           <p:nvPr/>
         </p:nvSpPr>
@@ -3217,7 +3397,7 @@
       </p:sp>
       <p:sp>
         <p:nvSpPr>
-          <p:cNvPr id="5" name="Text 3"/>
+          <p:cNvPr id="7" name="Text 5"/>
           <p:cNvSpPr/>
           <p:nvPr/>
         </p:nvSpPr>
@@ -3242,7 +3422,7 @@
             <a:r>
               <a:rPr lang="en-US" sz="1500" dirty="0">
                 <a:solidFill>
-                  <a:srgbClr val="3B2A1A"/>
+                  <a:srgbClr val="2E2420"/>
                 </a:solidFill>
                 <a:latin typeface="Tahoma" pitchFamily="34" charset="0"/>
                 <a:ea typeface="Tahoma" pitchFamily="34" charset="-122"/>
@@ -3256,7 +3436,7 @@
       </p:sp>
       <p:sp>
         <p:nvSpPr>
-          <p:cNvPr id="6" name="Shape 4"/>
+          <p:cNvPr id="8" name="Shape 6"/>
           <p:cNvSpPr/>
           <p:nvPr/>
         </p:nvSpPr>
@@ -3269,14 +3449,14 @@
             <a:avLst/>
           </a:prstGeom>
           <a:solidFill>
-            <a:srgbClr val="7A4A26"/>
-          </a:solidFill>
-          <a:ln/>
-        </p:spPr>
-      </p:sp>
-      <p:sp>
-        <p:nvSpPr>
-          <p:cNvPr id="7" name="Text 5"/>
+            <a:srgbClr val="AD3A38"/>
+          </a:solidFill>
+          <a:ln/>
+        </p:spPr>
+      </p:sp>
+      <p:sp>
+        <p:nvSpPr>
+          <p:cNvPr id="9" name="Text 7"/>
           <p:cNvSpPr/>
           <p:nvPr/>
         </p:nvSpPr>
@@ -3315,7 +3495,7 @@
       </p:sp>
       <p:sp>
         <p:nvSpPr>
-          <p:cNvPr id="8" name="Text 6"/>
+          <p:cNvPr id="10" name="Text 8"/>
           <p:cNvSpPr/>
           <p:nvPr/>
         </p:nvSpPr>
@@ -3340,7 +3520,7 @@
             <a:r>
               <a:rPr lang="en-US" sz="1500" dirty="0">
                 <a:solidFill>
-                  <a:srgbClr val="3B2A1A"/>
+                  <a:srgbClr val="2E2420"/>
                 </a:solidFill>
                 <a:latin typeface="Tahoma" pitchFamily="34" charset="0"/>
                 <a:ea typeface="Tahoma" pitchFamily="34" charset="-122"/>
@@ -3354,7 +3534,7 @@
       </p:sp>
       <p:sp>
         <p:nvSpPr>
-          <p:cNvPr id="9" name="Shape 7"/>
+          <p:cNvPr id="11" name="Shape 9"/>
           <p:cNvSpPr/>
           <p:nvPr/>
         </p:nvSpPr>
@@ -3367,14 +3547,14 @@
             <a:avLst/>
           </a:prstGeom>
           <a:solidFill>
-            <a:srgbClr val="7A4A26"/>
-          </a:solidFill>
-          <a:ln/>
-        </p:spPr>
-      </p:sp>
-      <p:sp>
-        <p:nvSpPr>
-          <p:cNvPr id="10" name="Text 8"/>
+            <a:srgbClr val="AD3A38"/>
+          </a:solidFill>
+          <a:ln/>
+        </p:spPr>
+      </p:sp>
+      <p:sp>
+        <p:nvSpPr>
+          <p:cNvPr id="12" name="Text 10"/>
           <p:cNvSpPr/>
           <p:nvPr/>
         </p:nvSpPr>
@@ -3413,7 +3593,7 @@
       </p:sp>
       <p:sp>
         <p:nvSpPr>
-          <p:cNvPr id="11" name="Text 9"/>
+          <p:cNvPr id="13" name="Text 11"/>
           <p:cNvSpPr/>
           <p:nvPr/>
         </p:nvSpPr>
@@ -3438,7 +3618,7 @@
             <a:r>
               <a:rPr lang="en-US" sz="1500" dirty="0">
                 <a:solidFill>
-                  <a:srgbClr val="3B2A1A"/>
+                  <a:srgbClr val="2E2420"/>
                 </a:solidFill>
                 <a:latin typeface="Tahoma" pitchFamily="34" charset="0"/>
                 <a:ea typeface="Tahoma" pitchFamily="34" charset="-122"/>
@@ -3452,7 +3632,7 @@
       </p:sp>
       <p:sp>
         <p:nvSpPr>
-          <p:cNvPr id="12" name="Shape 10"/>
+          <p:cNvPr id="14" name="Shape 12"/>
           <p:cNvSpPr/>
           <p:nvPr/>
         </p:nvSpPr>
@@ -3465,14 +3645,14 @@
             <a:avLst/>
           </a:prstGeom>
           <a:solidFill>
-            <a:srgbClr val="7A4A26"/>
-          </a:solidFill>
-          <a:ln/>
-        </p:spPr>
-      </p:sp>
-      <p:sp>
-        <p:nvSpPr>
-          <p:cNvPr id="13" name="Text 11"/>
+            <a:srgbClr val="AD3A38"/>
+          </a:solidFill>
+          <a:ln/>
+        </p:spPr>
+      </p:sp>
+      <p:sp>
+        <p:nvSpPr>
+          <p:cNvPr id="15" name="Text 13"/>
           <p:cNvSpPr/>
           <p:nvPr/>
         </p:nvSpPr>
@@ -3511,7 +3691,7 @@
       </p:sp>
       <p:sp>
         <p:nvSpPr>
-          <p:cNvPr id="14" name="Text 12"/>
+          <p:cNvPr id="16" name="Text 14"/>
           <p:cNvSpPr/>
           <p:nvPr/>
         </p:nvSpPr>
@@ -3536,7 +3716,7 @@
             <a:r>
               <a:rPr lang="en-US" sz="1500" dirty="0">
                 <a:solidFill>
-                  <a:srgbClr val="3B2A1A"/>
+                  <a:srgbClr val="2E2420"/>
                 </a:solidFill>
                 <a:latin typeface="Tahoma" pitchFamily="34" charset="0"/>
                 <a:ea typeface="Tahoma" pitchFamily="34" charset="-122"/>
@@ -3550,7 +3730,7 @@
       </p:sp>
       <p:sp>
         <p:nvSpPr>
-          <p:cNvPr id="15" name="Shape 13"/>
+          <p:cNvPr id="17" name="Shape 15"/>
           <p:cNvSpPr/>
           <p:nvPr/>
         </p:nvSpPr>
@@ -3563,14 +3743,14 @@
             <a:avLst/>
           </a:prstGeom>
           <a:solidFill>
-            <a:srgbClr val="7A4A26"/>
-          </a:solidFill>
-          <a:ln/>
-        </p:spPr>
-      </p:sp>
-      <p:sp>
-        <p:nvSpPr>
-          <p:cNvPr id="16" name="Text 14"/>
+            <a:srgbClr val="AD3A38"/>
+          </a:solidFill>
+          <a:ln/>
+        </p:spPr>
+      </p:sp>
+      <p:sp>
+        <p:nvSpPr>
+          <p:cNvPr id="18" name="Text 16"/>
           <p:cNvSpPr/>
           <p:nvPr/>
         </p:nvSpPr>
@@ -3609,7 +3789,7 @@
       </p:sp>
       <p:sp>
         <p:nvSpPr>
-          <p:cNvPr id="17" name="Text 15"/>
+          <p:cNvPr id="19" name="Text 17"/>
           <p:cNvSpPr/>
           <p:nvPr/>
         </p:nvSpPr>
@@ -3634,7 +3814,7 @@
             <a:r>
               <a:rPr lang="en-US" sz="1500" dirty="0">
                 <a:solidFill>
-                  <a:srgbClr val="3B2A1A"/>
+                  <a:srgbClr val="2E2420"/>
                 </a:solidFill>
                 <a:latin typeface="Tahoma" pitchFamily="34" charset="0"/>
                 <a:ea typeface="Tahoma" pitchFamily="34" charset="-122"/>
@@ -3648,7 +3828,7 @@
       </p:sp>
       <p:sp>
         <p:nvSpPr>
-          <p:cNvPr id="18" name="Shape 16"/>
+          <p:cNvPr id="20" name="Shape 18"/>
           <p:cNvSpPr/>
           <p:nvPr/>
         </p:nvSpPr>
@@ -3661,14 +3841,14 @@
             <a:avLst/>
           </a:prstGeom>
           <a:solidFill>
-            <a:srgbClr val="7A4A26"/>
-          </a:solidFill>
-          <a:ln/>
-        </p:spPr>
-      </p:sp>
-      <p:sp>
-        <p:nvSpPr>
-          <p:cNvPr id="19" name="Text 17"/>
+            <a:srgbClr val="AD3A38"/>
+          </a:solidFill>
+          <a:ln/>
+        </p:spPr>
+      </p:sp>
+      <p:sp>
+        <p:nvSpPr>
+          <p:cNvPr id="21" name="Text 19"/>
           <p:cNvSpPr/>
           <p:nvPr/>
         </p:nvSpPr>
@@ -3707,7 +3887,7 @@
       </p:sp>
       <p:sp>
         <p:nvSpPr>
-          <p:cNvPr id="20" name="Text 18"/>
+          <p:cNvPr id="22" name="Text 20"/>
           <p:cNvSpPr/>
           <p:nvPr/>
         </p:nvSpPr>
@@ -3732,7 +3912,7 @@
             <a:r>
               <a:rPr lang="en-US" sz="1500" dirty="0">
                 <a:solidFill>
-                  <a:srgbClr val="3B2A1A"/>
+                  <a:srgbClr val="2E2420"/>
                 </a:solidFill>
                 <a:latin typeface="Tahoma" pitchFamily="34" charset="0"/>
                 <a:ea typeface="Tahoma" pitchFamily="34" charset="-122"/>
@@ -3746,7 +3926,7 @@
       </p:sp>
       <p:sp>
         <p:nvSpPr>
-          <p:cNvPr id="21" name="Shape 19"/>
+          <p:cNvPr id="23" name="Shape 21"/>
           <p:cNvSpPr/>
           <p:nvPr/>
         </p:nvSpPr>
@@ -3761,14 +3941,14 @@
             </a:avLst>
           </a:prstGeom>
           <a:solidFill>
-            <a:srgbClr val="2E1F14"/>
-          </a:solidFill>
-          <a:ln/>
-        </p:spPr>
-      </p:sp>
-      <p:sp>
-        <p:nvSpPr>
-          <p:cNvPr id="22" name="Text 20"/>
+            <a:srgbClr val="AD3A38"/>
+          </a:solidFill>
+          <a:ln/>
+        </p:spPr>
+      </p:sp>
+      <p:sp>
+        <p:nvSpPr>
+          <p:cNvPr id="24" name="Text 22"/>
           <p:cNvSpPr/>
           <p:nvPr/>
         </p:nvSpPr>
@@ -3793,7 +3973,7 @@
             <a:r>
               <a:rPr lang="en-US" sz="1600" b="1" dirty="0">
                 <a:solidFill>
-                  <a:srgbClr val="C08552"/>
+                  <a:srgbClr val="FFCB64"/>
                 </a:solidFill>
                 <a:latin typeface="Tahoma" pitchFamily="34" charset="0"/>
                 <a:ea typeface="Tahoma" pitchFamily="34" charset="-122"/>
@@ -3807,7 +3987,7 @@
       </p:sp>
       <p:sp>
         <p:nvSpPr>
-          <p:cNvPr id="23" name="Text 21"/>
+          <p:cNvPr id="25" name="Text 23"/>
           <p:cNvSpPr/>
           <p:nvPr/>
         </p:nvSpPr>
@@ -3832,7 +4012,7 @@
             <a:r>
               <a:rPr lang="en-US" sz="1250" dirty="0">
                 <a:solidFill>
-                  <a:srgbClr val="EFE3D5"/>
+                  <a:srgbClr val="FBEBD0"/>
                 </a:solidFill>
                 <a:latin typeface="Tahoma" pitchFamily="34" charset="0"/>
                 <a:ea typeface="Tahoma" pitchFamily="34" charset="-122"/>
@@ -3846,7 +4026,7 @@
       </p:sp>
       <p:sp>
         <p:nvSpPr>
-          <p:cNvPr id="24" name="Text 22"/>
+          <p:cNvPr id="26" name="Text 24"/>
           <p:cNvSpPr/>
           <p:nvPr/>
         </p:nvSpPr>
@@ -3874,7 +4054,7 @@
             <a:r>
               <a:rPr lang="en-US" sz="1250" b="1" dirty="0">
                 <a:solidFill>
-                  <a:srgbClr val="9CBF8C"/>
+                  <a:srgbClr val="CFE3B8"/>
                 </a:solidFill>
                 <a:latin typeface="Tahoma" pitchFamily="34" charset="0"/>
                 <a:ea typeface="Tahoma" pitchFamily="34" charset="-122"/>
@@ -3891,7 +4071,7 @@
             <a:r>
               <a:rPr lang="en-US" sz="1250" dirty="0">
                 <a:solidFill>
-                  <a:srgbClr val="EFE3D5"/>
+                  <a:srgbClr val="FBEBD0"/>
                 </a:solidFill>
                 <a:latin typeface="Tahoma" pitchFamily="34" charset="0"/>
                 <a:ea typeface="Tahoma" pitchFamily="34" charset="-122"/>
@@ -3909,7 +4089,7 @@
             <a:r>
               <a:rPr lang="en-US" sz="1250" b="1" dirty="0">
                 <a:solidFill>
-                  <a:srgbClr val="C08552"/>
+                  <a:srgbClr val="FFCB64"/>
                 </a:solidFill>
                 <a:latin typeface="Tahoma" pitchFamily="34" charset="0"/>
                 <a:ea typeface="Tahoma" pitchFamily="34" charset="-122"/>
@@ -3926,7 +4106,7 @@
             <a:r>
               <a:rPr lang="en-US" sz="1250" dirty="0">
                 <a:solidFill>
-                  <a:srgbClr val="EFE3D5"/>
+                  <a:srgbClr val="FBEBD0"/>
                 </a:solidFill>
                 <a:latin typeface="Tahoma" pitchFamily="34" charset="0"/>
                 <a:ea typeface="Tahoma" pitchFamily="34" charset="-122"/>
@@ -3944,7 +4124,7 @@
             <a:r>
               <a:rPr lang="en-US" sz="1250" b="1" dirty="0">
                 <a:solidFill>
-                  <a:srgbClr val="E08A7A"/>
+                  <a:srgbClr val="F3C8B8"/>
                 </a:solidFill>
                 <a:latin typeface="Tahoma" pitchFamily="34" charset="0"/>
                 <a:ea typeface="Tahoma" pitchFamily="34" charset="-122"/>
@@ -3961,7 +4141,7 @@
             <a:r>
               <a:rPr lang="en-US" sz="1250" dirty="0">
                 <a:solidFill>
-                  <a:srgbClr val="EFE3D5"/>
+                  <a:srgbClr val="FBEBD0"/>
                 </a:solidFill>
                 <a:latin typeface="Tahoma" pitchFamily="34" charset="0"/>
                 <a:ea typeface="Tahoma" pitchFamily="34" charset="-122"/>
@@ -3975,14 +4155,14 @@
       </p:sp>
       <p:sp>
         <p:nvSpPr>
-          <p:cNvPr id="25" name="Text 23"/>
+          <p:cNvPr id="27" name="Text 25"/>
           <p:cNvSpPr/>
           <p:nvPr/>
         </p:nvSpPr>
         <p:spPr>
           <a:xfrm>
             <a:off x="640080" y="5989320"/>
-            <a:ext cx="10972800" cy="457200"/>
+            <a:ext cx="7772400" cy="457200"/>
           </a:xfrm>
           <a:prstGeom prst="rect">
             <a:avLst/>
@@ -4000,7 +4180,7 @@
             <a:r>
               <a:rPr lang="en-US" sz="1400" i="1" dirty="0">
                 <a:solidFill>
-                  <a:srgbClr val="7A4A26"/>
+                  <a:srgbClr val="C65E52"/>
                 </a:solidFill>
                 <a:latin typeface="Tahoma" pitchFamily="34" charset="0"/>
                 <a:ea typeface="Tahoma" pitchFamily="34" charset="-122"/>
@@ -4026,7 +4206,7 @@
     <p:bg>
       <p:bgPr>
         <a:solidFill>
-          <a:srgbClr val="2E1F14"/>
+          <a:srgbClr val="F6F2EC"/>
         </a:solidFill>
       </p:bgPr>
     </p:bg>
@@ -4046,13 +4226,73 @@
       </p:grpSpPr>
       <p:sp>
         <p:nvSpPr>
-          <p:cNvPr id="2" name="Text 0"/>
-          <p:cNvSpPr/>
-          <p:nvPr/>
-        </p:nvSpPr>
-        <p:spPr>
-          <a:xfrm>
-            <a:off x="822960" y="1234440"/>
+          <p:cNvPr id="2" name="Shape 0"/>
+          <p:cNvSpPr/>
+          <p:nvPr/>
+        </p:nvSpPr>
+        <p:spPr>
+          <a:xfrm>
+            <a:off x="11475720" y="-411480"/>
+            <a:ext cx="1188720" cy="1188720"/>
+          </a:xfrm>
+          <a:prstGeom prst="irregularSeal1">
+            <a:avLst/>
+          </a:prstGeom>
+          <a:solidFill>
+            <a:srgbClr val="AD3A38"/>
+          </a:solidFill>
+          <a:ln/>
+        </p:spPr>
+      </p:sp>
+      <p:sp>
+        <p:nvSpPr>
+          <p:cNvPr id="3" name="Shape 1"/>
+          <p:cNvSpPr/>
+          <p:nvPr/>
+        </p:nvSpPr>
+        <p:spPr>
+          <a:xfrm>
+            <a:off x="-411480" y="6080760"/>
+            <a:ext cx="1005840" cy="1005840"/>
+          </a:xfrm>
+          <a:prstGeom prst="ellipse">
+            <a:avLst/>
+          </a:prstGeom>
+          <a:solidFill>
+            <a:srgbClr val="FFCB64"/>
+          </a:solidFill>
+          <a:ln/>
+        </p:spPr>
+      </p:sp>
+      <p:sp>
+        <p:nvSpPr>
+          <p:cNvPr id="4" name="Shape 2"/>
+          <p:cNvSpPr/>
+          <p:nvPr/>
+        </p:nvSpPr>
+        <p:spPr>
+          <a:xfrm>
+            <a:off x="10927080" y="5989320"/>
+            <a:ext cx="868680" cy="868680"/>
+          </a:xfrm>
+          <a:prstGeom prst="irregularSeal1">
+            <a:avLst/>
+          </a:prstGeom>
+          <a:solidFill>
+            <a:srgbClr val="C65E52"/>
+          </a:solidFill>
+          <a:ln/>
+        </p:spPr>
+      </p:sp>
+      <p:sp>
+        <p:nvSpPr>
+          <p:cNvPr id="5" name="Text 3"/>
+          <p:cNvSpPr/>
+          <p:nvPr/>
+        </p:nvSpPr>
+        <p:spPr>
+          <a:xfrm>
+            <a:off x="822960" y="1188720"/>
             <a:ext cx="5486400" cy="457200"/>
           </a:xfrm>
           <a:prstGeom prst="rect">
@@ -4069,87 +4309,87 @@
               <a:buNone/>
             </a:pPr>
             <a:r>
+              <a:rPr lang="en-US" sz="1800" b="1" dirty="0">
+                <a:solidFill>
+                  <a:srgbClr val="C65E52"/>
+                </a:solidFill>
+                <a:latin typeface="Tahoma" pitchFamily="34" charset="0"/>
+                <a:ea typeface="Tahoma" pitchFamily="34" charset="-122"/>
+                <a:cs typeface="Tahoma" pitchFamily="34" charset="-120"/>
+              </a:rPr>
+              <a:t>ช่วงที่ 3</a:t>
+            </a:r>
+            <a:endParaRPr lang="en-US" sz="1800" dirty="0"/>
+          </a:p>
+        </p:txBody>
+      </p:sp>
+      <p:sp>
+        <p:nvSpPr>
+          <p:cNvPr id="6" name="Text 4"/>
+          <p:cNvSpPr/>
+          <p:nvPr/>
+        </p:nvSpPr>
+        <p:spPr>
+          <a:xfrm>
+            <a:off x="822960" y="1737360"/>
+            <a:ext cx="10515600" cy="1005840"/>
+          </a:xfrm>
+          <a:prstGeom prst="rect">
+            <a:avLst/>
+          </a:prstGeom>
+          <a:noFill/>
+          <a:ln/>
+        </p:spPr>
+        <p:txBody>
+          <a:bodyPr wrap="square" rtlCol="0" anchor="ctr"/>
+          <a:lstStyle/>
+          <a:p>
+            <a:pPr indent="0" marL="0">
+              <a:buNone/>
+            </a:pPr>
+            <a:r>
+              <a:rPr lang="en-US" sz="4000" b="1" dirty="0">
+                <a:solidFill>
+                  <a:srgbClr val="AD3A38"/>
+                </a:solidFill>
+                <a:latin typeface="Tahoma" pitchFamily="34" charset="0"/>
+                <a:ea typeface="Tahoma" pitchFamily="34" charset="-122"/>
+                <a:cs typeface="Tahoma" pitchFamily="34" charset="-120"/>
+              </a:rPr>
+              <a:t>Claude Code: สั่งสร้างระบบเองได้</a:t>
+            </a:r>
+            <a:endParaRPr lang="en-US" sz="4000" dirty="0"/>
+          </a:p>
+        </p:txBody>
+      </p:sp>
+      <p:sp>
+        <p:nvSpPr>
+          <p:cNvPr id="7" name="Text 5"/>
+          <p:cNvSpPr/>
+          <p:nvPr/>
+        </p:nvSpPr>
+        <p:spPr>
+          <a:xfrm>
+            <a:off x="822960" y="2834640"/>
+            <a:ext cx="9692640" cy="822960"/>
+          </a:xfrm>
+          <a:prstGeom prst="rect">
+            <a:avLst/>
+          </a:prstGeom>
+          <a:noFill/>
+          <a:ln/>
+        </p:spPr>
+        <p:txBody>
+          <a:bodyPr wrap="square" rtlCol="0" anchor="ctr"/>
+          <a:lstStyle/>
+          <a:p>
+            <a:pPr indent="0" marL="0">
+              <a:buNone/>
+            </a:pPr>
+            <a:r>
               <a:rPr lang="en-US" sz="1800" dirty="0">
                 <a:solidFill>
-                  <a:srgbClr val="C08552"/>
-                </a:solidFill>
-                <a:latin typeface="Tahoma" pitchFamily="34" charset="0"/>
-                <a:ea typeface="Tahoma" pitchFamily="34" charset="-122"/>
-                <a:cs typeface="Tahoma" pitchFamily="34" charset="-120"/>
-              </a:rPr>
-              <a:t>ช่วงที่ 3</a:t>
-            </a:r>
-            <a:endParaRPr lang="en-US" sz="1800" dirty="0"/>
-          </a:p>
-        </p:txBody>
-      </p:sp>
-      <p:sp>
-        <p:nvSpPr>
-          <p:cNvPr id="3" name="Text 1"/>
-          <p:cNvSpPr/>
-          <p:nvPr/>
-        </p:nvSpPr>
-        <p:spPr>
-          <a:xfrm>
-            <a:off x="822960" y="1783080"/>
-            <a:ext cx="10515600" cy="1005840"/>
-          </a:xfrm>
-          <a:prstGeom prst="rect">
-            <a:avLst/>
-          </a:prstGeom>
-          <a:noFill/>
-          <a:ln/>
-        </p:spPr>
-        <p:txBody>
-          <a:bodyPr wrap="square" rtlCol="0" anchor="ctr"/>
-          <a:lstStyle/>
-          <a:p>
-            <a:pPr indent="0" marL="0">
-              <a:buNone/>
-            </a:pPr>
-            <a:r>
-              <a:rPr lang="en-US" sz="4000" b="1" dirty="0">
-                <a:solidFill>
-                  <a:srgbClr val="FFFFFF"/>
-                </a:solidFill>
-                <a:latin typeface="Tahoma" pitchFamily="34" charset="0"/>
-                <a:ea typeface="Tahoma" pitchFamily="34" charset="-122"/>
-                <a:cs typeface="Tahoma" pitchFamily="34" charset="-120"/>
-              </a:rPr>
-              <a:t>Claude Code: สั่งสร้างระบบเองได้</a:t>
-            </a:r>
-            <a:endParaRPr lang="en-US" sz="4000" dirty="0"/>
-          </a:p>
-        </p:txBody>
-      </p:sp>
-      <p:sp>
-        <p:nvSpPr>
-          <p:cNvPr id="4" name="Text 2"/>
-          <p:cNvSpPr/>
-          <p:nvPr/>
-        </p:nvSpPr>
-        <p:spPr>
-          <a:xfrm>
-            <a:off x="822960" y="2880360"/>
-            <a:ext cx="10058400" cy="548640"/>
-          </a:xfrm>
-          <a:prstGeom prst="rect">
-            <a:avLst/>
-          </a:prstGeom>
-          <a:noFill/>
-          <a:ln/>
-        </p:spPr>
-        <p:txBody>
-          <a:bodyPr wrap="square" rtlCol="0" anchor="ctr"/>
-          <a:lstStyle/>
-          <a:p>
-            <a:pPr indent="0" marL="0">
-              <a:buNone/>
-            </a:pPr>
-            <a:r>
-              <a:rPr lang="en-US" sz="1800" dirty="0">
-                <a:solidFill>
-                  <a:srgbClr val="EFE3D5"/>
+                  <a:srgbClr val="2E2420"/>
                 </a:solidFill>
                 <a:latin typeface="Tahoma" pitchFamily="34" charset="0"/>
                 <a:ea typeface="Tahoma" pitchFamily="34" charset="-122"/>
@@ -4175,7 +4415,7 @@
     <p:bg>
       <p:bgPr>
         <a:solidFill>
-          <a:srgbClr val="FFFFFF"/>
+          <a:srgbClr val="F6F2EC"/>
         </a:solidFill>
       </p:bgPr>
     </p:bg>
@@ -4195,14 +4435,54 @@
       </p:grpSpPr>
       <p:sp>
         <p:nvSpPr>
-          <p:cNvPr id="2" name="Text 0"/>
+          <p:cNvPr id="2" name="Shape 0"/>
+          <p:cNvSpPr/>
+          <p:nvPr/>
+        </p:nvSpPr>
+        <p:spPr>
+          <a:xfrm>
+            <a:off x="11475720" y="-411480"/>
+            <a:ext cx="1188720" cy="1188720"/>
+          </a:xfrm>
+          <a:prstGeom prst="irregularSeal1">
+            <a:avLst/>
+          </a:prstGeom>
+          <a:solidFill>
+            <a:srgbClr val="AD3A38"/>
+          </a:solidFill>
+          <a:ln/>
+        </p:spPr>
+      </p:sp>
+      <p:sp>
+        <p:nvSpPr>
+          <p:cNvPr id="3" name="Shape 1"/>
+          <p:cNvSpPr/>
+          <p:nvPr/>
+        </p:nvSpPr>
+        <p:spPr>
+          <a:xfrm>
+            <a:off x="-411480" y="6080760"/>
+            <a:ext cx="1005840" cy="1005840"/>
+          </a:xfrm>
+          <a:prstGeom prst="ellipse">
+            <a:avLst/>
+          </a:prstGeom>
+          <a:solidFill>
+            <a:srgbClr val="FFCB64"/>
+          </a:solidFill>
+          <a:ln/>
+        </p:spPr>
+      </p:sp>
+      <p:sp>
+        <p:nvSpPr>
+          <p:cNvPr id="4" name="Text 2"/>
           <p:cNvSpPr/>
           <p:nvPr/>
         </p:nvSpPr>
         <p:spPr>
           <a:xfrm>
             <a:off x="640080" y="411480"/>
-            <a:ext cx="10972800" cy="731520"/>
+            <a:ext cx="10515600" cy="731520"/>
           </a:xfrm>
           <a:prstGeom prst="rect">
             <a:avLst/>
@@ -4220,7 +4500,7 @@
             <a:r>
               <a:rPr lang="en-US" sz="3000" b="1" dirty="0">
                 <a:solidFill>
-                  <a:srgbClr val="3B2A1A"/>
+                  <a:srgbClr val="AD3A38"/>
                 </a:solidFill>
                 <a:latin typeface="Tahoma" pitchFamily="34" charset="0"/>
                 <a:ea typeface="Tahoma" pitchFamily="34" charset="-122"/>
@@ -4234,7 +4514,7 @@
       </p:sp>
       <p:pic>
         <p:nvPicPr>
-          <p:cNvPr id="3" name="Image 0" descr="/tmp/claude-0/-home-user-sookkaya-dashboard/c6122b49-f379-56ef-bd1e-c7a902602563/scratchpad/dashboard-hero.png">    </p:cNvPr>
+          <p:cNvPr id="5" name="Image 0" descr="/tmp/claude-0/-home-user-sookkaya-dashboard/c6122b49-f379-56ef-bd1e-c7a902602563/scratchpad/dashboard-hero.png">    </p:cNvPr>
           <p:cNvPicPr>
             <a:picLocks noChangeAspect="1"/>
           </p:cNvPicPr>
@@ -4265,7 +4545,7 @@
       </p:pic>
       <p:sp>
         <p:nvSpPr>
-          <p:cNvPr id="4" name="Text 1"/>
+          <p:cNvPr id="6" name="Text 3"/>
           <p:cNvSpPr/>
           <p:nvPr/>
         </p:nvSpPr>
@@ -4304,7 +4584,7 @@
       </p:sp>
       <p:sp>
         <p:nvSpPr>
-          <p:cNvPr id="5" name="Shape 2"/>
+          <p:cNvPr id="7" name="Shape 4"/>
           <p:cNvSpPr/>
           <p:nvPr/>
         </p:nvSpPr>
@@ -4324,7 +4604,7 @@
       </p:sp>
       <p:pic>
         <p:nvPicPr>
-          <p:cNvPr id="6" name="Image 1" descr="preencoded.png">    </p:cNvPr>
+          <p:cNvPr id="8" name="Image 1" descr="preencoded.png">    </p:cNvPr>
           <p:cNvPicPr>
             <a:picLocks noChangeAspect="1"/>
           </p:cNvPicPr>
@@ -4348,7 +4628,7 @@
       </p:pic>
       <p:sp>
         <p:nvSpPr>
-          <p:cNvPr id="7" name="Text 3"/>
+          <p:cNvPr id="9" name="Text 5"/>
           <p:cNvSpPr/>
           <p:nvPr/>
         </p:nvSpPr>
@@ -4373,7 +4653,7 @@
             <a:r>
               <a:rPr lang="en-US" sz="1450" dirty="0">
                 <a:solidFill>
-                  <a:srgbClr val="3B2A1A"/>
+                  <a:srgbClr val="2E2420"/>
                 </a:solidFill>
                 <a:latin typeface="Tahoma" pitchFamily="34" charset="0"/>
                 <a:ea typeface="Tahoma" pitchFamily="34" charset="-122"/>
@@ -4387,7 +4667,7 @@
       </p:sp>
       <p:sp>
         <p:nvSpPr>
-          <p:cNvPr id="8" name="Shape 4"/>
+          <p:cNvPr id="10" name="Shape 6"/>
           <p:cNvSpPr/>
           <p:nvPr/>
         </p:nvSpPr>
@@ -4407,7 +4687,7 @@
       </p:sp>
       <p:pic>
         <p:nvPicPr>
-          <p:cNvPr id="9" name="Image 2" descr="preencoded.png">    </p:cNvPr>
+          <p:cNvPr id="11" name="Image 2" descr="preencoded.png">    </p:cNvPr>
           <p:cNvPicPr>
             <a:picLocks noChangeAspect="1"/>
           </p:cNvPicPr>
@@ -4431,7 +4711,7 @@
       </p:pic>
       <p:sp>
         <p:nvSpPr>
-          <p:cNvPr id="10" name="Text 5"/>
+          <p:cNvPr id="12" name="Text 7"/>
           <p:cNvSpPr/>
           <p:nvPr/>
         </p:nvSpPr>
@@ -4456,7 +4736,7 @@
             <a:r>
               <a:rPr lang="en-US" sz="1450" dirty="0">
                 <a:solidFill>
-                  <a:srgbClr val="3B2A1A"/>
+                  <a:srgbClr val="2E2420"/>
                 </a:solidFill>
                 <a:latin typeface="Tahoma" pitchFamily="34" charset="0"/>
                 <a:ea typeface="Tahoma" pitchFamily="34" charset="-122"/>
@@ -4470,7 +4750,7 @@
       </p:sp>
       <p:sp>
         <p:nvSpPr>
-          <p:cNvPr id="11" name="Shape 6"/>
+          <p:cNvPr id="13" name="Shape 8"/>
           <p:cNvSpPr/>
           <p:nvPr/>
         </p:nvSpPr>
@@ -4490,7 +4770,7 @@
       </p:sp>
       <p:pic>
         <p:nvPicPr>
-          <p:cNvPr id="12" name="Image 3" descr="preencoded.png">    </p:cNvPr>
+          <p:cNvPr id="14" name="Image 3" descr="preencoded.png">    </p:cNvPr>
           <p:cNvPicPr>
             <a:picLocks noChangeAspect="1"/>
           </p:cNvPicPr>
@@ -4514,7 +4794,7 @@
       </p:pic>
       <p:sp>
         <p:nvSpPr>
-          <p:cNvPr id="13" name="Text 7"/>
+          <p:cNvPr id="15" name="Text 9"/>
           <p:cNvSpPr/>
           <p:nvPr/>
         </p:nvSpPr>
@@ -4539,7 +4819,7 @@
             <a:r>
               <a:rPr lang="en-US" sz="1450" dirty="0">
                 <a:solidFill>
-                  <a:srgbClr val="3B2A1A"/>
+                  <a:srgbClr val="2E2420"/>
                 </a:solidFill>
                 <a:latin typeface="Tahoma" pitchFamily="34" charset="0"/>
                 <a:ea typeface="Tahoma" pitchFamily="34" charset="-122"/>
@@ -4553,7 +4833,7 @@
       </p:sp>
       <p:sp>
         <p:nvSpPr>
-          <p:cNvPr id="14" name="Shape 8"/>
+          <p:cNvPr id="16" name="Shape 10"/>
           <p:cNvSpPr/>
           <p:nvPr/>
         </p:nvSpPr>
@@ -4568,14 +4848,14 @@
             </a:avLst>
           </a:prstGeom>
           <a:solidFill>
-            <a:srgbClr val="F4ECE3"/>
-          </a:solidFill>
-          <a:ln/>
-        </p:spPr>
-      </p:sp>
-      <p:sp>
-        <p:nvSpPr>
-          <p:cNvPr id="15" name="Text 9"/>
+            <a:srgbClr val="FBEBD0"/>
+          </a:solidFill>
+          <a:ln/>
+        </p:spPr>
+      </p:sp>
+      <p:sp>
+        <p:nvSpPr>
+          <p:cNvPr id="17" name="Text 11"/>
           <p:cNvSpPr/>
           <p:nvPr/>
         </p:nvSpPr>
@@ -4600,7 +4880,7 @@
             <a:r>
               <a:rPr lang="en-US" sz="1400" b="1" dirty="0">
                 <a:solidFill>
-                  <a:srgbClr val="7A4A26"/>
+                  <a:srgbClr val="AD3A38"/>
                 </a:solidFill>
                 <a:latin typeface="Tahoma" pitchFamily="34" charset="0"/>
                 <a:ea typeface="Tahoma" pitchFamily="34" charset="-122"/>
@@ -4615,7 +4895,7 @@
             <a:r>
               <a:rPr lang="en-US" sz="1400" i="1" dirty="0">
                 <a:solidFill>
-                  <a:srgbClr val="3B2A1A"/>
+                  <a:srgbClr val="2E2420"/>
                 </a:solidFill>
                 <a:latin typeface="Tahoma" pitchFamily="34" charset="0"/>
                 <a:ea typeface="Tahoma" pitchFamily="34" charset="-122"/>
@@ -4641,7 +4921,7 @@
     <p:bg>
       <p:bgPr>
         <a:solidFill>
-          <a:srgbClr val="FFFFFF"/>
+          <a:srgbClr val="F6F2EC"/>
         </a:solidFill>
       </p:bgPr>
     </p:bg>
@@ -4661,14 +4941,54 @@
       </p:grpSpPr>
       <p:sp>
         <p:nvSpPr>
-          <p:cNvPr id="2" name="Text 0"/>
+          <p:cNvPr id="2" name="Shape 0"/>
+          <p:cNvSpPr/>
+          <p:nvPr/>
+        </p:nvSpPr>
+        <p:spPr>
+          <a:xfrm>
+            <a:off x="11475720" y="-411480"/>
+            <a:ext cx="1188720" cy="1188720"/>
+          </a:xfrm>
+          <a:prstGeom prst="irregularSeal1">
+            <a:avLst/>
+          </a:prstGeom>
+          <a:solidFill>
+            <a:srgbClr val="AD3A38"/>
+          </a:solidFill>
+          <a:ln/>
+        </p:spPr>
+      </p:sp>
+      <p:sp>
+        <p:nvSpPr>
+          <p:cNvPr id="3" name="Shape 1"/>
+          <p:cNvSpPr/>
+          <p:nvPr/>
+        </p:nvSpPr>
+        <p:spPr>
+          <a:xfrm>
+            <a:off x="-411480" y="6080760"/>
+            <a:ext cx="1005840" cy="1005840"/>
+          </a:xfrm>
+          <a:prstGeom prst="ellipse">
+            <a:avLst/>
+          </a:prstGeom>
+          <a:solidFill>
+            <a:srgbClr val="FFCB64"/>
+          </a:solidFill>
+          <a:ln/>
+        </p:spPr>
+      </p:sp>
+      <p:sp>
+        <p:nvSpPr>
+          <p:cNvPr id="4" name="Text 2"/>
           <p:cNvSpPr/>
           <p:nvPr/>
         </p:nvSpPr>
         <p:spPr>
           <a:xfrm>
             <a:off x="640080" y="411480"/>
-            <a:ext cx="10972800" cy="731520"/>
+            <a:ext cx="10515600" cy="731520"/>
           </a:xfrm>
           <a:prstGeom prst="rect">
             <a:avLst/>
@@ -4686,7 +5006,7 @@
             <a:r>
               <a:rPr lang="en-US" sz="3200" b="1" dirty="0">
                 <a:solidFill>
-                  <a:srgbClr val="3B2A1A"/>
+                  <a:srgbClr val="AD3A38"/>
                 </a:solidFill>
                 <a:latin typeface="Tahoma" pitchFamily="34" charset="0"/>
                 <a:ea typeface="Tahoma" pitchFamily="34" charset="-122"/>
@@ -4700,7 +5020,7 @@
       </p:sp>
       <p:sp>
         <p:nvSpPr>
-          <p:cNvPr id="3" name="Shape 1"/>
+          <p:cNvPr id="5" name="Shape 3"/>
           <p:cNvSpPr/>
           <p:nvPr/>
         </p:nvSpPr>
@@ -4715,7 +5035,7 @@
             </a:avLst>
           </a:prstGeom>
           <a:solidFill>
-            <a:srgbClr val="F4ECE3"/>
+            <a:srgbClr val="FBEBD0"/>
           </a:solidFill>
           <a:ln/>
           <a:effectLst>
@@ -4729,7 +5049,7 @@
       </p:sp>
       <p:sp>
         <p:nvSpPr>
-          <p:cNvPr id="4" name="Shape 2"/>
+          <p:cNvPr id="6" name="Shape 4"/>
           <p:cNvSpPr/>
           <p:nvPr/>
         </p:nvSpPr>
@@ -4742,14 +5062,14 @@
             <a:avLst/>
           </a:prstGeom>
           <a:solidFill>
-            <a:srgbClr val="7A4A26"/>
+            <a:srgbClr val="AD3A38"/>
           </a:solidFill>
           <a:ln/>
         </p:spPr>
       </p:sp>
       <p:pic>
         <p:nvPicPr>
-          <p:cNvPr id="5" name="Image 0" descr="preencoded.png">    </p:cNvPr>
+          <p:cNvPr id="7" name="Image 0" descr="preencoded.png">    </p:cNvPr>
           <p:cNvPicPr>
             <a:picLocks noChangeAspect="1"/>
           </p:cNvPicPr>
@@ -4773,7 +5093,7 @@
       </p:pic>
       <p:sp>
         <p:nvSpPr>
-          <p:cNvPr id="6" name="Text 3"/>
+          <p:cNvPr id="8" name="Text 5"/>
           <p:cNvSpPr/>
           <p:nvPr/>
         </p:nvSpPr>
@@ -4798,7 +5118,7 @@
             <a:r>
               <a:rPr lang="en-US" sz="2000" b="1" dirty="0">
                 <a:solidFill>
-                  <a:srgbClr val="3B2A1A"/>
+                  <a:srgbClr val="2E2420"/>
                 </a:solidFill>
                 <a:latin typeface="Tahoma" pitchFamily="34" charset="0"/>
                 <a:ea typeface="Tahoma" pitchFamily="34" charset="-122"/>
@@ -4812,7 +5132,7 @@
       </p:sp>
       <p:sp>
         <p:nvSpPr>
-          <p:cNvPr id="7" name="Text 4"/>
+          <p:cNvPr id="9" name="Text 6"/>
           <p:cNvSpPr/>
           <p:nvPr/>
         </p:nvSpPr>
@@ -4851,7 +5171,7 @@
       </p:sp>
       <p:sp>
         <p:nvSpPr>
-          <p:cNvPr id="8" name="Shape 5"/>
+          <p:cNvPr id="10" name="Shape 7"/>
           <p:cNvSpPr/>
           <p:nvPr/>
         </p:nvSpPr>
@@ -4866,7 +5186,7 @@
             </a:avLst>
           </a:prstGeom>
           <a:solidFill>
-            <a:srgbClr val="F4ECE3"/>
+            <a:srgbClr val="FBEBD0"/>
           </a:solidFill>
           <a:ln/>
           <a:effectLst>
@@ -4880,7 +5200,7 @@
       </p:sp>
       <p:sp>
         <p:nvSpPr>
-          <p:cNvPr id="9" name="Shape 6"/>
+          <p:cNvPr id="11" name="Shape 8"/>
           <p:cNvSpPr/>
           <p:nvPr/>
         </p:nvSpPr>
@@ -4893,14 +5213,14 @@
             <a:avLst/>
           </a:prstGeom>
           <a:solidFill>
-            <a:srgbClr val="9A6A3A"/>
+            <a:srgbClr val="C65E52"/>
           </a:solidFill>
           <a:ln/>
         </p:spPr>
       </p:sp>
       <p:pic>
         <p:nvPicPr>
-          <p:cNvPr id="10" name="Image 1" descr="preencoded.png">    </p:cNvPr>
+          <p:cNvPr id="12" name="Image 1" descr="preencoded.png">    </p:cNvPr>
           <p:cNvPicPr>
             <a:picLocks noChangeAspect="1"/>
           </p:cNvPicPr>
@@ -4924,7 +5244,7 @@
       </p:pic>
       <p:sp>
         <p:nvSpPr>
-          <p:cNvPr id="11" name="Text 7"/>
+          <p:cNvPr id="13" name="Text 9"/>
           <p:cNvSpPr/>
           <p:nvPr/>
         </p:nvSpPr>
@@ -4949,7 +5269,7 @@
             <a:r>
               <a:rPr lang="en-US" sz="2000" b="1" dirty="0">
                 <a:solidFill>
-                  <a:srgbClr val="3B2A1A"/>
+                  <a:srgbClr val="2E2420"/>
                 </a:solidFill>
                 <a:latin typeface="Tahoma" pitchFamily="34" charset="0"/>
                 <a:ea typeface="Tahoma" pitchFamily="34" charset="-122"/>
@@ -4963,7 +5283,7 @@
       </p:sp>
       <p:sp>
         <p:nvSpPr>
-          <p:cNvPr id="12" name="Text 8"/>
+          <p:cNvPr id="14" name="Text 10"/>
           <p:cNvSpPr/>
           <p:nvPr/>
         </p:nvSpPr>
@@ -5019,7 +5339,7 @@
       </p:sp>
       <p:sp>
         <p:nvSpPr>
-          <p:cNvPr id="13" name="Shape 9"/>
+          <p:cNvPr id="15" name="Shape 11"/>
           <p:cNvSpPr/>
           <p:nvPr/>
         </p:nvSpPr>
@@ -5034,7 +5354,7 @@
             </a:avLst>
           </a:prstGeom>
           <a:solidFill>
-            <a:srgbClr val="F4ECE3"/>
+            <a:srgbClr val="FBEBD0"/>
           </a:solidFill>
           <a:ln/>
           <a:effectLst>
@@ -5048,7 +5368,7 @@
       </p:sp>
       <p:sp>
         <p:nvSpPr>
-          <p:cNvPr id="14" name="Shape 10"/>
+          <p:cNvPr id="16" name="Shape 12"/>
           <p:cNvSpPr/>
           <p:nvPr/>
         </p:nvSpPr>
@@ -5068,7 +5388,7 @@
       </p:sp>
       <p:pic>
         <p:nvPicPr>
-          <p:cNvPr id="15" name="Image 2" descr="preencoded.png">    </p:cNvPr>
+          <p:cNvPr id="17" name="Image 2" descr="preencoded.png">    </p:cNvPr>
           <p:cNvPicPr>
             <a:picLocks noChangeAspect="1"/>
           </p:cNvPicPr>
@@ -5092,7 +5412,7 @@
       </p:pic>
       <p:sp>
         <p:nvSpPr>
-          <p:cNvPr id="16" name="Text 11"/>
+          <p:cNvPr id="18" name="Text 13"/>
           <p:cNvSpPr/>
           <p:nvPr/>
         </p:nvSpPr>
@@ -5117,7 +5437,7 @@
             <a:r>
               <a:rPr lang="en-US" sz="2000" b="1" dirty="0">
                 <a:solidFill>
-                  <a:srgbClr val="3B2A1A"/>
+                  <a:srgbClr val="2E2420"/>
                 </a:solidFill>
                 <a:latin typeface="Tahoma" pitchFamily="34" charset="0"/>
                 <a:ea typeface="Tahoma" pitchFamily="34" charset="-122"/>
@@ -5131,7 +5451,7 @@
       </p:sp>
       <p:sp>
         <p:nvSpPr>
-          <p:cNvPr id="17" name="Text 12"/>
+          <p:cNvPr id="19" name="Text 14"/>
           <p:cNvSpPr/>
           <p:nvPr/>
         </p:nvSpPr>
@@ -5187,14 +5507,14 @@
       </p:sp>
       <p:sp>
         <p:nvSpPr>
-          <p:cNvPr id="18" name="Text 13"/>
+          <p:cNvPr id="20" name="Text 15"/>
           <p:cNvSpPr/>
           <p:nvPr/>
         </p:nvSpPr>
         <p:spPr>
           <a:xfrm>
             <a:off x="640080" y="5257800"/>
-            <a:ext cx="10972800" cy="457200"/>
+            <a:ext cx="10515600" cy="457200"/>
           </a:xfrm>
           <a:prstGeom prst="rect">
             <a:avLst/>
@@ -5212,7 +5532,7 @@
             <a:r>
               <a:rPr lang="en-US" sz="1500" i="1" dirty="0">
                 <a:solidFill>
-                  <a:srgbClr val="7A4A26"/>
+                  <a:srgbClr val="C65E52"/>
                 </a:solidFill>
                 <a:latin typeface="Tahoma" pitchFamily="34" charset="0"/>
                 <a:ea typeface="Tahoma" pitchFamily="34" charset="-122"/>
@@ -5238,7 +5558,7 @@
     <p:bg>
       <p:bgPr>
         <a:solidFill>
-          <a:srgbClr val="2E1F14"/>
+          <a:srgbClr val="F6F2EC"/>
         </a:solidFill>
       </p:bgPr>
     </p:bg>
@@ -5258,13 +5578,113 @@
       </p:grpSpPr>
       <p:sp>
         <p:nvSpPr>
-          <p:cNvPr id="2" name="Text 0"/>
-          <p:cNvSpPr/>
-          <p:nvPr/>
-        </p:nvSpPr>
-        <p:spPr>
-          <a:xfrm>
-            <a:off x="731520" y="1005840"/>
+          <p:cNvPr id="2" name="Shape 0"/>
+          <p:cNvSpPr/>
+          <p:nvPr/>
+        </p:nvSpPr>
+        <p:spPr>
+          <a:xfrm>
+            <a:off x="11109960" y="-685800"/>
+            <a:ext cx="1920240" cy="1920240"/>
+          </a:xfrm>
+          <a:prstGeom prst="irregularSeal1">
+            <a:avLst/>
+          </a:prstGeom>
+          <a:solidFill>
+            <a:srgbClr val="AD3A38"/>
+          </a:solidFill>
+          <a:ln/>
+        </p:spPr>
+      </p:sp>
+      <p:sp>
+        <p:nvSpPr>
+          <p:cNvPr id="3" name="Shape 1"/>
+          <p:cNvSpPr/>
+          <p:nvPr/>
+        </p:nvSpPr>
+        <p:spPr>
+          <a:xfrm>
+            <a:off x="-777240" y="5440680"/>
+            <a:ext cx="1920240" cy="1920240"/>
+          </a:xfrm>
+          <a:prstGeom prst="irregularSeal1">
+            <a:avLst/>
+          </a:prstGeom>
+          <a:solidFill>
+            <a:srgbClr val="AD3A38"/>
+          </a:solidFill>
+          <a:ln/>
+        </p:spPr>
+      </p:sp>
+      <p:sp>
+        <p:nvSpPr>
+          <p:cNvPr id="4" name="Shape 2"/>
+          <p:cNvSpPr/>
+          <p:nvPr/>
+        </p:nvSpPr>
+        <p:spPr>
+          <a:xfrm>
+            <a:off x="1051560" y="914400"/>
+            <a:ext cx="914400" cy="914400"/>
+          </a:xfrm>
+          <a:prstGeom prst="ellipse">
+            <a:avLst/>
+          </a:prstGeom>
+          <a:solidFill>
+            <a:srgbClr val="FFCB64"/>
+          </a:solidFill>
+          <a:ln/>
+        </p:spPr>
+      </p:sp>
+      <p:sp>
+        <p:nvSpPr>
+          <p:cNvPr id="5" name="Shape 3"/>
+          <p:cNvSpPr/>
+          <p:nvPr/>
+        </p:nvSpPr>
+        <p:spPr>
+          <a:xfrm>
+            <a:off x="10195560" y="5212080"/>
+            <a:ext cx="914400" cy="914400"/>
+          </a:xfrm>
+          <a:prstGeom prst="ellipse">
+            <a:avLst/>
+          </a:prstGeom>
+          <a:solidFill>
+            <a:srgbClr val="FFCB64"/>
+          </a:solidFill>
+          <a:ln/>
+        </p:spPr>
+      </p:sp>
+      <p:sp>
+        <p:nvSpPr>
+          <p:cNvPr id="6" name="Shape 4"/>
+          <p:cNvSpPr/>
+          <p:nvPr/>
+        </p:nvSpPr>
+        <p:spPr>
+          <a:xfrm>
+            <a:off x="10881360" y="5943600"/>
+            <a:ext cx="914400" cy="914400"/>
+          </a:xfrm>
+          <a:prstGeom prst="irregularSeal1">
+            <a:avLst/>
+          </a:prstGeom>
+          <a:solidFill>
+            <a:srgbClr val="C65E52"/>
+          </a:solidFill>
+          <a:ln/>
+        </p:spPr>
+      </p:sp>
+      <p:sp>
+        <p:nvSpPr>
+          <p:cNvPr id="7" name="Text 5"/>
+          <p:cNvSpPr/>
+          <p:nvPr/>
+        </p:nvSpPr>
+        <p:spPr>
+          <a:xfrm>
+            <a:off x="731520" y="914400"/>
             <a:ext cx="10698480" cy="822960"/>
           </a:xfrm>
           <a:prstGeom prst="rect">
@@ -5281,9 +5701,9 @@
               <a:buNone/>
             </a:pPr>
             <a:r>
-              <a:rPr lang="en-US" sz="4000" b="1" dirty="0">
-                <a:solidFill>
-                  <a:srgbClr val="FFFFFF"/>
+              <a:rPr lang="en-US" sz="4400" b="1" dirty="0">
+                <a:solidFill>
+                  <a:srgbClr val="AD3A38"/>
                 </a:solidFill>
                 <a:latin typeface="Tahoma" pitchFamily="34" charset="0"/>
                 <a:ea typeface="Tahoma" pitchFamily="34" charset="-122"/>
@@ -5291,19 +5711,19 @@
               </a:rPr>
               <a:t>การบ้าน</a:t>
             </a:r>
-            <a:endParaRPr lang="en-US" sz="4000" dirty="0"/>
-          </a:p>
-        </p:txBody>
-      </p:sp>
-      <p:sp>
-        <p:nvSpPr>
-          <p:cNvPr id="3" name="Text 1"/>
-          <p:cNvSpPr/>
-          <p:nvPr/>
-        </p:nvSpPr>
-        <p:spPr>
-          <a:xfrm>
-            <a:off x="731520" y="1965960"/>
+            <a:endParaRPr lang="en-US" sz="4400" dirty="0"/>
+          </a:p>
+        </p:txBody>
+      </p:sp>
+      <p:sp>
+        <p:nvSpPr>
+          <p:cNvPr id="8" name="Text 6"/>
+          <p:cNvSpPr/>
+          <p:nvPr/>
+        </p:nvSpPr>
+        <p:spPr>
+          <a:xfrm>
+            <a:off x="731520" y="1920240"/>
             <a:ext cx="10698480" cy="548640"/>
           </a:xfrm>
           <a:prstGeom prst="rect">
@@ -5320,9 +5740,9 @@
               <a:buNone/>
             </a:pPr>
             <a:r>
-              <a:rPr lang="en-US" sz="2200" dirty="0">
-                <a:solidFill>
-                  <a:srgbClr val="C08552"/>
+              <a:rPr lang="en-US" sz="2200" b="1" dirty="0">
+                <a:solidFill>
+                  <a:srgbClr val="2E2420"/>
                 </a:solidFill>
                 <a:latin typeface="Tahoma" pitchFamily="34" charset="0"/>
                 <a:ea typeface="Tahoma" pitchFamily="34" charset="-122"/>
@@ -5336,13 +5756,13 @@
       </p:sp>
       <p:sp>
         <p:nvSpPr>
-          <p:cNvPr id="4" name="Text 2"/>
-          <p:cNvSpPr/>
-          <p:nvPr/>
-        </p:nvSpPr>
-        <p:spPr>
-          <a:xfrm>
-            <a:off x="731520" y="2606040"/>
+          <p:cNvPr id="9" name="Text 7"/>
+          <p:cNvSpPr/>
+          <p:nvPr/>
+        </p:nvSpPr>
+        <p:spPr>
+          <a:xfrm>
+            <a:off x="731520" y="2560320"/>
             <a:ext cx="10698480" cy="548640"/>
           </a:xfrm>
           <a:prstGeom prst="rect">
@@ -5361,7 +5781,7 @@
             <a:r>
               <a:rPr lang="en-US" sz="1600" dirty="0">
                 <a:solidFill>
-                  <a:srgbClr val="EFE3D5"/>
+                  <a:srgbClr val="8A6F57"/>
                 </a:solidFill>
                 <a:latin typeface="Tahoma" pitchFamily="34" charset="0"/>
                 <a:ea typeface="Tahoma" pitchFamily="34" charset="-122"/>
@@ -5375,13 +5795,13 @@
       </p:sp>
       <p:sp>
         <p:nvSpPr>
-          <p:cNvPr id="5" name="Shape 3"/>
-          <p:cNvSpPr/>
-          <p:nvPr/>
-        </p:nvSpPr>
-        <p:spPr>
-          <a:xfrm>
-            <a:off x="1463040" y="3840480"/>
+          <p:cNvPr id="10" name="Shape 8"/>
+          <p:cNvSpPr/>
+          <p:nvPr/>
+        </p:nvSpPr>
+        <p:spPr>
+          <a:xfrm>
+            <a:off x="1463040" y="3794760"/>
             <a:ext cx="3017520" cy="1371600"/>
           </a:xfrm>
           <a:prstGeom prst="roundRect">
@@ -5390,34 +5810,41 @@
             </a:avLst>
           </a:prstGeom>
           <a:solidFill>
-            <a:srgbClr val="42301F"/>
-          </a:solidFill>
-          <a:ln/>
-        </p:spPr>
-      </p:sp>
-      <p:sp>
-        <p:nvSpPr>
-          <p:cNvPr id="6" name="Shape 4"/>
-          <p:cNvSpPr/>
-          <p:nvPr/>
-        </p:nvSpPr>
-        <p:spPr>
-          <a:xfrm>
-            <a:off x="2743200" y="4023360"/>
+            <a:srgbClr val="FBEBD0"/>
+          </a:solidFill>
+          <a:ln/>
+          <a:effectLst>
+            <a:outerShdw sx="100000" sy="100000" kx="0" ky="0" algn="bl" rotWithShape="0" blurRad="63500" dist="25400" dir="5400000">
+              <a:srgbClr val="000000">
+                <a:alpha val="15000"/>
+              </a:srgbClr>
+            </a:outerShdw>
+          </a:effectLst>
+        </p:spPr>
+      </p:sp>
+      <p:sp>
+        <p:nvSpPr>
+          <p:cNvPr id="11" name="Shape 9"/>
+          <p:cNvSpPr/>
+          <p:nvPr/>
+        </p:nvSpPr>
+        <p:spPr>
+          <a:xfrm>
+            <a:off x="2743200" y="3977640"/>
             <a:ext cx="502920" cy="502920"/>
           </a:xfrm>
           <a:prstGeom prst="ellipse">
             <a:avLst/>
           </a:prstGeom>
           <a:solidFill>
-            <a:srgbClr val="7A4A26"/>
+            <a:srgbClr val="AD3A38"/>
           </a:solidFill>
           <a:ln/>
         </p:spPr>
       </p:sp>
       <p:pic>
         <p:nvPicPr>
-          <p:cNvPr id="7" name="Image 0" descr="preencoded.png">    </p:cNvPr>
+          <p:cNvPr id="12" name="Image 0" descr="preencoded.png">    </p:cNvPr>
           <p:cNvPicPr>
             <a:picLocks noChangeAspect="1"/>
           </p:cNvPicPr>
@@ -5431,7 +5858,7 @@
         </p:blipFill>
         <p:spPr>
           <a:xfrm>
-            <a:off x="2873959" y="4154119"/>
+            <a:off x="2873959" y="4108399"/>
             <a:ext cx="241402" cy="241402"/>
           </a:xfrm>
           <a:prstGeom prst="rect">
@@ -5441,13 +5868,13 @@
       </p:pic>
       <p:sp>
         <p:nvSpPr>
-          <p:cNvPr id="8" name="Text 5"/>
-          <p:cNvSpPr/>
-          <p:nvPr/>
-        </p:nvSpPr>
-        <p:spPr>
-          <a:xfrm>
-            <a:off x="1600200" y="4617720"/>
+          <p:cNvPr id="13" name="Text 10"/>
+          <p:cNvSpPr/>
+          <p:nvPr/>
+        </p:nvSpPr>
+        <p:spPr>
+          <a:xfrm>
+            <a:off x="1600200" y="4572000"/>
             <a:ext cx="2743200" cy="457200"/>
           </a:xfrm>
           <a:prstGeom prst="rect">
@@ -5466,7 +5893,7 @@
             <a:r>
               <a:rPr lang="en-US" sz="1300" dirty="0">
                 <a:solidFill>
-                  <a:srgbClr val="EFE3D5"/>
+                  <a:srgbClr val="2E2420"/>
                 </a:solidFill>
                 <a:latin typeface="Tahoma" pitchFamily="34" charset="0"/>
                 <a:ea typeface="Tahoma" pitchFamily="34" charset="-122"/>
@@ -5480,13 +5907,13 @@
       </p:sp>
       <p:sp>
         <p:nvSpPr>
-          <p:cNvPr id="9" name="Shape 6"/>
-          <p:cNvSpPr/>
-          <p:nvPr/>
-        </p:nvSpPr>
-        <p:spPr>
-          <a:xfrm>
-            <a:off x="4709160" y="3840480"/>
+          <p:cNvPr id="14" name="Shape 11"/>
+          <p:cNvSpPr/>
+          <p:nvPr/>
+        </p:nvSpPr>
+        <p:spPr>
+          <a:xfrm>
+            <a:off x="4709160" y="3794760"/>
             <a:ext cx="3017520" cy="1371600"/>
           </a:xfrm>
           <a:prstGeom prst="roundRect">
@@ -5495,34 +5922,41 @@
             </a:avLst>
           </a:prstGeom>
           <a:solidFill>
-            <a:srgbClr val="42301F"/>
-          </a:solidFill>
-          <a:ln/>
-        </p:spPr>
-      </p:sp>
-      <p:sp>
-        <p:nvSpPr>
-          <p:cNvPr id="10" name="Shape 7"/>
-          <p:cNvSpPr/>
-          <p:nvPr/>
-        </p:nvSpPr>
-        <p:spPr>
-          <a:xfrm>
-            <a:off x="5989320" y="4023360"/>
+            <a:srgbClr val="FBEBD0"/>
+          </a:solidFill>
+          <a:ln/>
+          <a:effectLst>
+            <a:outerShdw sx="100000" sy="100000" kx="0" ky="0" algn="bl" rotWithShape="0" blurRad="63500" dist="25400" dir="5400000">
+              <a:srgbClr val="000000">
+                <a:alpha val="15000"/>
+              </a:srgbClr>
+            </a:outerShdw>
+          </a:effectLst>
+        </p:spPr>
+      </p:sp>
+      <p:sp>
+        <p:nvSpPr>
+          <p:cNvPr id="15" name="Shape 12"/>
+          <p:cNvSpPr/>
+          <p:nvPr/>
+        </p:nvSpPr>
+        <p:spPr>
+          <a:xfrm>
+            <a:off x="5989320" y="3977640"/>
             <a:ext cx="502920" cy="502920"/>
           </a:xfrm>
           <a:prstGeom prst="ellipse">
             <a:avLst/>
           </a:prstGeom>
           <a:solidFill>
-            <a:srgbClr val="7A4A26"/>
+            <a:srgbClr val="AD3A38"/>
           </a:solidFill>
           <a:ln/>
         </p:spPr>
       </p:sp>
       <p:pic>
         <p:nvPicPr>
-          <p:cNvPr id="11" name="Image 1" descr="preencoded.png">    </p:cNvPr>
+          <p:cNvPr id="16" name="Image 1" descr="preencoded.png">    </p:cNvPr>
           <p:cNvPicPr>
             <a:picLocks noChangeAspect="1"/>
           </p:cNvPicPr>
@@ -5536,7 +5970,7 @@
         </p:blipFill>
         <p:spPr>
           <a:xfrm>
-            <a:off x="6120079" y="4154119"/>
+            <a:off x="6120079" y="4108399"/>
             <a:ext cx="241402" cy="241402"/>
           </a:xfrm>
           <a:prstGeom prst="rect">
@@ -5546,13 +5980,13 @@
       </p:pic>
       <p:sp>
         <p:nvSpPr>
-          <p:cNvPr id="12" name="Text 8"/>
-          <p:cNvSpPr/>
-          <p:nvPr/>
-        </p:nvSpPr>
-        <p:spPr>
-          <a:xfrm>
-            <a:off x="4846320" y="4617720"/>
+          <p:cNvPr id="17" name="Text 13"/>
+          <p:cNvSpPr/>
+          <p:nvPr/>
+        </p:nvSpPr>
+        <p:spPr>
+          <a:xfrm>
+            <a:off x="4846320" y="4572000"/>
             <a:ext cx="2743200" cy="457200"/>
           </a:xfrm>
           <a:prstGeom prst="rect">
@@ -5571,7 +6005,7 @@
             <a:r>
               <a:rPr lang="en-US" sz="1300" dirty="0">
                 <a:solidFill>
-                  <a:srgbClr val="EFE3D5"/>
+                  <a:srgbClr val="2E2420"/>
                 </a:solidFill>
                 <a:latin typeface="Tahoma" pitchFamily="34" charset="0"/>
                 <a:ea typeface="Tahoma" pitchFamily="34" charset="-122"/>
@@ -5585,13 +6019,13 @@
       </p:sp>
       <p:sp>
         <p:nvSpPr>
-          <p:cNvPr id="13" name="Shape 9"/>
-          <p:cNvSpPr/>
-          <p:nvPr/>
-        </p:nvSpPr>
-        <p:spPr>
-          <a:xfrm>
-            <a:off x="7955280" y="3840480"/>
+          <p:cNvPr id="18" name="Shape 14"/>
+          <p:cNvSpPr/>
+          <p:nvPr/>
+        </p:nvSpPr>
+        <p:spPr>
+          <a:xfrm>
+            <a:off x="7955280" y="3794760"/>
             <a:ext cx="3017520" cy="1371600"/>
           </a:xfrm>
           <a:prstGeom prst="roundRect">
@@ -5600,34 +6034,41 @@
             </a:avLst>
           </a:prstGeom>
           <a:solidFill>
-            <a:srgbClr val="42301F"/>
-          </a:solidFill>
-          <a:ln/>
-        </p:spPr>
-      </p:sp>
-      <p:sp>
-        <p:nvSpPr>
-          <p:cNvPr id="14" name="Shape 10"/>
-          <p:cNvSpPr/>
-          <p:nvPr/>
-        </p:nvSpPr>
-        <p:spPr>
-          <a:xfrm>
-            <a:off x="9235440" y="4023360"/>
+            <a:srgbClr val="FBEBD0"/>
+          </a:solidFill>
+          <a:ln/>
+          <a:effectLst>
+            <a:outerShdw sx="100000" sy="100000" kx="0" ky="0" algn="bl" rotWithShape="0" blurRad="63500" dist="25400" dir="5400000">
+              <a:srgbClr val="000000">
+                <a:alpha val="15000"/>
+              </a:srgbClr>
+            </a:outerShdw>
+          </a:effectLst>
+        </p:spPr>
+      </p:sp>
+      <p:sp>
+        <p:nvSpPr>
+          <p:cNvPr id="19" name="Shape 15"/>
+          <p:cNvSpPr/>
+          <p:nvPr/>
+        </p:nvSpPr>
+        <p:spPr>
+          <a:xfrm>
+            <a:off x="9235440" y="3977640"/>
             <a:ext cx="502920" cy="502920"/>
           </a:xfrm>
           <a:prstGeom prst="ellipse">
             <a:avLst/>
           </a:prstGeom>
           <a:solidFill>
-            <a:srgbClr val="7A4A26"/>
+            <a:srgbClr val="AD3A38"/>
           </a:solidFill>
           <a:ln/>
         </p:spPr>
       </p:sp>
       <p:pic>
         <p:nvPicPr>
-          <p:cNvPr id="15" name="Image 2" descr="preencoded.png">    </p:cNvPr>
+          <p:cNvPr id="20" name="Image 2" descr="preencoded.png">    </p:cNvPr>
           <p:cNvPicPr>
             <a:picLocks noChangeAspect="1"/>
           </p:cNvPicPr>
@@ -5641,7 +6082,7 @@
         </p:blipFill>
         <p:spPr>
           <a:xfrm>
-            <a:off x="9366199" y="4154119"/>
+            <a:off x="9366199" y="4108399"/>
             <a:ext cx="241402" cy="241402"/>
           </a:xfrm>
           <a:prstGeom prst="rect">
@@ -5651,13 +6092,13 @@
       </p:pic>
       <p:sp>
         <p:nvSpPr>
-          <p:cNvPr id="16" name="Text 11"/>
-          <p:cNvSpPr/>
-          <p:nvPr/>
-        </p:nvSpPr>
-        <p:spPr>
-          <a:xfrm>
-            <a:off x="8092440" y="4617720"/>
+          <p:cNvPr id="21" name="Text 16"/>
+          <p:cNvSpPr/>
+          <p:nvPr/>
+        </p:nvSpPr>
+        <p:spPr>
+          <a:xfrm>
+            <a:off x="8092440" y="4572000"/>
             <a:ext cx="2743200" cy="457200"/>
           </a:xfrm>
           <a:prstGeom prst="rect">
@@ -5676,7 +6117,7 @@
             <a:r>
               <a:rPr lang="en-US" sz="1300" dirty="0">
                 <a:solidFill>
-                  <a:srgbClr val="EFE3D5"/>
+                  <a:srgbClr val="2E2420"/>
                 </a:solidFill>
                 <a:latin typeface="Tahoma" pitchFamily="34" charset="0"/>
                 <a:ea typeface="Tahoma" pitchFamily="34" charset="-122"/>
@@ -5690,13 +6131,13 @@
       </p:sp>
       <p:sp>
         <p:nvSpPr>
-          <p:cNvPr id="17" name="Text 12"/>
-          <p:cNvSpPr/>
-          <p:nvPr/>
-        </p:nvSpPr>
-        <p:spPr>
-          <a:xfrm>
-            <a:off x="731520" y="5806440"/>
+          <p:cNvPr id="22" name="Text 17"/>
+          <p:cNvSpPr/>
+          <p:nvPr/>
+        </p:nvSpPr>
+        <p:spPr>
+          <a:xfrm>
+            <a:off x="731520" y="5760720"/>
             <a:ext cx="10698480" cy="548640"/>
           </a:xfrm>
           <a:prstGeom prst="rect">
@@ -5715,7 +6156,7 @@
             <a:r>
               <a:rPr lang="en-US" sz="1800" dirty="0">
                 <a:solidFill>
-                  <a:srgbClr val="FFFFFF"/>
+                  <a:srgbClr val="C65E52"/>
                 </a:solidFill>
                 <a:latin typeface="Tahoma" pitchFamily="34" charset="0"/>
                 <a:ea typeface="Tahoma" pitchFamily="34" charset="-122"/>
@@ -5741,7 +6182,7 @@
     <p:bg>
       <p:bgPr>
         <a:solidFill>
-          <a:srgbClr val="FFFFFF"/>
+          <a:srgbClr val="F6F2EC"/>
         </a:solidFill>
       </p:bgPr>
     </p:bg>
@@ -5761,7 +6202,47 @@
       </p:grpSpPr>
       <p:sp>
         <p:nvSpPr>
-          <p:cNvPr id="2" name="Text 0"/>
+          <p:cNvPr id="2" name="Shape 0"/>
+          <p:cNvSpPr/>
+          <p:nvPr/>
+        </p:nvSpPr>
+        <p:spPr>
+          <a:xfrm>
+            <a:off x="11475720" y="-411480"/>
+            <a:ext cx="1188720" cy="1188720"/>
+          </a:xfrm>
+          <a:prstGeom prst="irregularSeal1">
+            <a:avLst/>
+          </a:prstGeom>
+          <a:solidFill>
+            <a:srgbClr val="AD3A38"/>
+          </a:solidFill>
+          <a:ln/>
+        </p:spPr>
+      </p:sp>
+      <p:sp>
+        <p:nvSpPr>
+          <p:cNvPr id="3" name="Shape 1"/>
+          <p:cNvSpPr/>
+          <p:nvPr/>
+        </p:nvSpPr>
+        <p:spPr>
+          <a:xfrm>
+            <a:off x="-411480" y="6080760"/>
+            <a:ext cx="1005840" cy="1005840"/>
+          </a:xfrm>
+          <a:prstGeom prst="ellipse">
+            <a:avLst/>
+          </a:prstGeom>
+          <a:solidFill>
+            <a:srgbClr val="FFCB64"/>
+          </a:solidFill>
+          <a:ln/>
+        </p:spPr>
+      </p:sp>
+      <p:sp>
+        <p:nvSpPr>
+          <p:cNvPr id="4" name="Text 2"/>
           <p:cNvSpPr/>
           <p:nvPr/>
         </p:nvSpPr>
@@ -5786,7 +6267,7 @@
             <a:r>
               <a:rPr lang="en-US" sz="3400" b="1" dirty="0">
                 <a:solidFill>
-                  <a:srgbClr val="3B2A1A"/>
+                  <a:srgbClr val="AD3A38"/>
                 </a:solidFill>
                 <a:latin typeface="Tahoma" pitchFamily="34" charset="0"/>
                 <a:ea typeface="Tahoma" pitchFamily="34" charset="-122"/>
@@ -5800,7 +6281,7 @@
       </p:sp>
       <p:sp>
         <p:nvSpPr>
-          <p:cNvPr id="3" name="Shape 1"/>
+          <p:cNvPr id="5" name="Shape 3"/>
           <p:cNvSpPr/>
           <p:nvPr/>
         </p:nvSpPr>
@@ -5815,14 +6296,14 @@
             </a:avLst>
           </a:prstGeom>
           <a:solidFill>
-            <a:srgbClr val="F4ECE3"/>
-          </a:solidFill>
-          <a:ln/>
-        </p:spPr>
-      </p:sp>
-      <p:sp>
-        <p:nvSpPr>
-          <p:cNvPr id="4" name="Text 2"/>
+            <a:srgbClr val="FBEBD0"/>
+          </a:solidFill>
+          <a:ln/>
+        </p:spPr>
+      </p:sp>
+      <p:sp>
+        <p:nvSpPr>
+          <p:cNvPr id="6" name="Text 4"/>
           <p:cNvSpPr/>
           <p:nvPr/>
         </p:nvSpPr>
@@ -5847,7 +6328,7 @@
             <a:r>
               <a:rPr lang="en-US" sz="1500" b="1" dirty="0">
                 <a:solidFill>
-                  <a:srgbClr val="7A4A26"/>
+                  <a:srgbClr val="AD3A38"/>
                 </a:solidFill>
                 <a:latin typeface="Tahoma" pitchFamily="34" charset="0"/>
                 <a:ea typeface="Tahoma" pitchFamily="34" charset="-122"/>
@@ -5861,7 +6342,7 @@
       </p:sp>
       <p:sp>
         <p:nvSpPr>
-          <p:cNvPr id="5" name="Text 3"/>
+          <p:cNvPr id="7" name="Text 5"/>
           <p:cNvSpPr/>
           <p:nvPr/>
         </p:nvSpPr>
@@ -5886,7 +6367,7 @@
             <a:r>
               <a:rPr lang="en-US" sz="1600" dirty="0">
                 <a:solidFill>
-                  <a:srgbClr val="3B2A1A"/>
+                  <a:srgbClr val="2E2420"/>
                 </a:solidFill>
                 <a:latin typeface="Tahoma" pitchFamily="34" charset="0"/>
                 <a:ea typeface="Tahoma" pitchFamily="34" charset="-122"/>
@@ -5900,7 +6381,7 @@
       </p:sp>
       <p:sp>
         <p:nvSpPr>
-          <p:cNvPr id="6" name="Text 4"/>
+          <p:cNvPr id="8" name="Text 6"/>
           <p:cNvSpPr/>
           <p:nvPr/>
         </p:nvSpPr>
@@ -5939,7 +6420,7 @@
       </p:sp>
       <p:sp>
         <p:nvSpPr>
-          <p:cNvPr id="7" name="Shape 5"/>
+          <p:cNvPr id="9" name="Shape 7"/>
           <p:cNvSpPr/>
           <p:nvPr/>
         </p:nvSpPr>
@@ -5954,14 +6435,14 @@
             </a:avLst>
           </a:prstGeom>
           <a:solidFill>
-            <a:srgbClr val="F4ECE3"/>
-          </a:solidFill>
-          <a:ln/>
-        </p:spPr>
-      </p:sp>
-      <p:sp>
-        <p:nvSpPr>
-          <p:cNvPr id="8" name="Text 6"/>
+            <a:srgbClr val="FBEBD0"/>
+          </a:solidFill>
+          <a:ln/>
+        </p:spPr>
+      </p:sp>
+      <p:sp>
+        <p:nvSpPr>
+          <p:cNvPr id="10" name="Text 8"/>
           <p:cNvSpPr/>
           <p:nvPr/>
         </p:nvSpPr>
@@ -5986,7 +6467,7 @@
             <a:r>
               <a:rPr lang="en-US" sz="1500" b="1" dirty="0">
                 <a:solidFill>
-                  <a:srgbClr val="7A4A26"/>
+                  <a:srgbClr val="AD3A38"/>
                 </a:solidFill>
                 <a:latin typeface="Tahoma" pitchFamily="34" charset="0"/>
                 <a:ea typeface="Tahoma" pitchFamily="34" charset="-122"/>
@@ -6000,7 +6481,7 @@
       </p:sp>
       <p:sp>
         <p:nvSpPr>
-          <p:cNvPr id="9" name="Text 7"/>
+          <p:cNvPr id="11" name="Text 9"/>
           <p:cNvSpPr/>
           <p:nvPr/>
         </p:nvSpPr>
@@ -6025,7 +6506,7 @@
             <a:r>
               <a:rPr lang="en-US" sz="1600" dirty="0">
                 <a:solidFill>
-                  <a:srgbClr val="3B2A1A"/>
+                  <a:srgbClr val="2E2420"/>
                 </a:solidFill>
                 <a:latin typeface="Tahoma" pitchFamily="34" charset="0"/>
                 <a:ea typeface="Tahoma" pitchFamily="34" charset="-122"/>
@@ -6039,7 +6520,7 @@
       </p:sp>
       <p:sp>
         <p:nvSpPr>
-          <p:cNvPr id="10" name="Text 8"/>
+          <p:cNvPr id="12" name="Text 10"/>
           <p:cNvSpPr/>
           <p:nvPr/>
         </p:nvSpPr>
@@ -6078,7 +6559,7 @@
       </p:sp>
       <p:sp>
         <p:nvSpPr>
-          <p:cNvPr id="11" name="Shape 9"/>
+          <p:cNvPr id="13" name="Shape 11"/>
           <p:cNvSpPr/>
           <p:nvPr/>
         </p:nvSpPr>
@@ -6093,14 +6574,14 @@
             </a:avLst>
           </a:prstGeom>
           <a:solidFill>
-            <a:srgbClr val="7A4A26"/>
-          </a:solidFill>
-          <a:ln/>
-        </p:spPr>
-      </p:sp>
-      <p:sp>
-        <p:nvSpPr>
-          <p:cNvPr id="12" name="Text 10"/>
+            <a:srgbClr val="AD3A38"/>
+          </a:solidFill>
+          <a:ln/>
+        </p:spPr>
+      </p:sp>
+      <p:sp>
+        <p:nvSpPr>
+          <p:cNvPr id="14" name="Text 12"/>
           <p:cNvSpPr/>
           <p:nvPr/>
         </p:nvSpPr>
@@ -6139,7 +6620,7 @@
       </p:sp>
       <p:sp>
         <p:nvSpPr>
-          <p:cNvPr id="13" name="Text 11"/>
+          <p:cNvPr id="15" name="Text 13"/>
           <p:cNvSpPr/>
           <p:nvPr/>
         </p:nvSpPr>
@@ -6164,7 +6645,7 @@
             <a:r>
               <a:rPr lang="en-US" sz="1600" dirty="0">
                 <a:solidFill>
-                  <a:srgbClr val="3B2A1A"/>
+                  <a:srgbClr val="2E2420"/>
                 </a:solidFill>
                 <a:latin typeface="Tahoma" pitchFamily="34" charset="0"/>
                 <a:ea typeface="Tahoma" pitchFamily="34" charset="-122"/>
@@ -6178,7 +6659,7 @@
       </p:sp>
       <p:sp>
         <p:nvSpPr>
-          <p:cNvPr id="14" name="Text 12"/>
+          <p:cNvPr id="16" name="Text 14"/>
           <p:cNvSpPr/>
           <p:nvPr/>
         </p:nvSpPr>
@@ -6217,7 +6698,7 @@
       </p:sp>
       <p:sp>
         <p:nvSpPr>
-          <p:cNvPr id="15" name="Shape 13"/>
+          <p:cNvPr id="17" name="Shape 15"/>
           <p:cNvSpPr/>
           <p:nvPr/>
         </p:nvSpPr>
@@ -6232,14 +6713,14 @@
             </a:avLst>
           </a:prstGeom>
           <a:solidFill>
-            <a:srgbClr val="7A4A26"/>
-          </a:solidFill>
-          <a:ln/>
-        </p:spPr>
-      </p:sp>
-      <p:sp>
-        <p:nvSpPr>
-          <p:cNvPr id="16" name="Text 14"/>
+            <a:srgbClr val="AD3A38"/>
+          </a:solidFill>
+          <a:ln/>
+        </p:spPr>
+      </p:sp>
+      <p:sp>
+        <p:nvSpPr>
+          <p:cNvPr id="18" name="Text 16"/>
           <p:cNvSpPr/>
           <p:nvPr/>
         </p:nvSpPr>
@@ -6278,7 +6759,7 @@
       </p:sp>
       <p:sp>
         <p:nvSpPr>
-          <p:cNvPr id="17" name="Text 15"/>
+          <p:cNvPr id="19" name="Text 17"/>
           <p:cNvSpPr/>
           <p:nvPr/>
         </p:nvSpPr>
@@ -6303,7 +6784,7 @@
             <a:r>
               <a:rPr lang="en-US" sz="1600" dirty="0">
                 <a:solidFill>
-                  <a:srgbClr val="3B2A1A"/>
+                  <a:srgbClr val="2E2420"/>
                 </a:solidFill>
                 <a:latin typeface="Tahoma" pitchFamily="34" charset="0"/>
                 <a:ea typeface="Tahoma" pitchFamily="34" charset="-122"/>
@@ -6317,7 +6798,7 @@
       </p:sp>
       <p:sp>
         <p:nvSpPr>
-          <p:cNvPr id="18" name="Text 16"/>
+          <p:cNvPr id="20" name="Text 18"/>
           <p:cNvSpPr/>
           <p:nvPr/>
         </p:nvSpPr>
@@ -6356,7 +6837,7 @@
       </p:sp>
       <p:sp>
         <p:nvSpPr>
-          <p:cNvPr id="19" name="Shape 17"/>
+          <p:cNvPr id="21" name="Shape 19"/>
           <p:cNvSpPr/>
           <p:nvPr/>
         </p:nvSpPr>
@@ -6371,14 +6852,14 @@
             </a:avLst>
           </a:prstGeom>
           <a:solidFill>
-            <a:srgbClr val="7A4A26"/>
-          </a:solidFill>
-          <a:ln/>
-        </p:spPr>
-      </p:sp>
-      <p:sp>
-        <p:nvSpPr>
-          <p:cNvPr id="20" name="Text 18"/>
+            <a:srgbClr val="AD3A38"/>
+          </a:solidFill>
+          <a:ln/>
+        </p:spPr>
+      </p:sp>
+      <p:sp>
+        <p:nvSpPr>
+          <p:cNvPr id="22" name="Text 20"/>
           <p:cNvSpPr/>
           <p:nvPr/>
         </p:nvSpPr>
@@ -6417,7 +6898,7 @@
       </p:sp>
       <p:sp>
         <p:nvSpPr>
-          <p:cNvPr id="21" name="Text 19"/>
+          <p:cNvPr id="23" name="Text 21"/>
           <p:cNvSpPr/>
           <p:nvPr/>
         </p:nvSpPr>
@@ -6442,7 +6923,7 @@
             <a:r>
               <a:rPr lang="en-US" sz="1600" dirty="0">
                 <a:solidFill>
-                  <a:srgbClr val="3B2A1A"/>
+                  <a:srgbClr val="2E2420"/>
                 </a:solidFill>
                 <a:latin typeface="Tahoma" pitchFamily="34" charset="0"/>
                 <a:ea typeface="Tahoma" pitchFamily="34" charset="-122"/>
@@ -6456,7 +6937,7 @@
       </p:sp>
       <p:sp>
         <p:nvSpPr>
-          <p:cNvPr id="22" name="Text 20"/>
+          <p:cNvPr id="24" name="Text 22"/>
           <p:cNvSpPr/>
           <p:nvPr/>
         </p:nvSpPr>
@@ -6495,7 +6976,7 @@
       </p:sp>
       <p:sp>
         <p:nvSpPr>
-          <p:cNvPr id="23" name="Shape 21"/>
+          <p:cNvPr id="25" name="Shape 23"/>
           <p:cNvSpPr/>
           <p:nvPr/>
         </p:nvSpPr>
@@ -6510,14 +6991,14 @@
             </a:avLst>
           </a:prstGeom>
           <a:solidFill>
-            <a:srgbClr val="F4ECE3"/>
-          </a:solidFill>
-          <a:ln/>
-        </p:spPr>
-      </p:sp>
-      <p:sp>
-        <p:nvSpPr>
-          <p:cNvPr id="24" name="Text 22"/>
+            <a:srgbClr val="FBEBD0"/>
+          </a:solidFill>
+          <a:ln/>
+        </p:spPr>
+      </p:sp>
+      <p:sp>
+        <p:nvSpPr>
+          <p:cNvPr id="26" name="Text 24"/>
           <p:cNvSpPr/>
           <p:nvPr/>
         </p:nvSpPr>
@@ -6542,7 +7023,7 @@
             <a:r>
               <a:rPr lang="en-US" sz="1500" b="1" dirty="0">
                 <a:solidFill>
-                  <a:srgbClr val="7A4A26"/>
+                  <a:srgbClr val="AD3A38"/>
                 </a:solidFill>
                 <a:latin typeface="Tahoma" pitchFamily="34" charset="0"/>
                 <a:ea typeface="Tahoma" pitchFamily="34" charset="-122"/>
@@ -6556,7 +7037,7 @@
       </p:sp>
       <p:sp>
         <p:nvSpPr>
-          <p:cNvPr id="25" name="Text 23"/>
+          <p:cNvPr id="27" name="Text 25"/>
           <p:cNvSpPr/>
           <p:nvPr/>
         </p:nvSpPr>
@@ -6581,7 +7062,7 @@
             <a:r>
               <a:rPr lang="en-US" sz="1600" dirty="0">
                 <a:solidFill>
-                  <a:srgbClr val="3B2A1A"/>
+                  <a:srgbClr val="2E2420"/>
                 </a:solidFill>
                 <a:latin typeface="Tahoma" pitchFamily="34" charset="0"/>
                 <a:ea typeface="Tahoma" pitchFamily="34" charset="-122"/>
@@ -6595,7 +7076,7 @@
       </p:sp>
       <p:sp>
         <p:nvSpPr>
-          <p:cNvPr id="26" name="Text 24"/>
+          <p:cNvPr id="28" name="Text 26"/>
           <p:cNvSpPr/>
           <p:nvPr/>
         </p:nvSpPr>
@@ -6634,7 +7115,7 @@
       </p:sp>
       <p:sp>
         <p:nvSpPr>
-          <p:cNvPr id="27" name="Shape 25"/>
+          <p:cNvPr id="29" name="Shape 27"/>
           <p:cNvSpPr/>
           <p:nvPr/>
         </p:nvSpPr>
@@ -6649,14 +7130,14 @@
             </a:avLst>
           </a:prstGeom>
           <a:solidFill>
-            <a:srgbClr val="2E1F14"/>
-          </a:solidFill>
-          <a:ln/>
-        </p:spPr>
-      </p:sp>
-      <p:sp>
-        <p:nvSpPr>
-          <p:cNvPr id="28" name="Text 26"/>
+            <a:srgbClr val="AD3A38"/>
+          </a:solidFill>
+          <a:ln/>
+        </p:spPr>
+      </p:sp>
+      <p:sp>
+        <p:nvSpPr>
+          <p:cNvPr id="30" name="Text 28"/>
           <p:cNvSpPr/>
           <p:nvPr/>
         </p:nvSpPr>
@@ -6681,7 +7162,7 @@
             <a:r>
               <a:rPr lang="en-US" sz="6000" b="1" dirty="0">
                 <a:solidFill>
-                  <a:srgbClr val="C08552"/>
+                  <a:srgbClr val="FFCB64"/>
                 </a:solidFill>
                 <a:latin typeface="Tahoma" pitchFamily="34" charset="0"/>
                 <a:ea typeface="Tahoma" pitchFamily="34" charset="-122"/>
@@ -6695,7 +7176,7 @@
       </p:sp>
       <p:sp>
         <p:nvSpPr>
-          <p:cNvPr id="29" name="Text 27"/>
+          <p:cNvPr id="31" name="Text 29"/>
           <p:cNvSpPr/>
           <p:nvPr/>
         </p:nvSpPr>
@@ -6720,7 +7201,7 @@
             <a:r>
               <a:rPr lang="en-US" sz="1200" dirty="0">
                 <a:solidFill>
-                  <a:srgbClr val="EFE3D5"/>
+                  <a:srgbClr val="FBEBD0"/>
                 </a:solidFill>
                 <a:latin typeface="Tahoma" pitchFamily="34" charset="0"/>
                 <a:ea typeface="Tahoma" pitchFamily="34" charset="-122"/>
@@ -6737,7 +7218,7 @@
             <a:r>
               <a:rPr lang="en-US" sz="1200" dirty="0">
                 <a:solidFill>
-                  <a:srgbClr val="EFE3D5"/>
+                  <a:srgbClr val="FBEBD0"/>
                 </a:solidFill>
                 <a:latin typeface="Tahoma" pitchFamily="34" charset="0"/>
                 <a:ea typeface="Tahoma" pitchFamily="34" charset="-122"/>
@@ -6763,7 +7244,7 @@
     <p:bg>
       <p:bgPr>
         <a:solidFill>
-          <a:srgbClr val="2E1F14"/>
+          <a:srgbClr val="F6F2EC"/>
         </a:solidFill>
       </p:bgPr>
     </p:bg>
@@ -6783,13 +7264,73 @@
       </p:grpSpPr>
       <p:sp>
         <p:nvSpPr>
-          <p:cNvPr id="2" name="Text 0"/>
-          <p:cNvSpPr/>
-          <p:nvPr/>
-        </p:nvSpPr>
-        <p:spPr>
-          <a:xfrm>
-            <a:off x="822960" y="1234440"/>
+          <p:cNvPr id="2" name="Shape 0"/>
+          <p:cNvSpPr/>
+          <p:nvPr/>
+        </p:nvSpPr>
+        <p:spPr>
+          <a:xfrm>
+            <a:off x="11475720" y="-411480"/>
+            <a:ext cx="1188720" cy="1188720"/>
+          </a:xfrm>
+          <a:prstGeom prst="irregularSeal1">
+            <a:avLst/>
+          </a:prstGeom>
+          <a:solidFill>
+            <a:srgbClr val="AD3A38"/>
+          </a:solidFill>
+          <a:ln/>
+        </p:spPr>
+      </p:sp>
+      <p:sp>
+        <p:nvSpPr>
+          <p:cNvPr id="3" name="Shape 1"/>
+          <p:cNvSpPr/>
+          <p:nvPr/>
+        </p:nvSpPr>
+        <p:spPr>
+          <a:xfrm>
+            <a:off x="-411480" y="6080760"/>
+            <a:ext cx="1005840" cy="1005840"/>
+          </a:xfrm>
+          <a:prstGeom prst="ellipse">
+            <a:avLst/>
+          </a:prstGeom>
+          <a:solidFill>
+            <a:srgbClr val="FFCB64"/>
+          </a:solidFill>
+          <a:ln/>
+        </p:spPr>
+      </p:sp>
+      <p:sp>
+        <p:nvSpPr>
+          <p:cNvPr id="4" name="Shape 2"/>
+          <p:cNvSpPr/>
+          <p:nvPr/>
+        </p:nvSpPr>
+        <p:spPr>
+          <a:xfrm>
+            <a:off x="10927080" y="5989320"/>
+            <a:ext cx="868680" cy="868680"/>
+          </a:xfrm>
+          <a:prstGeom prst="irregularSeal1">
+            <a:avLst/>
+          </a:prstGeom>
+          <a:solidFill>
+            <a:srgbClr val="C65E52"/>
+          </a:solidFill>
+          <a:ln/>
+        </p:spPr>
+      </p:sp>
+      <p:sp>
+        <p:nvSpPr>
+          <p:cNvPr id="5" name="Text 3"/>
+          <p:cNvSpPr/>
+          <p:nvPr/>
+        </p:nvSpPr>
+        <p:spPr>
+          <a:xfrm>
+            <a:off x="822960" y="1188720"/>
             <a:ext cx="5486400" cy="457200"/>
           </a:xfrm>
           <a:prstGeom prst="rect">
@@ -6806,87 +7347,87 @@
               <a:buNone/>
             </a:pPr>
             <a:r>
+              <a:rPr lang="en-US" sz="1800" b="1" dirty="0">
+                <a:solidFill>
+                  <a:srgbClr val="C65E52"/>
+                </a:solidFill>
+                <a:latin typeface="Tahoma" pitchFamily="34" charset="0"/>
+                <a:ea typeface="Tahoma" pitchFamily="34" charset="-122"/>
+                <a:cs typeface="Tahoma" pitchFamily="34" charset="-120"/>
+              </a:rPr>
+              <a:t>ช่วงที่ 1</a:t>
+            </a:r>
+            <a:endParaRPr lang="en-US" sz="1800" dirty="0"/>
+          </a:p>
+        </p:txBody>
+      </p:sp>
+      <p:sp>
+        <p:nvSpPr>
+          <p:cNvPr id="6" name="Text 4"/>
+          <p:cNvSpPr/>
+          <p:nvPr/>
+        </p:nvSpPr>
+        <p:spPr>
+          <a:xfrm>
+            <a:off x="822960" y="1737360"/>
+            <a:ext cx="10515600" cy="1005840"/>
+          </a:xfrm>
+          <a:prstGeom prst="rect">
+            <a:avLst/>
+          </a:prstGeom>
+          <a:noFill/>
+          <a:ln/>
+        </p:spPr>
+        <p:txBody>
+          <a:bodyPr wrap="square" rtlCol="0" anchor="ctr"/>
+          <a:lstStyle/>
+          <a:p>
+            <a:pPr indent="0" marL="0">
+              <a:buNone/>
+            </a:pPr>
+            <a:r>
+              <a:rPr lang="en-US" sz="4000" b="1" dirty="0">
+                <a:solidFill>
+                  <a:srgbClr val="AD3A38"/>
+                </a:solidFill>
+                <a:latin typeface="Tahoma" pitchFamily="34" charset="0"/>
+                <a:ea typeface="Tahoma" pitchFamily="34" charset="-122"/>
+                <a:cs typeface="Tahoma" pitchFamily="34" charset="-120"/>
+              </a:rPr>
+              <a:t>โลก AI ตอนนี้เป็นยังไง</a:t>
+            </a:r>
+            <a:endParaRPr lang="en-US" sz="4000" dirty="0"/>
+          </a:p>
+        </p:txBody>
+      </p:sp>
+      <p:sp>
+        <p:nvSpPr>
+          <p:cNvPr id="7" name="Text 5"/>
+          <p:cNvSpPr/>
+          <p:nvPr/>
+        </p:nvSpPr>
+        <p:spPr>
+          <a:xfrm>
+            <a:off x="822960" y="2834640"/>
+            <a:ext cx="9692640" cy="822960"/>
+          </a:xfrm>
+          <a:prstGeom prst="rect">
+            <a:avLst/>
+          </a:prstGeom>
+          <a:noFill/>
+          <a:ln/>
+        </p:spPr>
+        <p:txBody>
+          <a:bodyPr wrap="square" rtlCol="0" anchor="ctr"/>
+          <a:lstStyle/>
+          <a:p>
+            <a:pPr indent="0" marL="0">
+              <a:buNone/>
+            </a:pPr>
+            <a:r>
               <a:rPr lang="en-US" sz="1800" dirty="0">
                 <a:solidFill>
-                  <a:srgbClr val="C08552"/>
-                </a:solidFill>
-                <a:latin typeface="Tahoma" pitchFamily="34" charset="0"/>
-                <a:ea typeface="Tahoma" pitchFamily="34" charset="-122"/>
-                <a:cs typeface="Tahoma" pitchFamily="34" charset="-120"/>
-              </a:rPr>
-              <a:t>ช่วงที่ 1</a:t>
-            </a:r>
-            <a:endParaRPr lang="en-US" sz="1800" dirty="0"/>
-          </a:p>
-        </p:txBody>
-      </p:sp>
-      <p:sp>
-        <p:nvSpPr>
-          <p:cNvPr id="3" name="Text 1"/>
-          <p:cNvSpPr/>
-          <p:nvPr/>
-        </p:nvSpPr>
-        <p:spPr>
-          <a:xfrm>
-            <a:off x="822960" y="1783080"/>
-            <a:ext cx="10515600" cy="1005840"/>
-          </a:xfrm>
-          <a:prstGeom prst="rect">
-            <a:avLst/>
-          </a:prstGeom>
-          <a:noFill/>
-          <a:ln/>
-        </p:spPr>
-        <p:txBody>
-          <a:bodyPr wrap="square" rtlCol="0" anchor="ctr"/>
-          <a:lstStyle/>
-          <a:p>
-            <a:pPr indent="0" marL="0">
-              <a:buNone/>
-            </a:pPr>
-            <a:r>
-              <a:rPr lang="en-US" sz="4000" b="1" dirty="0">
-                <a:solidFill>
-                  <a:srgbClr val="FFFFFF"/>
-                </a:solidFill>
-                <a:latin typeface="Tahoma" pitchFamily="34" charset="0"/>
-                <a:ea typeface="Tahoma" pitchFamily="34" charset="-122"/>
-                <a:cs typeface="Tahoma" pitchFamily="34" charset="-120"/>
-              </a:rPr>
-              <a:t>โลก AI ตอนนี้เป็นยังไง</a:t>
-            </a:r>
-            <a:endParaRPr lang="en-US" sz="4000" dirty="0"/>
-          </a:p>
-        </p:txBody>
-      </p:sp>
-      <p:sp>
-        <p:nvSpPr>
-          <p:cNvPr id="4" name="Text 2"/>
-          <p:cNvSpPr/>
-          <p:nvPr/>
-        </p:nvSpPr>
-        <p:spPr>
-          <a:xfrm>
-            <a:off x="822960" y="2880360"/>
-            <a:ext cx="10058400" cy="548640"/>
-          </a:xfrm>
-          <a:prstGeom prst="rect">
-            <a:avLst/>
-          </a:prstGeom>
-          <a:noFill/>
-          <a:ln/>
-        </p:spPr>
-        <p:txBody>
-          <a:bodyPr wrap="square" rtlCol="0" anchor="ctr"/>
-          <a:lstStyle/>
-          <a:p>
-            <a:pPr indent="0" marL="0">
-              <a:buNone/>
-            </a:pPr>
-            <a:r>
-              <a:rPr lang="en-US" sz="1800" dirty="0">
-                <a:solidFill>
-                  <a:srgbClr val="EFE3D5"/>
+                  <a:srgbClr val="2E2420"/>
                 </a:solidFill>
                 <a:latin typeface="Tahoma" pitchFamily="34" charset="0"/>
                 <a:ea typeface="Tahoma" pitchFamily="34" charset="-122"/>
@@ -6912,7 +7453,7 @@
     <p:bg>
       <p:bgPr>
         <a:solidFill>
-          <a:srgbClr val="FFFFFF"/>
+          <a:srgbClr val="F6F2EC"/>
         </a:solidFill>
       </p:bgPr>
     </p:bg>
@@ -6932,14 +7473,54 @@
       </p:grpSpPr>
       <p:sp>
         <p:nvSpPr>
-          <p:cNvPr id="2" name="Text 0"/>
+          <p:cNvPr id="2" name="Shape 0"/>
+          <p:cNvSpPr/>
+          <p:nvPr/>
+        </p:nvSpPr>
+        <p:spPr>
+          <a:xfrm>
+            <a:off x="11475720" y="-411480"/>
+            <a:ext cx="1188720" cy="1188720"/>
+          </a:xfrm>
+          <a:prstGeom prst="irregularSeal1">
+            <a:avLst/>
+          </a:prstGeom>
+          <a:solidFill>
+            <a:srgbClr val="AD3A38"/>
+          </a:solidFill>
+          <a:ln/>
+        </p:spPr>
+      </p:sp>
+      <p:sp>
+        <p:nvSpPr>
+          <p:cNvPr id="3" name="Shape 1"/>
+          <p:cNvSpPr/>
+          <p:nvPr/>
+        </p:nvSpPr>
+        <p:spPr>
+          <a:xfrm>
+            <a:off x="-411480" y="6080760"/>
+            <a:ext cx="1005840" cy="1005840"/>
+          </a:xfrm>
+          <a:prstGeom prst="ellipse">
+            <a:avLst/>
+          </a:prstGeom>
+          <a:solidFill>
+            <a:srgbClr val="FFCB64"/>
+          </a:solidFill>
+          <a:ln/>
+        </p:spPr>
+      </p:sp>
+      <p:sp>
+        <p:nvSpPr>
+          <p:cNvPr id="4" name="Text 2"/>
           <p:cNvSpPr/>
           <p:nvPr/>
         </p:nvSpPr>
         <p:spPr>
           <a:xfrm>
             <a:off x="640080" y="411480"/>
-            <a:ext cx="10972800" cy="731520"/>
+            <a:ext cx="10515600" cy="731520"/>
           </a:xfrm>
           <a:prstGeom prst="rect">
             <a:avLst/>
@@ -6957,7 +7538,7 @@
             <a:r>
               <a:rPr lang="en-US" sz="3200" b="1" dirty="0">
                 <a:solidFill>
-                  <a:srgbClr val="3B2A1A"/>
+                  <a:srgbClr val="AD3A38"/>
                 </a:solidFill>
                 <a:latin typeface="Tahoma" pitchFamily="34" charset="0"/>
                 <a:ea typeface="Tahoma" pitchFamily="34" charset="-122"/>
@@ -6971,14 +7552,14 @@
       </p:sp>
       <p:sp>
         <p:nvSpPr>
-          <p:cNvPr id="3" name="Text 1"/>
+          <p:cNvPr id="5" name="Text 3"/>
           <p:cNvSpPr/>
           <p:nvPr/>
         </p:nvSpPr>
         <p:spPr>
           <a:xfrm>
             <a:off x="640080" y="1188720"/>
-            <a:ext cx="10972800" cy="457200"/>
+            <a:ext cx="10515600" cy="457200"/>
           </a:xfrm>
           <a:prstGeom prst="rect">
             <a:avLst/>
@@ -7010,7 +7591,7 @@
       </p:sp>
       <p:sp>
         <p:nvSpPr>
-          <p:cNvPr id="4" name="Shape 2"/>
+          <p:cNvPr id="6" name="Shape 4"/>
           <p:cNvSpPr/>
           <p:nvPr/>
         </p:nvSpPr>
@@ -7025,14 +7606,14 @@
             </a:avLst>
           </a:prstGeom>
           <a:solidFill>
-            <a:srgbClr val="F4ECE3"/>
-          </a:solidFill>
-          <a:ln/>
-        </p:spPr>
-      </p:sp>
-      <p:sp>
-        <p:nvSpPr>
-          <p:cNvPr id="5" name="Shape 3"/>
+            <a:srgbClr val="FBEBD0"/>
+          </a:solidFill>
+          <a:ln/>
+        </p:spPr>
+      </p:sp>
+      <p:sp>
+        <p:nvSpPr>
+          <p:cNvPr id="7" name="Shape 5"/>
           <p:cNvSpPr/>
           <p:nvPr/>
         </p:nvSpPr>
@@ -7045,14 +7626,14 @@
             <a:avLst/>
           </a:prstGeom>
           <a:solidFill>
-            <a:srgbClr val="7A4A26"/>
+            <a:srgbClr val="AD3A38"/>
           </a:solidFill>
           <a:ln/>
         </p:spPr>
       </p:sp>
       <p:pic>
         <p:nvPicPr>
-          <p:cNvPr id="6" name="Image 0" descr="preencoded.png">    </p:cNvPr>
+          <p:cNvPr id="8" name="Image 0" descr="preencoded.png">    </p:cNvPr>
           <p:cNvPicPr>
             <a:picLocks noChangeAspect="1"/>
           </p:cNvPicPr>
@@ -7076,7 +7657,7 @@
       </p:pic>
       <p:sp>
         <p:nvSpPr>
-          <p:cNvPr id="7" name="Text 4"/>
+          <p:cNvPr id="9" name="Text 6"/>
           <p:cNvSpPr/>
           <p:nvPr/>
         </p:nvSpPr>
@@ -7101,7 +7682,7 @@
             <a:r>
               <a:rPr lang="en-US" sz="2100" b="1" dirty="0">
                 <a:solidFill>
-                  <a:srgbClr val="3B2A1A"/>
+                  <a:srgbClr val="2E2420"/>
                 </a:solidFill>
                 <a:latin typeface="Tahoma" pitchFamily="34" charset="0"/>
                 <a:ea typeface="Tahoma" pitchFamily="34" charset="-122"/>
@@ -7115,7 +7696,7 @@
       </p:sp>
       <p:sp>
         <p:nvSpPr>
-          <p:cNvPr id="8" name="Text 5"/>
+          <p:cNvPr id="10" name="Text 7"/>
           <p:cNvSpPr/>
           <p:nvPr/>
         </p:nvSpPr>
@@ -7171,7 +7752,7 @@
       </p:sp>
       <p:sp>
         <p:nvSpPr>
-          <p:cNvPr id="9" name="Shape 6"/>
+          <p:cNvPr id="11" name="Shape 8"/>
           <p:cNvSpPr/>
           <p:nvPr/>
         </p:nvSpPr>
@@ -7186,14 +7767,14 @@
             </a:avLst>
           </a:prstGeom>
           <a:solidFill>
-            <a:srgbClr val="F4ECE3"/>
-          </a:solidFill>
-          <a:ln/>
-        </p:spPr>
-      </p:sp>
-      <p:sp>
-        <p:nvSpPr>
-          <p:cNvPr id="10" name="Shape 7"/>
+            <a:srgbClr val="FBEBD0"/>
+          </a:solidFill>
+          <a:ln/>
+        </p:spPr>
+      </p:sp>
+      <p:sp>
+        <p:nvSpPr>
+          <p:cNvPr id="12" name="Shape 9"/>
           <p:cNvSpPr/>
           <p:nvPr/>
         </p:nvSpPr>
@@ -7206,14 +7787,14 @@
             <a:avLst/>
           </a:prstGeom>
           <a:solidFill>
-            <a:srgbClr val="7A4A26"/>
+            <a:srgbClr val="AD3A38"/>
           </a:solidFill>
           <a:ln/>
         </p:spPr>
       </p:sp>
       <p:pic>
         <p:nvPicPr>
-          <p:cNvPr id="11" name="Image 1" descr="preencoded.png">    </p:cNvPr>
+          <p:cNvPr id="13" name="Image 1" descr="preencoded.png">    </p:cNvPr>
           <p:cNvPicPr>
             <a:picLocks noChangeAspect="1"/>
           </p:cNvPicPr>
@@ -7237,7 +7818,7 @@
       </p:pic>
       <p:sp>
         <p:nvSpPr>
-          <p:cNvPr id="12" name="Text 8"/>
+          <p:cNvPr id="14" name="Text 10"/>
           <p:cNvSpPr/>
           <p:nvPr/>
         </p:nvSpPr>
@@ -7262,7 +7843,7 @@
             <a:r>
               <a:rPr lang="en-US" sz="2100" b="1" dirty="0">
                 <a:solidFill>
-                  <a:srgbClr val="3B2A1A"/>
+                  <a:srgbClr val="2E2420"/>
                 </a:solidFill>
                 <a:latin typeface="Tahoma" pitchFamily="34" charset="0"/>
                 <a:ea typeface="Tahoma" pitchFamily="34" charset="-122"/>
@@ -7276,7 +7857,7 @@
       </p:sp>
       <p:sp>
         <p:nvSpPr>
-          <p:cNvPr id="13" name="Text 9"/>
+          <p:cNvPr id="15" name="Text 11"/>
           <p:cNvSpPr/>
           <p:nvPr/>
         </p:nvSpPr>
@@ -7332,7 +7913,7 @@
       </p:sp>
       <p:sp>
         <p:nvSpPr>
-          <p:cNvPr id="14" name="Shape 10"/>
+          <p:cNvPr id="16" name="Shape 12"/>
           <p:cNvSpPr/>
           <p:nvPr/>
         </p:nvSpPr>
@@ -7347,14 +7928,14 @@
             </a:avLst>
           </a:prstGeom>
           <a:solidFill>
-            <a:srgbClr val="F4ECE3"/>
-          </a:solidFill>
-          <a:ln/>
-        </p:spPr>
-      </p:sp>
-      <p:sp>
-        <p:nvSpPr>
-          <p:cNvPr id="15" name="Shape 11"/>
+            <a:srgbClr val="FBEBD0"/>
+          </a:solidFill>
+          <a:ln/>
+        </p:spPr>
+      </p:sp>
+      <p:sp>
+        <p:nvSpPr>
+          <p:cNvPr id="17" name="Shape 13"/>
           <p:cNvSpPr/>
           <p:nvPr/>
         </p:nvSpPr>
@@ -7367,14 +7948,14 @@
             <a:avLst/>
           </a:prstGeom>
           <a:solidFill>
-            <a:srgbClr val="7A4A26"/>
+            <a:srgbClr val="AD3A38"/>
           </a:solidFill>
           <a:ln/>
         </p:spPr>
       </p:sp>
       <p:pic>
         <p:nvPicPr>
-          <p:cNvPr id="16" name="Image 2" descr="preencoded.png">    </p:cNvPr>
+          <p:cNvPr id="18" name="Image 2" descr="preencoded.png">    </p:cNvPr>
           <p:cNvPicPr>
             <a:picLocks noChangeAspect="1"/>
           </p:cNvPicPr>
@@ -7398,7 +7979,7 @@
       </p:pic>
       <p:sp>
         <p:nvSpPr>
-          <p:cNvPr id="17" name="Text 12"/>
+          <p:cNvPr id="19" name="Text 14"/>
           <p:cNvSpPr/>
           <p:nvPr/>
         </p:nvSpPr>
@@ -7423,7 +8004,7 @@
             <a:r>
               <a:rPr lang="en-US" sz="2100" b="1" dirty="0">
                 <a:solidFill>
-                  <a:srgbClr val="3B2A1A"/>
+                  <a:srgbClr val="2E2420"/>
                 </a:solidFill>
                 <a:latin typeface="Tahoma" pitchFamily="34" charset="0"/>
                 <a:ea typeface="Tahoma" pitchFamily="34" charset="-122"/>
@@ -7437,7 +8018,7 @@
       </p:sp>
       <p:sp>
         <p:nvSpPr>
-          <p:cNvPr id="18" name="Text 13"/>
+          <p:cNvPr id="20" name="Text 15"/>
           <p:cNvSpPr/>
           <p:nvPr/>
         </p:nvSpPr>
@@ -7493,7 +8074,7 @@
       </p:sp>
       <p:sp>
         <p:nvSpPr>
-          <p:cNvPr id="19" name="Shape 14"/>
+          <p:cNvPr id="21" name="Shape 16"/>
           <p:cNvSpPr/>
           <p:nvPr/>
         </p:nvSpPr>
@@ -7508,14 +8089,14 @@
             </a:avLst>
           </a:prstGeom>
           <a:solidFill>
-            <a:srgbClr val="F4ECE3"/>
-          </a:solidFill>
-          <a:ln/>
-        </p:spPr>
-      </p:sp>
-      <p:sp>
-        <p:nvSpPr>
-          <p:cNvPr id="20" name="Shape 15"/>
+            <a:srgbClr val="FBEBD0"/>
+          </a:solidFill>
+          <a:ln/>
+        </p:spPr>
+      </p:sp>
+      <p:sp>
+        <p:nvSpPr>
+          <p:cNvPr id="22" name="Shape 17"/>
           <p:cNvSpPr/>
           <p:nvPr/>
         </p:nvSpPr>
@@ -7528,14 +8109,14 @@
             <a:avLst/>
           </a:prstGeom>
           <a:solidFill>
-            <a:srgbClr val="7A4A26"/>
+            <a:srgbClr val="AD3A38"/>
           </a:solidFill>
           <a:ln/>
         </p:spPr>
       </p:sp>
       <p:pic>
         <p:nvPicPr>
-          <p:cNvPr id="21" name="Image 3" descr="preencoded.png">    </p:cNvPr>
+          <p:cNvPr id="23" name="Image 3" descr="preencoded.png">    </p:cNvPr>
           <p:cNvPicPr>
             <a:picLocks noChangeAspect="1"/>
           </p:cNvPicPr>
@@ -7559,7 +8140,7 @@
       </p:pic>
       <p:sp>
         <p:nvSpPr>
-          <p:cNvPr id="22" name="Text 16"/>
+          <p:cNvPr id="24" name="Text 18"/>
           <p:cNvSpPr/>
           <p:nvPr/>
         </p:nvSpPr>
@@ -7584,7 +8165,7 @@
             <a:r>
               <a:rPr lang="en-US" sz="2100" b="1" dirty="0">
                 <a:solidFill>
-                  <a:srgbClr val="3B2A1A"/>
+                  <a:srgbClr val="2E2420"/>
                 </a:solidFill>
                 <a:latin typeface="Tahoma" pitchFamily="34" charset="0"/>
                 <a:ea typeface="Tahoma" pitchFamily="34" charset="-122"/>
@@ -7598,7 +8179,7 @@
       </p:sp>
       <p:sp>
         <p:nvSpPr>
-          <p:cNvPr id="23" name="Text 17"/>
+          <p:cNvPr id="25" name="Text 19"/>
           <p:cNvSpPr/>
           <p:nvPr/>
         </p:nvSpPr>
@@ -7654,14 +8235,14 @@
       </p:sp>
       <p:sp>
         <p:nvSpPr>
-          <p:cNvPr id="24" name="Text 18"/>
+          <p:cNvPr id="26" name="Text 20"/>
           <p:cNvSpPr/>
           <p:nvPr/>
         </p:nvSpPr>
         <p:spPr>
           <a:xfrm>
             <a:off x="640080" y="5897880"/>
-            <a:ext cx="10972800" cy="548640"/>
+            <a:ext cx="10515600" cy="548640"/>
           </a:xfrm>
           <a:prstGeom prst="rect">
             <a:avLst/>
@@ -7679,7 +8260,7 @@
             <a:r>
               <a:rPr lang="en-US" sz="1500" i="1" dirty="0">
                 <a:solidFill>
-                  <a:srgbClr val="7A4A26"/>
+                  <a:srgbClr val="C65E52"/>
                 </a:solidFill>
                 <a:latin typeface="Tahoma" pitchFamily="34" charset="0"/>
                 <a:ea typeface="Tahoma" pitchFamily="34" charset="-122"/>
@@ -7705,7 +8286,7 @@
     <p:bg>
       <p:bgPr>
         <a:solidFill>
-          <a:srgbClr val="FFFFFF"/>
+          <a:srgbClr val="F6F2EC"/>
         </a:solidFill>
       </p:bgPr>
     </p:bg>
@@ -7725,14 +8306,54 @@
       </p:grpSpPr>
       <p:sp>
         <p:nvSpPr>
-          <p:cNvPr id="2" name="Text 0"/>
+          <p:cNvPr id="2" name="Shape 0"/>
+          <p:cNvSpPr/>
+          <p:nvPr/>
+        </p:nvSpPr>
+        <p:spPr>
+          <a:xfrm>
+            <a:off x="11475720" y="-411480"/>
+            <a:ext cx="1188720" cy="1188720"/>
+          </a:xfrm>
+          <a:prstGeom prst="irregularSeal1">
+            <a:avLst/>
+          </a:prstGeom>
+          <a:solidFill>
+            <a:srgbClr val="AD3A38"/>
+          </a:solidFill>
+          <a:ln/>
+        </p:spPr>
+      </p:sp>
+      <p:sp>
+        <p:nvSpPr>
+          <p:cNvPr id="3" name="Shape 1"/>
+          <p:cNvSpPr/>
+          <p:nvPr/>
+        </p:nvSpPr>
+        <p:spPr>
+          <a:xfrm>
+            <a:off x="-411480" y="6080760"/>
+            <a:ext cx="1005840" cy="1005840"/>
+          </a:xfrm>
+          <a:prstGeom prst="ellipse">
+            <a:avLst/>
+          </a:prstGeom>
+          <a:solidFill>
+            <a:srgbClr val="FFCB64"/>
+          </a:solidFill>
+          <a:ln/>
+        </p:spPr>
+      </p:sp>
+      <p:sp>
+        <p:nvSpPr>
+          <p:cNvPr id="4" name="Text 2"/>
           <p:cNvSpPr/>
           <p:nvPr/>
         </p:nvSpPr>
         <p:spPr>
           <a:xfrm>
             <a:off x="640080" y="411480"/>
-            <a:ext cx="10972800" cy="731520"/>
+            <a:ext cx="10515600" cy="731520"/>
           </a:xfrm>
           <a:prstGeom prst="rect">
             <a:avLst/>
@@ -7750,7 +8371,7 @@
             <a:r>
               <a:rPr lang="en-US" sz="3200" b="1" dirty="0">
                 <a:solidFill>
-                  <a:srgbClr val="3B2A1A"/>
+                  <a:srgbClr val="AD3A38"/>
                 </a:solidFill>
                 <a:latin typeface="Tahoma" pitchFamily="34" charset="0"/>
                 <a:ea typeface="Tahoma" pitchFamily="34" charset="-122"/>
@@ -7764,7 +8385,7 @@
       </p:sp>
       <p:sp>
         <p:nvSpPr>
-          <p:cNvPr id="3" name="Shape 1"/>
+          <p:cNvPr id="5" name="Shape 3"/>
           <p:cNvSpPr/>
           <p:nvPr/>
         </p:nvSpPr>
@@ -7779,7 +8400,7 @@
             </a:avLst>
           </a:prstGeom>
           <a:solidFill>
-            <a:srgbClr val="7A4A26"/>
+            <a:srgbClr val="AD3A38"/>
           </a:solidFill>
           <a:ln/>
           <a:effectLst>
@@ -7793,7 +8414,7 @@
       </p:sp>
       <p:sp>
         <p:nvSpPr>
-          <p:cNvPr id="4" name="Text 2"/>
+          <p:cNvPr id="6" name="Text 4"/>
           <p:cNvSpPr/>
           <p:nvPr/>
         </p:nvSpPr>
@@ -7832,7 +8453,7 @@
       </p:sp>
       <p:sp>
         <p:nvSpPr>
-          <p:cNvPr id="5" name="Text 3"/>
+          <p:cNvPr id="7" name="Text 5"/>
           <p:cNvSpPr/>
           <p:nvPr/>
         </p:nvSpPr>
@@ -7857,7 +8478,7 @@
             <a:r>
               <a:rPr lang="en-US" sz="1300" dirty="0">
                 <a:solidFill>
-                  <a:srgbClr val="C08552"/>
+                  <a:srgbClr val="FFCB64"/>
                 </a:solidFill>
                 <a:latin typeface="Tahoma" pitchFamily="34" charset="0"/>
                 <a:ea typeface="Tahoma" pitchFamily="34" charset="-122"/>
@@ -7871,7 +8492,7 @@
       </p:sp>
       <p:sp>
         <p:nvSpPr>
-          <p:cNvPr id="6" name="Text 4"/>
+          <p:cNvPr id="8" name="Text 6"/>
           <p:cNvSpPr/>
           <p:nvPr/>
         </p:nvSpPr>
@@ -7896,7 +8517,7 @@
             <a:r>
               <a:rPr lang="en-US" sz="1250" dirty="0">
                 <a:solidFill>
-                  <a:srgbClr val="EFE3D5"/>
+                  <a:srgbClr val="FBEBD0"/>
                 </a:solidFill>
                 <a:latin typeface="Tahoma" pitchFamily="34" charset="0"/>
                 <a:ea typeface="Tahoma" pitchFamily="34" charset="-122"/>
@@ -7913,7 +8534,7 @@
             <a:r>
               <a:rPr lang="en-US" sz="1250" dirty="0">
                 <a:solidFill>
-                  <a:srgbClr val="EFE3D5"/>
+                  <a:srgbClr val="FBEBD0"/>
                 </a:solidFill>
                 <a:latin typeface="Tahoma" pitchFamily="34" charset="0"/>
                 <a:ea typeface="Tahoma" pitchFamily="34" charset="-122"/>
@@ -7930,7 +8551,7 @@
             <a:r>
               <a:rPr lang="en-US" sz="1250" dirty="0">
                 <a:solidFill>
-                  <a:srgbClr val="EFE3D5"/>
+                  <a:srgbClr val="FBEBD0"/>
                 </a:solidFill>
                 <a:latin typeface="Tahoma" pitchFamily="34" charset="0"/>
                 <a:ea typeface="Tahoma" pitchFamily="34" charset="-122"/>
@@ -7944,7 +8565,7 @@
       </p:sp>
       <p:sp>
         <p:nvSpPr>
-          <p:cNvPr id="7" name="Shape 5"/>
+          <p:cNvPr id="9" name="Shape 7"/>
           <p:cNvSpPr/>
           <p:nvPr/>
         </p:nvSpPr>
@@ -7959,7 +8580,7 @@
             </a:avLst>
           </a:prstGeom>
           <a:solidFill>
-            <a:srgbClr val="F4ECE3"/>
+            <a:srgbClr val="FBEBD0"/>
           </a:solidFill>
           <a:ln/>
           <a:effectLst>
@@ -7973,7 +8594,7 @@
       </p:sp>
       <p:sp>
         <p:nvSpPr>
-          <p:cNvPr id="8" name="Text 6"/>
+          <p:cNvPr id="10" name="Text 8"/>
           <p:cNvSpPr/>
           <p:nvPr/>
         </p:nvSpPr>
@@ -7998,7 +8619,7 @@
             <a:r>
               <a:rPr lang="en-US" sz="2200" b="1" dirty="0">
                 <a:solidFill>
-                  <a:srgbClr val="3B2A1A"/>
+                  <a:srgbClr val="2E2420"/>
                 </a:solidFill>
                 <a:latin typeface="Tahoma" pitchFamily="34" charset="0"/>
                 <a:ea typeface="Tahoma" pitchFamily="34" charset="-122"/>
@@ -8012,7 +8633,7 @@
       </p:sp>
       <p:sp>
         <p:nvSpPr>
-          <p:cNvPr id="9" name="Text 7"/>
+          <p:cNvPr id="11" name="Text 9"/>
           <p:cNvSpPr/>
           <p:nvPr/>
         </p:nvSpPr>
@@ -8051,7 +8672,7 @@
       </p:sp>
       <p:sp>
         <p:nvSpPr>
-          <p:cNvPr id="10" name="Text 8"/>
+          <p:cNvPr id="12" name="Text 10"/>
           <p:cNvSpPr/>
           <p:nvPr/>
         </p:nvSpPr>
@@ -8076,7 +8697,7 @@
             <a:r>
               <a:rPr lang="en-US" sz="1250" dirty="0">
                 <a:solidFill>
-                  <a:srgbClr val="3B2A1A"/>
+                  <a:srgbClr val="2E2420"/>
                 </a:solidFill>
                 <a:latin typeface="Tahoma" pitchFamily="34" charset="0"/>
                 <a:ea typeface="Tahoma" pitchFamily="34" charset="-122"/>
@@ -8093,7 +8714,7 @@
             <a:r>
               <a:rPr lang="en-US" sz="1250" dirty="0">
                 <a:solidFill>
-                  <a:srgbClr val="3B2A1A"/>
+                  <a:srgbClr val="2E2420"/>
                 </a:solidFill>
                 <a:latin typeface="Tahoma" pitchFamily="34" charset="0"/>
                 <a:ea typeface="Tahoma" pitchFamily="34" charset="-122"/>
@@ -8107,7 +8728,7 @@
       </p:sp>
       <p:sp>
         <p:nvSpPr>
-          <p:cNvPr id="11" name="Shape 9"/>
+          <p:cNvPr id="13" name="Shape 11"/>
           <p:cNvSpPr/>
           <p:nvPr/>
         </p:nvSpPr>
@@ -8122,7 +8743,7 @@
             </a:avLst>
           </a:prstGeom>
           <a:solidFill>
-            <a:srgbClr val="F4ECE3"/>
+            <a:srgbClr val="FBEBD0"/>
           </a:solidFill>
           <a:ln/>
           <a:effectLst>
@@ -8136,7 +8757,7 @@
       </p:sp>
       <p:sp>
         <p:nvSpPr>
-          <p:cNvPr id="12" name="Text 10"/>
+          <p:cNvPr id="14" name="Text 12"/>
           <p:cNvSpPr/>
           <p:nvPr/>
         </p:nvSpPr>
@@ -8161,7 +8782,7 @@
             <a:r>
               <a:rPr lang="en-US" sz="2200" b="1" dirty="0">
                 <a:solidFill>
-                  <a:srgbClr val="3B2A1A"/>
+                  <a:srgbClr val="2E2420"/>
                 </a:solidFill>
                 <a:latin typeface="Tahoma" pitchFamily="34" charset="0"/>
                 <a:ea typeface="Tahoma" pitchFamily="34" charset="-122"/>
@@ -8175,7 +8796,7 @@
       </p:sp>
       <p:sp>
         <p:nvSpPr>
-          <p:cNvPr id="13" name="Text 11"/>
+          <p:cNvPr id="15" name="Text 13"/>
           <p:cNvSpPr/>
           <p:nvPr/>
         </p:nvSpPr>
@@ -8214,7 +8835,7 @@
       </p:sp>
       <p:sp>
         <p:nvSpPr>
-          <p:cNvPr id="14" name="Text 12"/>
+          <p:cNvPr id="16" name="Text 14"/>
           <p:cNvSpPr/>
           <p:nvPr/>
         </p:nvSpPr>
@@ -8239,7 +8860,7 @@
             <a:r>
               <a:rPr lang="en-US" sz="1250" dirty="0">
                 <a:solidFill>
-                  <a:srgbClr val="3B2A1A"/>
+                  <a:srgbClr val="2E2420"/>
                 </a:solidFill>
                 <a:latin typeface="Tahoma" pitchFamily="34" charset="0"/>
                 <a:ea typeface="Tahoma" pitchFamily="34" charset="-122"/>
@@ -8256,7 +8877,7 @@
             <a:r>
               <a:rPr lang="en-US" sz="1250" dirty="0">
                 <a:solidFill>
-                  <a:srgbClr val="3B2A1A"/>
+                  <a:srgbClr val="2E2420"/>
                 </a:solidFill>
                 <a:latin typeface="Tahoma" pitchFamily="34" charset="0"/>
                 <a:ea typeface="Tahoma" pitchFamily="34" charset="-122"/>
@@ -8270,7 +8891,7 @@
       </p:sp>
       <p:sp>
         <p:nvSpPr>
-          <p:cNvPr id="15" name="Shape 13"/>
+          <p:cNvPr id="17" name="Shape 15"/>
           <p:cNvSpPr/>
           <p:nvPr/>
         </p:nvSpPr>
@@ -8285,7 +8906,7 @@
             </a:avLst>
           </a:prstGeom>
           <a:solidFill>
-            <a:srgbClr val="F4ECE3"/>
+            <a:srgbClr val="FBEBD0"/>
           </a:solidFill>
           <a:ln/>
           <a:effectLst>
@@ -8299,7 +8920,7 @@
       </p:sp>
       <p:sp>
         <p:nvSpPr>
-          <p:cNvPr id="16" name="Text 14"/>
+          <p:cNvPr id="18" name="Text 16"/>
           <p:cNvSpPr/>
           <p:nvPr/>
         </p:nvSpPr>
@@ -8324,7 +8945,7 @@
             <a:r>
               <a:rPr lang="en-US" sz="2200" b="1" dirty="0">
                 <a:solidFill>
-                  <a:srgbClr val="3B2A1A"/>
+                  <a:srgbClr val="2E2420"/>
                 </a:solidFill>
                 <a:latin typeface="Tahoma" pitchFamily="34" charset="0"/>
                 <a:ea typeface="Tahoma" pitchFamily="34" charset="-122"/>
@@ -8338,7 +8959,7 @@
       </p:sp>
       <p:sp>
         <p:nvSpPr>
-          <p:cNvPr id="17" name="Text 15"/>
+          <p:cNvPr id="19" name="Text 17"/>
           <p:cNvSpPr/>
           <p:nvPr/>
         </p:nvSpPr>
@@ -8377,7 +8998,7 @@
       </p:sp>
       <p:sp>
         <p:nvSpPr>
-          <p:cNvPr id="18" name="Text 16"/>
+          <p:cNvPr id="20" name="Text 18"/>
           <p:cNvSpPr/>
           <p:nvPr/>
         </p:nvSpPr>
@@ -8402,7 +9023,7 @@
             <a:r>
               <a:rPr lang="en-US" sz="1250" dirty="0">
                 <a:solidFill>
-                  <a:srgbClr val="3B2A1A"/>
+                  <a:srgbClr val="2E2420"/>
                 </a:solidFill>
                 <a:latin typeface="Tahoma" pitchFamily="34" charset="0"/>
                 <a:ea typeface="Tahoma" pitchFamily="34" charset="-122"/>
@@ -8419,7 +9040,7 @@
             <a:r>
               <a:rPr lang="en-US" sz="1250" dirty="0">
                 <a:solidFill>
-                  <a:srgbClr val="3B2A1A"/>
+                  <a:srgbClr val="2E2420"/>
                 </a:solidFill>
                 <a:latin typeface="Tahoma" pitchFamily="34" charset="0"/>
                 <a:ea typeface="Tahoma" pitchFamily="34" charset="-122"/>
@@ -8433,7 +9054,7 @@
       </p:sp>
       <p:sp>
         <p:nvSpPr>
-          <p:cNvPr id="19" name="Shape 17"/>
+          <p:cNvPr id="21" name="Shape 19"/>
           <p:cNvSpPr/>
           <p:nvPr/>
         </p:nvSpPr>
@@ -8448,14 +9069,14 @@
             </a:avLst>
           </a:prstGeom>
           <a:solidFill>
-            <a:srgbClr val="F4ECE3"/>
-          </a:solidFill>
-          <a:ln/>
-        </p:spPr>
-      </p:sp>
-      <p:sp>
-        <p:nvSpPr>
-          <p:cNvPr id="20" name="Text 18"/>
+            <a:srgbClr val="FBEBD0"/>
+          </a:solidFill>
+          <a:ln/>
+        </p:spPr>
+      </p:sp>
+      <p:sp>
+        <p:nvSpPr>
+          <p:cNvPr id="22" name="Text 20"/>
           <p:cNvSpPr/>
           <p:nvPr/>
         </p:nvSpPr>
@@ -8494,7 +9115,7 @@
             <a:r>
               <a:rPr lang="en-US" sz="1500" dirty="0">
                 <a:solidFill>
-                  <a:srgbClr val="3B2A1A"/>
+                  <a:srgbClr val="2E2420"/>
                 </a:solidFill>
                 <a:latin typeface="Tahoma" pitchFamily="34" charset="0"/>
                 <a:ea typeface="Tahoma" pitchFamily="34" charset="-122"/>
@@ -8520,7 +9141,7 @@
     <p:bg>
       <p:bgPr>
         <a:solidFill>
-          <a:srgbClr val="FFFFFF"/>
+          <a:srgbClr val="F6F2EC"/>
         </a:solidFill>
       </p:bgPr>
     </p:bg>
@@ -8540,14 +9161,54 @@
       </p:grpSpPr>
       <p:sp>
         <p:nvSpPr>
-          <p:cNvPr id="2" name="Text 0"/>
+          <p:cNvPr id="2" name="Shape 0"/>
+          <p:cNvSpPr/>
+          <p:nvPr/>
+        </p:nvSpPr>
+        <p:spPr>
+          <a:xfrm>
+            <a:off x="11475720" y="-411480"/>
+            <a:ext cx="1188720" cy="1188720"/>
+          </a:xfrm>
+          <a:prstGeom prst="irregularSeal1">
+            <a:avLst/>
+          </a:prstGeom>
+          <a:solidFill>
+            <a:srgbClr val="AD3A38"/>
+          </a:solidFill>
+          <a:ln/>
+        </p:spPr>
+      </p:sp>
+      <p:sp>
+        <p:nvSpPr>
+          <p:cNvPr id="3" name="Shape 1"/>
+          <p:cNvSpPr/>
+          <p:nvPr/>
+        </p:nvSpPr>
+        <p:spPr>
+          <a:xfrm>
+            <a:off x="-411480" y="6080760"/>
+            <a:ext cx="1005840" cy="1005840"/>
+          </a:xfrm>
+          <a:prstGeom prst="ellipse">
+            <a:avLst/>
+          </a:prstGeom>
+          <a:solidFill>
+            <a:srgbClr val="FFCB64"/>
+          </a:solidFill>
+          <a:ln/>
+        </p:spPr>
+      </p:sp>
+      <p:sp>
+        <p:nvSpPr>
+          <p:cNvPr id="4" name="Text 2"/>
           <p:cNvSpPr/>
           <p:nvPr/>
         </p:nvSpPr>
         <p:spPr>
           <a:xfrm>
             <a:off x="640080" y="411480"/>
-            <a:ext cx="10972800" cy="731520"/>
+            <a:ext cx="10515600" cy="731520"/>
           </a:xfrm>
           <a:prstGeom prst="rect">
             <a:avLst/>
@@ -8565,7 +9226,7 @@
             <a:r>
               <a:rPr lang="en-US" sz="3200" b="1" dirty="0">
                 <a:solidFill>
-                  <a:srgbClr val="3B2A1A"/>
+                  <a:srgbClr val="AD3A38"/>
                 </a:solidFill>
                 <a:latin typeface="Tahoma" pitchFamily="34" charset="0"/>
                 <a:ea typeface="Tahoma" pitchFamily="34" charset="-122"/>
@@ -8579,7 +9240,7 @@
       </p:sp>
       <p:sp>
         <p:nvSpPr>
-          <p:cNvPr id="3" name="Shape 1"/>
+          <p:cNvPr id="5" name="Shape 3"/>
           <p:cNvSpPr/>
           <p:nvPr/>
         </p:nvSpPr>
@@ -8594,14 +9255,14 @@
             </a:avLst>
           </a:prstGeom>
           <a:solidFill>
-            <a:srgbClr val="F4ECE3"/>
-          </a:solidFill>
-          <a:ln/>
-        </p:spPr>
-      </p:sp>
-      <p:sp>
-        <p:nvSpPr>
-          <p:cNvPr id="4" name="Shape 2"/>
+            <a:srgbClr val="FBEBD0"/>
+          </a:solidFill>
+          <a:ln/>
+        </p:spPr>
+      </p:sp>
+      <p:sp>
+        <p:nvSpPr>
+          <p:cNvPr id="6" name="Shape 4"/>
           <p:cNvSpPr/>
           <p:nvPr/>
         </p:nvSpPr>
@@ -8614,14 +9275,14 @@
             <a:avLst/>
           </a:prstGeom>
           <a:solidFill>
-            <a:srgbClr val="7A4A26"/>
+            <a:srgbClr val="AD3A38"/>
           </a:solidFill>
           <a:ln/>
         </p:spPr>
       </p:sp>
       <p:pic>
         <p:nvPicPr>
-          <p:cNvPr id="5" name="Image 0" descr="preencoded.png">    </p:cNvPr>
+          <p:cNvPr id="7" name="Image 0" descr="preencoded.png">    </p:cNvPr>
           <p:cNvPicPr>
             <a:picLocks noChangeAspect="1"/>
           </p:cNvPicPr>
@@ -8645,7 +9306,7 @@
       </p:pic>
       <p:sp>
         <p:nvSpPr>
-          <p:cNvPr id="6" name="Text 3"/>
+          <p:cNvPr id="8" name="Text 5"/>
           <p:cNvSpPr/>
           <p:nvPr/>
         </p:nvSpPr>
@@ -8670,7 +9331,7 @@
             <a:r>
               <a:rPr lang="en-US" sz="1800" b="1" dirty="0">
                 <a:solidFill>
-                  <a:srgbClr val="3B2A1A"/>
+                  <a:srgbClr val="2E2420"/>
                 </a:solidFill>
                 <a:latin typeface="Tahoma" pitchFamily="34" charset="0"/>
                 <a:ea typeface="Tahoma" pitchFamily="34" charset="-122"/>
@@ -8684,7 +9345,7 @@
       </p:sp>
       <p:sp>
         <p:nvSpPr>
-          <p:cNvPr id="7" name="Text 4"/>
+          <p:cNvPr id="9" name="Text 6"/>
           <p:cNvSpPr/>
           <p:nvPr/>
         </p:nvSpPr>
@@ -8723,7 +9384,7 @@
       </p:sp>
       <p:sp>
         <p:nvSpPr>
-          <p:cNvPr id="8" name="Text 5"/>
+          <p:cNvPr id="10" name="Text 7"/>
           <p:cNvSpPr/>
           <p:nvPr/>
         </p:nvSpPr>
@@ -8762,7 +9423,7 @@
       </p:sp>
       <p:sp>
         <p:nvSpPr>
-          <p:cNvPr id="9" name="Shape 6"/>
+          <p:cNvPr id="11" name="Shape 8"/>
           <p:cNvSpPr/>
           <p:nvPr/>
         </p:nvSpPr>
@@ -8777,14 +9438,14 @@
             </a:avLst>
           </a:prstGeom>
           <a:solidFill>
-            <a:srgbClr val="C08552"/>
-          </a:solidFill>
-          <a:ln/>
-        </p:spPr>
-      </p:sp>
-      <p:sp>
-        <p:nvSpPr>
-          <p:cNvPr id="10" name="Shape 7"/>
+            <a:srgbClr val="F3BE72"/>
+          </a:solidFill>
+          <a:ln/>
+        </p:spPr>
+      </p:sp>
+      <p:sp>
+        <p:nvSpPr>
+          <p:cNvPr id="12" name="Shape 9"/>
           <p:cNvSpPr/>
           <p:nvPr/>
         </p:nvSpPr>
@@ -8797,14 +9458,14 @@
             <a:avLst/>
           </a:prstGeom>
           <a:solidFill>
-            <a:srgbClr val="2E1F14"/>
+            <a:srgbClr val="AD3A38"/>
           </a:solidFill>
           <a:ln/>
         </p:spPr>
       </p:sp>
       <p:pic>
         <p:nvPicPr>
-          <p:cNvPr id="11" name="Image 1" descr="preencoded.png">    </p:cNvPr>
+          <p:cNvPr id="13" name="Image 1" descr="preencoded.png">    </p:cNvPr>
           <p:cNvPicPr>
             <a:picLocks noChangeAspect="1"/>
           </p:cNvPicPr>
@@ -8828,7 +9489,7 @@
       </p:pic>
       <p:sp>
         <p:nvSpPr>
-          <p:cNvPr id="12" name="Text 8"/>
+          <p:cNvPr id="14" name="Text 10"/>
           <p:cNvSpPr/>
           <p:nvPr/>
         </p:nvSpPr>
@@ -8853,7 +9514,7 @@
             <a:r>
               <a:rPr lang="en-US" sz="1800" b="1" dirty="0">
                 <a:solidFill>
-                  <a:srgbClr val="3B2A1A"/>
+                  <a:srgbClr val="2E2420"/>
                 </a:solidFill>
                 <a:latin typeface="Tahoma" pitchFamily="34" charset="0"/>
                 <a:ea typeface="Tahoma" pitchFamily="34" charset="-122"/>
@@ -8867,7 +9528,7 @@
       </p:sp>
       <p:sp>
         <p:nvSpPr>
-          <p:cNvPr id="13" name="Text 9"/>
+          <p:cNvPr id="15" name="Text 11"/>
           <p:cNvSpPr/>
           <p:nvPr/>
         </p:nvSpPr>
@@ -8906,7 +9567,7 @@
       </p:sp>
       <p:sp>
         <p:nvSpPr>
-          <p:cNvPr id="14" name="Text 10"/>
+          <p:cNvPr id="16" name="Text 12"/>
           <p:cNvSpPr/>
           <p:nvPr/>
         </p:nvSpPr>
@@ -8931,7 +9592,7 @@
             <a:r>
               <a:rPr lang="en-US" sz="1100" b="1" dirty="0">
                 <a:solidFill>
-                  <a:srgbClr val="2E1F14"/>
+                  <a:srgbClr val="7A2523"/>
                 </a:solidFill>
                 <a:latin typeface="Tahoma" pitchFamily="34" charset="0"/>
                 <a:ea typeface="Tahoma" pitchFamily="34" charset="-122"/>
@@ -8945,7 +9606,7 @@
       </p:sp>
       <p:sp>
         <p:nvSpPr>
-          <p:cNvPr id="15" name="Shape 11"/>
+          <p:cNvPr id="17" name="Shape 13"/>
           <p:cNvSpPr/>
           <p:nvPr/>
         </p:nvSpPr>
@@ -8960,14 +9621,14 @@
             </a:avLst>
           </a:prstGeom>
           <a:solidFill>
-            <a:srgbClr val="7A4A26"/>
-          </a:solidFill>
-          <a:ln/>
-        </p:spPr>
-      </p:sp>
-      <p:sp>
-        <p:nvSpPr>
-          <p:cNvPr id="16" name="Shape 12"/>
+            <a:srgbClr val="AD3A38"/>
+          </a:solidFill>
+          <a:ln/>
+        </p:spPr>
+      </p:sp>
+      <p:sp>
+        <p:nvSpPr>
+          <p:cNvPr id="18" name="Shape 14"/>
           <p:cNvSpPr/>
           <p:nvPr/>
         </p:nvSpPr>
@@ -8980,14 +9641,14 @@
             <a:avLst/>
           </a:prstGeom>
           <a:solidFill>
-            <a:srgbClr val="2E1F14"/>
+            <a:srgbClr val="7A2523"/>
           </a:solidFill>
           <a:ln/>
         </p:spPr>
       </p:sp>
       <p:pic>
         <p:nvPicPr>
-          <p:cNvPr id="17" name="Image 2" descr="preencoded.png">    </p:cNvPr>
+          <p:cNvPr id="19" name="Image 2" descr="preencoded.png">    </p:cNvPr>
           <p:cNvPicPr>
             <a:picLocks noChangeAspect="1"/>
           </p:cNvPicPr>
@@ -9011,7 +9672,7 @@
       </p:pic>
       <p:sp>
         <p:nvSpPr>
-          <p:cNvPr id="18" name="Text 13"/>
+          <p:cNvPr id="20" name="Text 15"/>
           <p:cNvSpPr/>
           <p:nvPr/>
         </p:nvSpPr>
@@ -9050,7 +9711,7 @@
       </p:sp>
       <p:sp>
         <p:nvSpPr>
-          <p:cNvPr id="19" name="Text 14"/>
+          <p:cNvPr id="21" name="Text 16"/>
           <p:cNvSpPr/>
           <p:nvPr/>
         </p:nvSpPr>
@@ -9075,7 +9736,7 @@
             <a:r>
               <a:rPr lang="en-US" sz="1350" dirty="0">
                 <a:solidFill>
-                  <a:srgbClr val="EFE3D5"/>
+                  <a:srgbClr val="FBEBD0"/>
                 </a:solidFill>
                 <a:latin typeface="Tahoma" pitchFamily="34" charset="0"/>
                 <a:ea typeface="Tahoma" pitchFamily="34" charset="-122"/>
@@ -9089,7 +9750,7 @@
       </p:sp>
       <p:sp>
         <p:nvSpPr>
-          <p:cNvPr id="20" name="Text 15"/>
+          <p:cNvPr id="22" name="Text 17"/>
           <p:cNvSpPr/>
           <p:nvPr/>
         </p:nvSpPr>
@@ -9114,7 +9775,7 @@
             <a:r>
               <a:rPr lang="en-US" sz="1100" dirty="0">
                 <a:solidFill>
-                  <a:srgbClr val="C08552"/>
+                  <a:srgbClr val="FFCB64"/>
                 </a:solidFill>
                 <a:latin typeface="Tahoma" pitchFamily="34" charset="0"/>
                 <a:ea typeface="Tahoma" pitchFamily="34" charset="-122"/>
@@ -9128,14 +9789,14 @@
       </p:sp>
       <p:sp>
         <p:nvSpPr>
-          <p:cNvPr id="21" name="Text 16"/>
+          <p:cNvPr id="23" name="Text 18"/>
           <p:cNvSpPr/>
           <p:nvPr/>
         </p:nvSpPr>
         <p:spPr>
           <a:xfrm>
             <a:off x="640080" y="5943600"/>
-            <a:ext cx="10972800" cy="502920"/>
+            <a:ext cx="10515600" cy="502920"/>
           </a:xfrm>
           <a:prstGeom prst="rect">
             <a:avLst/>
@@ -9153,7 +9814,7 @@
             <a:r>
               <a:rPr lang="en-US" sz="1500" i="1" dirty="0">
                 <a:solidFill>
-                  <a:srgbClr val="7A4A26"/>
+                  <a:srgbClr val="C65E52"/>
                 </a:solidFill>
                 <a:latin typeface="Tahoma" pitchFamily="34" charset="0"/>
                 <a:ea typeface="Tahoma" pitchFamily="34" charset="-122"/>
@@ -9179,7 +9840,7 @@
     <p:bg>
       <p:bgPr>
         <a:solidFill>
-          <a:srgbClr val="FFFFFF"/>
+          <a:srgbClr val="F6F2EC"/>
         </a:solidFill>
       </p:bgPr>
     </p:bg>
@@ -9199,14 +9860,54 @@
       </p:grpSpPr>
       <p:sp>
         <p:nvSpPr>
-          <p:cNvPr id="2" name="Text 0"/>
+          <p:cNvPr id="2" name="Shape 0"/>
+          <p:cNvSpPr/>
+          <p:nvPr/>
+        </p:nvSpPr>
+        <p:spPr>
+          <a:xfrm>
+            <a:off x="11475720" y="-411480"/>
+            <a:ext cx="1188720" cy="1188720"/>
+          </a:xfrm>
+          <a:prstGeom prst="irregularSeal1">
+            <a:avLst/>
+          </a:prstGeom>
+          <a:solidFill>
+            <a:srgbClr val="AD3A38"/>
+          </a:solidFill>
+          <a:ln/>
+        </p:spPr>
+      </p:sp>
+      <p:sp>
+        <p:nvSpPr>
+          <p:cNvPr id="3" name="Shape 1"/>
+          <p:cNvSpPr/>
+          <p:nvPr/>
+        </p:nvSpPr>
+        <p:spPr>
+          <a:xfrm>
+            <a:off x="-411480" y="6080760"/>
+            <a:ext cx="1005840" cy="1005840"/>
+          </a:xfrm>
+          <a:prstGeom prst="ellipse">
+            <a:avLst/>
+          </a:prstGeom>
+          <a:solidFill>
+            <a:srgbClr val="FFCB64"/>
+          </a:solidFill>
+          <a:ln/>
+        </p:spPr>
+      </p:sp>
+      <p:sp>
+        <p:nvSpPr>
+          <p:cNvPr id="4" name="Text 2"/>
           <p:cNvSpPr/>
           <p:nvPr/>
         </p:nvSpPr>
         <p:spPr>
           <a:xfrm>
             <a:off x="640080" y="411480"/>
-            <a:ext cx="10972800" cy="731520"/>
+            <a:ext cx="10515600" cy="731520"/>
           </a:xfrm>
           <a:prstGeom prst="rect">
             <a:avLst/>
@@ -9224,7 +9925,7 @@
             <a:r>
               <a:rPr lang="en-US" sz="3200" b="1" dirty="0">
                 <a:solidFill>
-                  <a:srgbClr val="3B2A1A"/>
+                  <a:srgbClr val="AD3A38"/>
                 </a:solidFill>
                 <a:latin typeface="Tahoma" pitchFamily="34" charset="0"/>
                 <a:ea typeface="Tahoma" pitchFamily="34" charset="-122"/>
@@ -9238,7 +9939,7 @@
       </p:sp>
       <p:sp>
         <p:nvSpPr>
-          <p:cNvPr id="3" name="Shape 1"/>
+          <p:cNvPr id="5" name="Shape 3"/>
           <p:cNvSpPr/>
           <p:nvPr/>
         </p:nvSpPr>
@@ -9253,14 +9954,14 @@
             </a:avLst>
           </a:prstGeom>
           <a:solidFill>
-            <a:srgbClr val="F4ECE3"/>
-          </a:solidFill>
-          <a:ln/>
-        </p:spPr>
-      </p:sp>
-      <p:sp>
-        <p:nvSpPr>
-          <p:cNvPr id="4" name="Shape 2"/>
+            <a:srgbClr val="FBEBD0"/>
+          </a:solidFill>
+          <a:ln/>
+        </p:spPr>
+      </p:sp>
+      <p:sp>
+        <p:nvSpPr>
+          <p:cNvPr id="6" name="Shape 4"/>
           <p:cNvSpPr/>
           <p:nvPr/>
         </p:nvSpPr>
@@ -9280,7 +9981,7 @@
       </p:sp>
       <p:pic>
         <p:nvPicPr>
-          <p:cNvPr id="5" name="Image 0" descr="preencoded.png">    </p:cNvPr>
+          <p:cNvPr id="7" name="Image 0" descr="preencoded.png">    </p:cNvPr>
           <p:cNvPicPr>
             <a:picLocks noChangeAspect="1"/>
           </p:cNvPicPr>
@@ -9304,7 +10005,7 @@
       </p:pic>
       <p:sp>
         <p:nvSpPr>
-          <p:cNvPr id="6" name="Text 3"/>
+          <p:cNvPr id="8" name="Text 5"/>
           <p:cNvSpPr/>
           <p:nvPr/>
         </p:nvSpPr>
@@ -9329,7 +10030,7 @@
             <a:r>
               <a:rPr lang="en-US" sz="1900" b="1" dirty="0">
                 <a:solidFill>
-                  <a:srgbClr val="3B2A1A"/>
+                  <a:srgbClr val="2E2420"/>
                 </a:solidFill>
                 <a:latin typeface="Tahoma" pitchFamily="34" charset="0"/>
                 <a:ea typeface="Tahoma" pitchFamily="34" charset="-122"/>
@@ -9343,7 +10044,7 @@
       </p:sp>
       <p:sp>
         <p:nvSpPr>
-          <p:cNvPr id="7" name="Text 4"/>
+          <p:cNvPr id="9" name="Text 6"/>
           <p:cNvSpPr/>
           <p:nvPr/>
         </p:nvSpPr>
@@ -9382,7 +10083,7 @@
       </p:sp>
       <p:sp>
         <p:nvSpPr>
-          <p:cNvPr id="8" name="Shape 5"/>
+          <p:cNvPr id="10" name="Shape 7"/>
           <p:cNvSpPr/>
           <p:nvPr/>
         </p:nvSpPr>
@@ -9397,14 +10098,14 @@
             </a:avLst>
           </a:prstGeom>
           <a:solidFill>
-            <a:srgbClr val="F4ECE3"/>
-          </a:solidFill>
-          <a:ln/>
-        </p:spPr>
-      </p:sp>
-      <p:sp>
-        <p:nvSpPr>
-          <p:cNvPr id="9" name="Shape 6"/>
+            <a:srgbClr val="FBEBD0"/>
+          </a:solidFill>
+          <a:ln/>
+        </p:spPr>
+      </p:sp>
+      <p:sp>
+        <p:nvSpPr>
+          <p:cNvPr id="11" name="Shape 8"/>
           <p:cNvSpPr/>
           <p:nvPr/>
         </p:nvSpPr>
@@ -9424,7 +10125,7 @@
       </p:sp>
       <p:pic>
         <p:nvPicPr>
-          <p:cNvPr id="10" name="Image 1" descr="preencoded.png">    </p:cNvPr>
+          <p:cNvPr id="12" name="Image 1" descr="preencoded.png">    </p:cNvPr>
           <p:cNvPicPr>
             <a:picLocks noChangeAspect="1"/>
           </p:cNvPicPr>
@@ -9448,7 +10149,7 @@
       </p:pic>
       <p:sp>
         <p:nvSpPr>
-          <p:cNvPr id="11" name="Text 7"/>
+          <p:cNvPr id="13" name="Text 9"/>
           <p:cNvSpPr/>
           <p:nvPr/>
         </p:nvSpPr>
@@ -9473,7 +10174,7 @@
             <a:r>
               <a:rPr lang="en-US" sz="1900" b="1" dirty="0">
                 <a:solidFill>
-                  <a:srgbClr val="3B2A1A"/>
+                  <a:srgbClr val="2E2420"/>
                 </a:solidFill>
                 <a:latin typeface="Tahoma" pitchFamily="34" charset="0"/>
                 <a:ea typeface="Tahoma" pitchFamily="34" charset="-122"/>
@@ -9487,7 +10188,7 @@
       </p:sp>
       <p:sp>
         <p:nvSpPr>
-          <p:cNvPr id="12" name="Text 8"/>
+          <p:cNvPr id="14" name="Text 10"/>
           <p:cNvSpPr/>
           <p:nvPr/>
         </p:nvSpPr>
@@ -9526,7 +10227,7 @@
       </p:sp>
       <p:sp>
         <p:nvSpPr>
-          <p:cNvPr id="13" name="Shape 9"/>
+          <p:cNvPr id="15" name="Shape 11"/>
           <p:cNvSpPr/>
           <p:nvPr/>
         </p:nvSpPr>
@@ -9541,14 +10242,14 @@
             </a:avLst>
           </a:prstGeom>
           <a:solidFill>
-            <a:srgbClr val="F4ECE3"/>
-          </a:solidFill>
-          <a:ln/>
-        </p:spPr>
-      </p:sp>
-      <p:sp>
-        <p:nvSpPr>
-          <p:cNvPr id="14" name="Shape 10"/>
+            <a:srgbClr val="FBEBD0"/>
+          </a:solidFill>
+          <a:ln/>
+        </p:spPr>
+      </p:sp>
+      <p:sp>
+        <p:nvSpPr>
+          <p:cNvPr id="16" name="Shape 12"/>
           <p:cNvSpPr/>
           <p:nvPr/>
         </p:nvSpPr>
@@ -9568,7 +10269,7 @@
       </p:sp>
       <p:pic>
         <p:nvPicPr>
-          <p:cNvPr id="15" name="Image 2" descr="preencoded.png">    </p:cNvPr>
+          <p:cNvPr id="17" name="Image 2" descr="preencoded.png">    </p:cNvPr>
           <p:cNvPicPr>
             <a:picLocks noChangeAspect="1"/>
           </p:cNvPicPr>
@@ -9592,7 +10293,7 @@
       </p:pic>
       <p:sp>
         <p:nvSpPr>
-          <p:cNvPr id="16" name="Text 11"/>
+          <p:cNvPr id="18" name="Text 13"/>
           <p:cNvSpPr/>
           <p:nvPr/>
         </p:nvSpPr>
@@ -9617,7 +10318,7 @@
             <a:r>
               <a:rPr lang="en-US" sz="1900" b="1" dirty="0">
                 <a:solidFill>
-                  <a:srgbClr val="3B2A1A"/>
+                  <a:srgbClr val="2E2420"/>
                 </a:solidFill>
                 <a:latin typeface="Tahoma" pitchFamily="34" charset="0"/>
                 <a:ea typeface="Tahoma" pitchFamily="34" charset="-122"/>
@@ -9631,7 +10332,7 @@
       </p:sp>
       <p:sp>
         <p:nvSpPr>
-          <p:cNvPr id="17" name="Text 12"/>
+          <p:cNvPr id="19" name="Text 14"/>
           <p:cNvSpPr/>
           <p:nvPr/>
         </p:nvSpPr>
@@ -9670,14 +10371,14 @@
       </p:sp>
       <p:sp>
         <p:nvSpPr>
-          <p:cNvPr id="18" name="Text 13"/>
+          <p:cNvPr id="20" name="Text 15"/>
           <p:cNvSpPr/>
           <p:nvPr/>
         </p:nvSpPr>
         <p:spPr>
           <a:xfrm>
             <a:off x="640080" y="6263640"/>
-            <a:ext cx="10972800" cy="411480"/>
+            <a:ext cx="10515600" cy="411480"/>
           </a:xfrm>
           <a:prstGeom prst="rect">
             <a:avLst/>
@@ -9721,7 +10422,7 @@
     <p:bg>
       <p:bgPr>
         <a:solidFill>
-          <a:srgbClr val="FFFFFF"/>
+          <a:srgbClr val="F6F2EC"/>
         </a:solidFill>
       </p:bgPr>
     </p:bg>
@@ -9741,14 +10442,54 @@
       </p:grpSpPr>
       <p:sp>
         <p:nvSpPr>
-          <p:cNvPr id="2" name="Text 0"/>
+          <p:cNvPr id="2" name="Shape 0"/>
+          <p:cNvSpPr/>
+          <p:nvPr/>
+        </p:nvSpPr>
+        <p:spPr>
+          <a:xfrm>
+            <a:off x="11475720" y="-411480"/>
+            <a:ext cx="1188720" cy="1188720"/>
+          </a:xfrm>
+          <a:prstGeom prst="irregularSeal1">
+            <a:avLst/>
+          </a:prstGeom>
+          <a:solidFill>
+            <a:srgbClr val="AD3A38"/>
+          </a:solidFill>
+          <a:ln/>
+        </p:spPr>
+      </p:sp>
+      <p:sp>
+        <p:nvSpPr>
+          <p:cNvPr id="3" name="Shape 1"/>
+          <p:cNvSpPr/>
+          <p:nvPr/>
+        </p:nvSpPr>
+        <p:spPr>
+          <a:xfrm>
+            <a:off x="-411480" y="6080760"/>
+            <a:ext cx="1005840" cy="1005840"/>
+          </a:xfrm>
+          <a:prstGeom prst="ellipse">
+            <a:avLst/>
+          </a:prstGeom>
+          <a:solidFill>
+            <a:srgbClr val="FFCB64"/>
+          </a:solidFill>
+          <a:ln/>
+        </p:spPr>
+      </p:sp>
+      <p:sp>
+        <p:nvSpPr>
+          <p:cNvPr id="4" name="Text 2"/>
           <p:cNvSpPr/>
           <p:nvPr/>
         </p:nvSpPr>
         <p:spPr>
           <a:xfrm>
             <a:off x="640080" y="411480"/>
-            <a:ext cx="10972800" cy="731520"/>
+            <a:ext cx="10515600" cy="731520"/>
           </a:xfrm>
           <a:prstGeom prst="rect">
             <a:avLst/>
@@ -9766,7 +10507,7 @@
             <a:r>
               <a:rPr lang="en-US" sz="3200" b="1" dirty="0">
                 <a:solidFill>
-                  <a:srgbClr val="3B2A1A"/>
+                  <a:srgbClr val="AD3A38"/>
                 </a:solidFill>
                 <a:latin typeface="Tahoma" pitchFamily="34" charset="0"/>
                 <a:ea typeface="Tahoma" pitchFamily="34" charset="-122"/>
@@ -9780,7 +10521,7 @@
       </p:sp>
       <p:sp>
         <p:nvSpPr>
-          <p:cNvPr id="3" name="Shape 1"/>
+          <p:cNvPr id="5" name="Shape 3"/>
           <p:cNvSpPr/>
           <p:nvPr/>
         </p:nvSpPr>
@@ -9795,14 +10536,14 @@
             </a:avLst>
           </a:prstGeom>
           <a:solidFill>
-            <a:srgbClr val="7A4A26"/>
-          </a:solidFill>
-          <a:ln/>
-        </p:spPr>
-      </p:sp>
-      <p:sp>
-        <p:nvSpPr>
-          <p:cNvPr id="4" name="Text 2"/>
+            <a:srgbClr val="AD3A38"/>
+          </a:solidFill>
+          <a:ln/>
+        </p:spPr>
+      </p:sp>
+      <p:sp>
+        <p:nvSpPr>
+          <p:cNvPr id="6" name="Text 4"/>
           <p:cNvSpPr/>
           <p:nvPr/>
         </p:nvSpPr>
@@ -9841,7 +10582,7 @@
       </p:sp>
       <p:sp>
         <p:nvSpPr>
-          <p:cNvPr id="5" name="Text 3"/>
+          <p:cNvPr id="7" name="Text 5"/>
           <p:cNvSpPr/>
           <p:nvPr/>
         </p:nvSpPr>
@@ -9897,7 +10638,7 @@
       </p:sp>
       <p:sp>
         <p:nvSpPr>
-          <p:cNvPr id="6" name="Text 4"/>
+          <p:cNvPr id="8" name="Text 6"/>
           <p:cNvSpPr/>
           <p:nvPr/>
         </p:nvSpPr>
@@ -9936,7 +10677,7 @@
       </p:sp>
       <p:sp>
         <p:nvSpPr>
-          <p:cNvPr id="7" name="Shape 5"/>
+          <p:cNvPr id="9" name="Shape 7"/>
           <p:cNvSpPr/>
           <p:nvPr/>
         </p:nvSpPr>
@@ -9951,14 +10692,14 @@
             </a:avLst>
           </a:prstGeom>
           <a:solidFill>
-            <a:srgbClr val="9A6A3A"/>
-          </a:solidFill>
-          <a:ln/>
-        </p:spPr>
-      </p:sp>
-      <p:sp>
-        <p:nvSpPr>
-          <p:cNvPr id="8" name="Text 6"/>
+            <a:srgbClr val="C65E52"/>
+          </a:solidFill>
+          <a:ln/>
+        </p:spPr>
+      </p:sp>
+      <p:sp>
+        <p:nvSpPr>
+          <p:cNvPr id="10" name="Text 8"/>
           <p:cNvSpPr/>
           <p:nvPr/>
         </p:nvSpPr>
@@ -9997,7 +10738,7 @@
       </p:sp>
       <p:sp>
         <p:nvSpPr>
-          <p:cNvPr id="9" name="Text 7"/>
+          <p:cNvPr id="11" name="Text 9"/>
           <p:cNvSpPr/>
           <p:nvPr/>
         </p:nvSpPr>
@@ -10053,7 +10794,7 @@
       </p:sp>
       <p:sp>
         <p:nvSpPr>
-          <p:cNvPr id="10" name="Text 8"/>
+          <p:cNvPr id="12" name="Text 10"/>
           <p:cNvSpPr/>
           <p:nvPr/>
         </p:nvSpPr>
@@ -10092,7 +10833,7 @@
       </p:sp>
       <p:sp>
         <p:nvSpPr>
-          <p:cNvPr id="11" name="Shape 9"/>
+          <p:cNvPr id="13" name="Shape 11"/>
           <p:cNvSpPr/>
           <p:nvPr/>
         </p:nvSpPr>
@@ -10107,14 +10848,14 @@
             </a:avLst>
           </a:prstGeom>
           <a:solidFill>
-            <a:srgbClr val="C08552"/>
-          </a:solidFill>
-          <a:ln/>
-        </p:spPr>
-      </p:sp>
-      <p:sp>
-        <p:nvSpPr>
-          <p:cNvPr id="12" name="Text 10"/>
+            <a:srgbClr val="D98E3F"/>
+          </a:solidFill>
+          <a:ln/>
+        </p:spPr>
+      </p:sp>
+      <p:sp>
+        <p:nvSpPr>
+          <p:cNvPr id="14" name="Text 12"/>
           <p:cNvSpPr/>
           <p:nvPr/>
         </p:nvSpPr>
@@ -10153,7 +10894,7 @@
       </p:sp>
       <p:sp>
         <p:nvSpPr>
-          <p:cNvPr id="13" name="Text 11"/>
+          <p:cNvPr id="15" name="Text 13"/>
           <p:cNvSpPr/>
           <p:nvPr/>
         </p:nvSpPr>
@@ -10209,7 +10950,7 @@
       </p:sp>
       <p:sp>
         <p:nvSpPr>
-          <p:cNvPr id="14" name="Text 12"/>
+          <p:cNvPr id="16" name="Text 14"/>
           <p:cNvSpPr/>
           <p:nvPr/>
         </p:nvSpPr>
@@ -10248,7 +10989,7 @@
       </p:sp>
       <p:sp>
         <p:nvSpPr>
-          <p:cNvPr id="15" name="Shape 13"/>
+          <p:cNvPr id="17" name="Shape 15"/>
           <p:cNvSpPr/>
           <p:nvPr/>
         </p:nvSpPr>
@@ -10270,7 +11011,7 @@
       </p:sp>
       <p:sp>
         <p:nvSpPr>
-          <p:cNvPr id="16" name="Text 14"/>
+          <p:cNvPr id="18" name="Text 16"/>
           <p:cNvSpPr/>
           <p:nvPr/>
         </p:nvSpPr>
@@ -10309,7 +11050,7 @@
       </p:sp>
       <p:sp>
         <p:nvSpPr>
-          <p:cNvPr id="17" name="Text 15"/>
+          <p:cNvPr id="19" name="Text 17"/>
           <p:cNvSpPr/>
           <p:nvPr/>
         </p:nvSpPr>
@@ -10365,7 +11106,7 @@
       </p:sp>
       <p:sp>
         <p:nvSpPr>
-          <p:cNvPr id="18" name="Shape 16"/>
+          <p:cNvPr id="20" name="Shape 18"/>
           <p:cNvSpPr/>
           <p:nvPr/>
         </p:nvSpPr>
@@ -10380,14 +11121,14 @@
             </a:avLst>
           </a:prstGeom>
           <a:solidFill>
-            <a:srgbClr val="2E1F14"/>
-          </a:solidFill>
-          <a:ln/>
-        </p:spPr>
-      </p:sp>
-      <p:sp>
-        <p:nvSpPr>
-          <p:cNvPr id="19" name="Text 17"/>
+            <a:srgbClr val="AD3A38"/>
+          </a:solidFill>
+          <a:ln/>
+        </p:spPr>
+      </p:sp>
+      <p:sp>
+        <p:nvSpPr>
+          <p:cNvPr id="21" name="Text 19"/>
           <p:cNvSpPr/>
           <p:nvPr/>
         </p:nvSpPr>
@@ -10412,7 +11153,7 @@
             <a:r>
               <a:rPr lang="en-US" sz="1700" dirty="0">
                 <a:solidFill>
-                  <a:srgbClr val="D9A876"/>
+                  <a:srgbClr val="FFCB64"/>
                 </a:solidFill>
                 <a:latin typeface="Tahoma" pitchFamily="34" charset="0"/>
                 <a:ea typeface="Tahoma" pitchFamily="34" charset="-122"/>
@@ -10440,7 +11181,7 @@
             <a:r>
               <a:rPr lang="en-US" sz="1700" dirty="0">
                 <a:solidFill>
-                  <a:srgbClr val="C9B8A5"/>
+                  <a:srgbClr val="F3C8B8"/>
                 </a:solidFill>
                 <a:latin typeface="Tahoma" pitchFamily="34" charset="0"/>
                 <a:ea typeface="Tahoma" pitchFamily="34" charset="-122"/>
@@ -10454,7 +11195,7 @@
             <a:r>
               <a:rPr lang="en-US" sz="1700" dirty="0">
                 <a:solidFill>
-                  <a:srgbClr val="9CBF8C"/>
+                  <a:srgbClr val="CFE3B8"/>
                 </a:solidFill>
                 <a:latin typeface="Tahoma" pitchFamily="34" charset="0"/>
                 <a:ea typeface="Tahoma" pitchFamily="34" charset="-122"/>
@@ -10468,14 +11209,14 @@
       </p:sp>
       <p:sp>
         <p:nvSpPr>
-          <p:cNvPr id="20" name="Text 18"/>
+          <p:cNvPr id="22" name="Text 20"/>
           <p:cNvSpPr/>
           <p:nvPr/>
         </p:nvSpPr>
         <p:spPr>
           <a:xfrm>
             <a:off x="640080" y="5623560"/>
-            <a:ext cx="10972800" cy="822960"/>
+            <a:ext cx="10515600" cy="822960"/>
           </a:xfrm>
           <a:prstGeom prst="rect">
             <a:avLst/>
@@ -10493,7 +11234,7 @@
             <a:r>
               <a:rPr lang="en-US" sz="1500" b="1" dirty="0">
                 <a:solidFill>
-                  <a:srgbClr val="7A4A26"/>
+                  <a:srgbClr val="AD3A38"/>
                 </a:solidFill>
                 <a:latin typeface="Tahoma" pitchFamily="34" charset="0"/>
                 <a:ea typeface="Tahoma" pitchFamily="34" charset="-122"/>
@@ -10507,7 +11248,7 @@
             <a:r>
               <a:rPr lang="en-US" sz="1500" dirty="0">
                 <a:solidFill>
-                  <a:srgbClr val="3B2A1A"/>
+                  <a:srgbClr val="2E2420"/>
                 </a:solidFill>
                 <a:latin typeface="Tahoma" pitchFamily="34" charset="0"/>
                 <a:ea typeface="Tahoma" pitchFamily="34" charset="-122"/>
@@ -10533,7 +11274,7 @@
     <p:bg>
       <p:bgPr>
         <a:solidFill>
-          <a:srgbClr val="2E1F14"/>
+          <a:srgbClr val="F6F2EC"/>
         </a:solidFill>
       </p:bgPr>
     </p:bg>
@@ -10553,13 +11294,73 @@
       </p:grpSpPr>
       <p:sp>
         <p:nvSpPr>
-          <p:cNvPr id="2" name="Text 0"/>
-          <p:cNvSpPr/>
-          <p:nvPr/>
-        </p:nvSpPr>
-        <p:spPr>
-          <a:xfrm>
-            <a:off x="822960" y="1234440"/>
+          <p:cNvPr id="2" name="Shape 0"/>
+          <p:cNvSpPr/>
+          <p:nvPr/>
+        </p:nvSpPr>
+        <p:spPr>
+          <a:xfrm>
+            <a:off x="11475720" y="-411480"/>
+            <a:ext cx="1188720" cy="1188720"/>
+          </a:xfrm>
+          <a:prstGeom prst="irregularSeal1">
+            <a:avLst/>
+          </a:prstGeom>
+          <a:solidFill>
+            <a:srgbClr val="AD3A38"/>
+          </a:solidFill>
+          <a:ln/>
+        </p:spPr>
+      </p:sp>
+      <p:sp>
+        <p:nvSpPr>
+          <p:cNvPr id="3" name="Shape 1"/>
+          <p:cNvSpPr/>
+          <p:nvPr/>
+        </p:nvSpPr>
+        <p:spPr>
+          <a:xfrm>
+            <a:off x="-411480" y="6080760"/>
+            <a:ext cx="1005840" cy="1005840"/>
+          </a:xfrm>
+          <a:prstGeom prst="ellipse">
+            <a:avLst/>
+          </a:prstGeom>
+          <a:solidFill>
+            <a:srgbClr val="FFCB64"/>
+          </a:solidFill>
+          <a:ln/>
+        </p:spPr>
+      </p:sp>
+      <p:sp>
+        <p:nvSpPr>
+          <p:cNvPr id="4" name="Shape 2"/>
+          <p:cNvSpPr/>
+          <p:nvPr/>
+        </p:nvSpPr>
+        <p:spPr>
+          <a:xfrm>
+            <a:off x="10927080" y="5989320"/>
+            <a:ext cx="868680" cy="868680"/>
+          </a:xfrm>
+          <a:prstGeom prst="irregularSeal1">
+            <a:avLst/>
+          </a:prstGeom>
+          <a:solidFill>
+            <a:srgbClr val="C65E52"/>
+          </a:solidFill>
+          <a:ln/>
+        </p:spPr>
+      </p:sp>
+      <p:sp>
+        <p:nvSpPr>
+          <p:cNvPr id="5" name="Text 3"/>
+          <p:cNvSpPr/>
+          <p:nvPr/>
+        </p:nvSpPr>
+        <p:spPr>
+          <a:xfrm>
+            <a:off x="822960" y="1188720"/>
             <a:ext cx="5486400" cy="457200"/>
           </a:xfrm>
           <a:prstGeom prst="rect">
@@ -10576,15 +11377,93 @@
               <a:buNone/>
             </a:pPr>
             <a:r>
+              <a:rPr lang="en-US" sz="1800" b="1" dirty="0">
+                <a:solidFill>
+                  <a:srgbClr val="C65E52"/>
+                </a:solidFill>
+                <a:latin typeface="Tahoma" pitchFamily="34" charset="0"/>
+                <a:ea typeface="Tahoma" pitchFamily="34" charset="-122"/>
+                <a:cs typeface="Tahoma" pitchFamily="34" charset="-120"/>
+              </a:rPr>
+              <a:t>ช่วงที่ 2</a:t>
+            </a:r>
+            <a:endParaRPr lang="en-US" sz="1800" dirty="0"/>
+          </a:p>
+        </p:txBody>
+      </p:sp>
+      <p:sp>
+        <p:nvSpPr>
+          <p:cNvPr id="6" name="Text 4"/>
+          <p:cNvSpPr/>
+          <p:nvPr/>
+        </p:nvSpPr>
+        <p:spPr>
+          <a:xfrm>
+            <a:off x="822960" y="1737360"/>
+            <a:ext cx="10515600" cy="1005840"/>
+          </a:xfrm>
+          <a:prstGeom prst="rect">
+            <a:avLst/>
+          </a:prstGeom>
+          <a:noFill/>
+          <a:ln/>
+        </p:spPr>
+        <p:txBody>
+          <a:bodyPr wrap="square" rtlCol="0" anchor="ctr"/>
+          <a:lstStyle/>
+          <a:p>
+            <a:pPr indent="0" marL="0">
+              <a:buNone/>
+            </a:pPr>
+            <a:r>
+              <a:rPr lang="en-US" sz="4000" b="1" dirty="0">
+                <a:solidFill>
+                  <a:srgbClr val="AD3A38"/>
+                </a:solidFill>
+                <a:latin typeface="Tahoma" pitchFamily="34" charset="0"/>
+                <a:ea typeface="Tahoma" pitchFamily="34" charset="-122"/>
+                <a:cs typeface="Tahoma" pitchFamily="34" charset="-120"/>
+              </a:rPr>
+              <a:t>เดโม่สด: ร้าน “บ้านกาแฟหอมละมุน”</a:t>
+            </a:r>
+            <a:endParaRPr lang="en-US" sz="4000" dirty="0"/>
+          </a:p>
+        </p:txBody>
+      </p:sp>
+      <p:sp>
+        <p:nvSpPr>
+          <p:cNvPr id="7" name="Text 5"/>
+          <p:cNvSpPr/>
+          <p:nvPr/>
+        </p:nvSpPr>
+        <p:spPr>
+          <a:xfrm>
+            <a:off x="822960" y="2834640"/>
+            <a:ext cx="9692640" cy="822960"/>
+          </a:xfrm>
+          <a:prstGeom prst="rect">
+            <a:avLst/>
+          </a:prstGeom>
+          <a:noFill/>
+          <a:ln/>
+        </p:spPr>
+        <p:txBody>
+          <a:bodyPr wrap="square" rtlCol="0" anchor="ctr"/>
+          <a:lstStyle/>
+          <a:p>
+            <a:pPr indent="0" marL="0">
+              <a:buNone/>
+            </a:pPr>
+            <a:r>
               <a:rPr lang="en-US" sz="1800" dirty="0">
                 <a:solidFill>
-                  <a:srgbClr val="C08552"/>
-                </a:solidFill>
-                <a:latin typeface="Tahoma" pitchFamily="34" charset="0"/>
-                <a:ea typeface="Tahoma" pitchFamily="34" charset="-122"/>
-                <a:cs typeface="Tahoma" pitchFamily="34" charset="-120"/>
-              </a:rPr>
-              <a:t>ช่วงที่ 2</a:t>
+                  <a:srgbClr val="2E2420"/>
+                </a:solidFill>
+                <a:latin typeface="Tahoma" pitchFamily="34" charset="0"/>
+                <a:ea typeface="Tahoma" pitchFamily="34" charset="-122"/>
+                <a:cs typeface="Tahoma" pitchFamily="34" charset="-120"/>
+              </a:rPr>
+              <a:t>สมมติว่าเราเป็นเจ้าของร้าน — เช้านี้มีอีเมลค้าง 4 ฉบับ และไม่รู้เลยว่าเดือนที่แล้วร้านเป็นยังไง</a:t>
             </a:r>
             <a:endParaRPr lang="en-US" sz="1800" dirty="0"/>
           </a:p>
@@ -10592,85 +11471,7 @@
       </p:sp>
       <p:sp>
         <p:nvSpPr>
-          <p:cNvPr id="3" name="Text 1"/>
-          <p:cNvSpPr/>
-          <p:nvPr/>
-        </p:nvSpPr>
-        <p:spPr>
-          <a:xfrm>
-            <a:off x="822960" y="1783080"/>
-            <a:ext cx="10515600" cy="1005840"/>
-          </a:xfrm>
-          <a:prstGeom prst="rect">
-            <a:avLst/>
-          </a:prstGeom>
-          <a:noFill/>
-          <a:ln/>
-        </p:spPr>
-        <p:txBody>
-          <a:bodyPr wrap="square" rtlCol="0" anchor="ctr"/>
-          <a:lstStyle/>
-          <a:p>
-            <a:pPr indent="0" marL="0">
-              <a:buNone/>
-            </a:pPr>
-            <a:r>
-              <a:rPr lang="en-US" sz="4000" b="1" dirty="0">
-                <a:solidFill>
-                  <a:srgbClr val="FFFFFF"/>
-                </a:solidFill>
-                <a:latin typeface="Tahoma" pitchFamily="34" charset="0"/>
-                <a:ea typeface="Tahoma" pitchFamily="34" charset="-122"/>
-                <a:cs typeface="Tahoma" pitchFamily="34" charset="-120"/>
-              </a:rPr>
-              <a:t>เดโม่สด: ร้าน “บ้านกาแฟหอมละมุน”</a:t>
-            </a:r>
-            <a:endParaRPr lang="en-US" sz="4000" dirty="0"/>
-          </a:p>
-        </p:txBody>
-      </p:sp>
-      <p:sp>
-        <p:nvSpPr>
-          <p:cNvPr id="4" name="Text 2"/>
-          <p:cNvSpPr/>
-          <p:nvPr/>
-        </p:nvSpPr>
-        <p:spPr>
-          <a:xfrm>
-            <a:off x="822960" y="2880360"/>
-            <a:ext cx="10058400" cy="548640"/>
-          </a:xfrm>
-          <a:prstGeom prst="rect">
-            <a:avLst/>
-          </a:prstGeom>
-          <a:noFill/>
-          <a:ln/>
-        </p:spPr>
-        <p:txBody>
-          <a:bodyPr wrap="square" rtlCol="0" anchor="ctr"/>
-          <a:lstStyle/>
-          <a:p>
-            <a:pPr indent="0" marL="0">
-              <a:buNone/>
-            </a:pPr>
-            <a:r>
-              <a:rPr lang="en-US" sz="1800" dirty="0">
-                <a:solidFill>
-                  <a:srgbClr val="EFE3D5"/>
-                </a:solidFill>
-                <a:latin typeface="Tahoma" pitchFamily="34" charset="0"/>
-                <a:ea typeface="Tahoma" pitchFamily="34" charset="-122"/>
-                <a:cs typeface="Tahoma" pitchFamily="34" charset="-120"/>
-              </a:rPr>
-              <a:t>สมมติว่าเราเป็นเจ้าของร้าน — เช้านี้มีอีเมลค้าง 4 ฉบับ และไม่รู้เลยว่าเดือนที่แล้วร้านเป็นยังไง</a:t>
-            </a:r>
-            <a:endParaRPr lang="en-US" sz="1800" dirty="0"/>
-          </a:p>
-        </p:txBody>
-      </p:sp>
-      <p:sp>
-        <p:nvSpPr>
-          <p:cNvPr id="5" name="Shape 3"/>
+          <p:cNvPr id="8" name="Shape 6"/>
           <p:cNvSpPr/>
           <p:nvPr/>
         </p:nvSpPr>
@@ -10683,14 +11484,14 @@
             <a:avLst/>
           </a:prstGeom>
           <a:solidFill>
-            <a:srgbClr val="7A4A26"/>
+            <a:srgbClr val="AD3A38"/>
           </a:solidFill>
           <a:ln/>
         </p:spPr>
       </p:sp>
       <p:pic>
         <p:nvPicPr>
-          <p:cNvPr id="6" name="Image 0" descr="preencoded.png">    </p:cNvPr>
+          <p:cNvPr id="9" name="Image 0" descr="preencoded.png">    </p:cNvPr>
           <p:cNvPicPr>
             <a:picLocks noChangeAspect="1"/>
           </p:cNvPicPr>
@@ -10714,14 +11515,14 @@
       </p:pic>
       <p:sp>
         <p:nvSpPr>
-          <p:cNvPr id="7" name="Text 4"/>
+          <p:cNvPr id="10" name="Text 7"/>
           <p:cNvSpPr/>
           <p:nvPr/>
         </p:nvSpPr>
         <p:spPr>
           <a:xfrm>
             <a:off x="1508760" y="3794760"/>
-            <a:ext cx="9875520" cy="475488"/>
+            <a:ext cx="8778240" cy="475488"/>
           </a:xfrm>
           <a:prstGeom prst="rect">
             <a:avLst/>
@@ -10739,7 +11540,7 @@
             <a:r>
               <a:rPr lang="en-US" sz="1500" dirty="0">
                 <a:solidFill>
-                  <a:srgbClr val="EFE3D5"/>
+                  <a:srgbClr val="2E2420"/>
                 </a:solidFill>
                 <a:latin typeface="Tahoma" pitchFamily="34" charset="0"/>
                 <a:ea typeface="Tahoma" pitchFamily="34" charset="-122"/>
@@ -10753,7 +11554,7 @@
       </p:sp>
       <p:sp>
         <p:nvSpPr>
-          <p:cNvPr id="8" name="Shape 5"/>
+          <p:cNvPr id="11" name="Shape 8"/>
           <p:cNvSpPr/>
           <p:nvPr/>
         </p:nvSpPr>
@@ -10766,14 +11567,14 @@
             <a:avLst/>
           </a:prstGeom>
           <a:solidFill>
-            <a:srgbClr val="7A4A26"/>
+            <a:srgbClr val="AD3A38"/>
           </a:solidFill>
           <a:ln/>
         </p:spPr>
       </p:sp>
       <p:pic>
         <p:nvPicPr>
-          <p:cNvPr id="9" name="Image 1" descr="preencoded.png">    </p:cNvPr>
+          <p:cNvPr id="12" name="Image 1" descr="preencoded.png">    </p:cNvPr>
           <p:cNvPicPr>
             <a:picLocks noChangeAspect="1"/>
           </p:cNvPicPr>
@@ -10797,14 +11598,14 @@
       </p:pic>
       <p:sp>
         <p:nvSpPr>
-          <p:cNvPr id="10" name="Text 6"/>
+          <p:cNvPr id="13" name="Text 9"/>
           <p:cNvSpPr/>
           <p:nvPr/>
         </p:nvSpPr>
         <p:spPr>
           <a:xfrm>
             <a:off x="1508760" y="4507992"/>
-            <a:ext cx="9875520" cy="475488"/>
+            <a:ext cx="8778240" cy="475488"/>
           </a:xfrm>
           <a:prstGeom prst="rect">
             <a:avLst/>
@@ -10822,7 +11623,7 @@
             <a:r>
               <a:rPr lang="en-US" sz="1500" dirty="0">
                 <a:solidFill>
-                  <a:srgbClr val="EFE3D5"/>
+                  <a:srgbClr val="2E2420"/>
                 </a:solidFill>
                 <a:latin typeface="Tahoma" pitchFamily="34" charset="0"/>
                 <a:ea typeface="Tahoma" pitchFamily="34" charset="-122"/>
@@ -10836,7 +11637,7 @@
       </p:sp>
       <p:sp>
         <p:nvSpPr>
-          <p:cNvPr id="11" name="Shape 7"/>
+          <p:cNvPr id="14" name="Shape 10"/>
           <p:cNvSpPr/>
           <p:nvPr/>
         </p:nvSpPr>
@@ -10849,14 +11650,14 @@
             <a:avLst/>
           </a:prstGeom>
           <a:solidFill>
-            <a:srgbClr val="7A4A26"/>
+            <a:srgbClr val="AD3A38"/>
           </a:solidFill>
           <a:ln/>
         </p:spPr>
       </p:sp>
       <p:pic>
         <p:nvPicPr>
-          <p:cNvPr id="12" name="Image 2" descr="preencoded.png">    </p:cNvPr>
+          <p:cNvPr id="15" name="Image 2" descr="preencoded.png">    </p:cNvPr>
           <p:cNvPicPr>
             <a:picLocks noChangeAspect="1"/>
           </p:cNvPicPr>
@@ -10880,14 +11681,14 @@
       </p:pic>
       <p:sp>
         <p:nvSpPr>
-          <p:cNvPr id="13" name="Text 8"/>
+          <p:cNvPr id="16" name="Text 11"/>
           <p:cNvSpPr/>
           <p:nvPr/>
         </p:nvSpPr>
         <p:spPr>
           <a:xfrm>
             <a:off x="1508760" y="5221224"/>
-            <a:ext cx="9875520" cy="475488"/>
+            <a:ext cx="8778240" cy="475488"/>
           </a:xfrm>
           <a:prstGeom prst="rect">
             <a:avLst/>
@@ -10905,7 +11706,7 @@
             <a:r>
               <a:rPr lang="en-US" sz="1500" dirty="0">
                 <a:solidFill>
-                  <a:srgbClr val="EFE3D5"/>
+                  <a:srgbClr val="2E2420"/>
                 </a:solidFill>
                 <a:latin typeface="Tahoma" pitchFamily="34" charset="0"/>
                 <a:ea typeface="Tahoma" pitchFamily="34" charset="-122"/>
@@ -10919,7 +11720,7 @@
       </p:sp>
       <p:sp>
         <p:nvSpPr>
-          <p:cNvPr id="14" name="Shape 9"/>
+          <p:cNvPr id="17" name="Shape 12"/>
           <p:cNvSpPr/>
           <p:nvPr/>
         </p:nvSpPr>
@@ -10932,14 +11733,14 @@
             <a:avLst/>
           </a:prstGeom>
           <a:solidFill>
-            <a:srgbClr val="7A4A26"/>
+            <a:srgbClr val="AD3A38"/>
           </a:solidFill>
           <a:ln/>
         </p:spPr>
       </p:sp>
       <p:pic>
         <p:nvPicPr>
-          <p:cNvPr id="15" name="Image 3" descr="preencoded.png">    </p:cNvPr>
+          <p:cNvPr id="18" name="Image 3" descr="preencoded.png">    </p:cNvPr>
           <p:cNvPicPr>
             <a:picLocks noChangeAspect="1"/>
           </p:cNvPicPr>
@@ -10963,14 +11764,14 @@
       </p:pic>
       <p:sp>
         <p:nvSpPr>
-          <p:cNvPr id="16" name="Text 10"/>
+          <p:cNvPr id="19" name="Text 13"/>
           <p:cNvSpPr/>
           <p:nvPr/>
         </p:nvSpPr>
         <p:spPr>
           <a:xfrm>
             <a:off x="1508760" y="5934456"/>
-            <a:ext cx="9875520" cy="475488"/>
+            <a:ext cx="8778240" cy="475488"/>
           </a:xfrm>
           <a:prstGeom prst="rect">
             <a:avLst/>
@@ -10988,7 +11789,7 @@
             <a:r>
               <a:rPr lang="en-US" sz="1500" dirty="0">
                 <a:solidFill>
-                  <a:srgbClr val="EFE3D5"/>
+                  <a:srgbClr val="2E2420"/>
                 </a:solidFill>
                 <a:latin typeface="Tahoma" pitchFamily="34" charset="0"/>
                 <a:ea typeface="Tahoma" pitchFamily="34" charset="-122"/>

--- a/claude-course/slides.pptx
+++ b/claude-course/slides.pptx
@@ -2294,9 +2294,9 @@
                 <a:solidFill>
                   <a:srgbClr val="AD3A38"/>
                 </a:solidFill>
-                <a:latin typeface="Tahoma" pitchFamily="34" charset="0"/>
-                <a:ea typeface="Tahoma" pitchFamily="34" charset="-122"/>
-                <a:cs typeface="Tahoma" pitchFamily="34" charset="-120"/>
+                <a:latin typeface="Chonburi" pitchFamily="34" charset="0"/>
+                <a:ea typeface="Chonburi" pitchFamily="34" charset="-122"/>
+                <a:cs typeface="Chonburi" pitchFamily="34" charset="-120"/>
               </a:rPr>
               <a:t>ใช้ AI ทำงานจริง</a:t>
             </a:r>
@@ -2333,9 +2333,9 @@
                 <a:solidFill>
                   <a:srgbClr val="C65E52"/>
                 </a:solidFill>
-                <a:latin typeface="Tahoma" pitchFamily="34" charset="0"/>
-                <a:ea typeface="Tahoma" pitchFamily="34" charset="-122"/>
-                <a:cs typeface="Tahoma" pitchFamily="34" charset="-120"/>
+                <a:latin typeface="Sarabun" pitchFamily="34" charset="0"/>
+                <a:ea typeface="Sarabun" pitchFamily="34" charset="-122"/>
+                <a:cs typeface="Sarabun" pitchFamily="34" charset="-120"/>
               </a:rPr>
               <a:t>คอร์สเร่งรัด 3 ชั่วโมง สำหรับคนไม่มีพื้นฐานมาก่อน</a:t>
             </a:r>
@@ -2394,9 +2394,9 @@
                 <a:solidFill>
                   <a:srgbClr val="2E2420"/>
                 </a:solidFill>
-                <a:latin typeface="Tahoma" pitchFamily="34" charset="0"/>
-                <a:ea typeface="Tahoma" pitchFamily="34" charset="-122"/>
-                <a:cs typeface="Tahoma" pitchFamily="34" charset="-120"/>
+                <a:latin typeface="Sarabun" pitchFamily="34" charset="0"/>
+                <a:ea typeface="Sarabun" pitchFamily="34" charset="-122"/>
+                <a:cs typeface="Sarabun" pitchFamily="34" charset="-120"/>
               </a:rPr>
               <a:t>รู้จักโลก AI</a:t>
             </a:r>
@@ -2455,9 +2455,9 @@
                 <a:solidFill>
                   <a:srgbClr val="2E2420"/>
                 </a:solidFill>
-                <a:latin typeface="Tahoma" pitchFamily="34" charset="0"/>
-                <a:ea typeface="Tahoma" pitchFamily="34" charset="-122"/>
-                <a:cs typeface="Tahoma" pitchFamily="34" charset="-120"/>
+                <a:latin typeface="Sarabun" pitchFamily="34" charset="0"/>
+                <a:ea typeface="Sarabun" pitchFamily="34" charset="-122"/>
+                <a:cs typeface="Sarabun" pitchFamily="34" charset="-120"/>
               </a:rPr>
               <a:t>Cowork ทำงานกับไฟล์</a:t>
             </a:r>
@@ -2516,9 +2516,9 @@
                 <a:solidFill>
                   <a:srgbClr val="2E2420"/>
                 </a:solidFill>
-                <a:latin typeface="Tahoma" pitchFamily="34" charset="0"/>
-                <a:ea typeface="Tahoma" pitchFamily="34" charset="-122"/>
-                <a:cs typeface="Tahoma" pitchFamily="34" charset="-120"/>
+                <a:latin typeface="Sarabun" pitchFamily="34" charset="0"/>
+                <a:ea typeface="Sarabun" pitchFamily="34" charset="-122"/>
+                <a:cs typeface="Sarabun" pitchFamily="34" charset="-120"/>
               </a:rPr>
               <a:t>Claude Code สร้างระบบ</a:t>
             </a:r>
@@ -2555,9 +2555,9 @@
                 <a:solidFill>
                   <a:srgbClr val="8A6F57"/>
                 </a:solidFill>
-                <a:latin typeface="Tahoma" pitchFamily="34" charset="0"/>
-                <a:ea typeface="Tahoma" pitchFamily="34" charset="-122"/>
-                <a:cs typeface="Tahoma" pitchFamily="34" charset="-120"/>
+                <a:latin typeface="Sarabun" pitchFamily="34" charset="0"/>
+                <a:ea typeface="Sarabun" pitchFamily="34" charset="-122"/>
+                <a:cs typeface="Sarabun" pitchFamily="34" charset="-120"/>
               </a:rPr>
               <a:t>เรียนผ่านเคสจริง: ร้านกาแฟ ☕</a:t>
             </a:r>
@@ -2666,9 +2666,9 @@
                 <a:solidFill>
                   <a:srgbClr val="AD3A38"/>
                 </a:solidFill>
-                <a:latin typeface="Tahoma" pitchFamily="34" charset="0"/>
-                <a:ea typeface="Tahoma" pitchFamily="34" charset="-122"/>
-                <a:cs typeface="Tahoma" pitchFamily="34" charset="-120"/>
+                <a:latin typeface="Chonburi" pitchFamily="34" charset="0"/>
+                <a:ea typeface="Chonburi" pitchFamily="34" charset="-122"/>
+                <a:cs typeface="Chonburi" pitchFamily="34" charset="-120"/>
               </a:rPr>
               <a:t>เดโม่ 3 องก์</a:t>
             </a:r>
@@ -2771,9 +2771,9 @@
                 <a:solidFill>
                   <a:srgbClr val="2E2420"/>
                 </a:solidFill>
-                <a:latin typeface="Tahoma" pitchFamily="34" charset="0"/>
-                <a:ea typeface="Tahoma" pitchFamily="34" charset="-122"/>
-                <a:cs typeface="Tahoma" pitchFamily="34" charset="-120"/>
+                <a:latin typeface="Sarabun" pitchFamily="34" charset="0"/>
+                <a:ea typeface="Sarabun" pitchFamily="34" charset="-122"/>
+                <a:cs typeface="Sarabun" pitchFamily="34" charset="-120"/>
               </a:rPr>
               <a:t>1. ให้ Claude สำรวจโฟลเดอร์</a:t>
             </a:r>
@@ -2810,9 +2810,9 @@
                 <a:solidFill>
                   <a:srgbClr val="AD3A38"/>
                 </a:solidFill>
-                <a:latin typeface="Tahoma" pitchFamily="34" charset="0"/>
-                <a:ea typeface="Tahoma" pitchFamily="34" charset="-122"/>
-                <a:cs typeface="Tahoma" pitchFamily="34" charset="-120"/>
+                <a:latin typeface="Sarabun" pitchFamily="34" charset="0"/>
+                <a:ea typeface="Sarabun" pitchFamily="34" charset="-122"/>
+                <a:cs typeface="Sarabun" pitchFamily="34" charset="-120"/>
               </a:rPr>
               <a:t>“อ่านไฟล์ทั้งหมด แล้วเล่าว่าร้านนี้ทำธุรกิจอะไร”</a:t>
             </a:r>
@@ -2849,9 +2849,9 @@
                 <a:solidFill>
                   <a:srgbClr val="8A6F57"/>
                 </a:solidFill>
-                <a:latin typeface="Tahoma" pitchFamily="34" charset="0"/>
-                <a:ea typeface="Tahoma" pitchFamily="34" charset="-122"/>
-                <a:cs typeface="Tahoma" pitchFamily="34" charset="-120"/>
+                <a:latin typeface="Sarabun" pitchFamily="34" charset="0"/>
+                <a:ea typeface="Sarabun" pitchFamily="34" charset="-122"/>
+                <a:cs typeface="Sarabun" pitchFamily="34" charset="-120"/>
               </a:rPr>
               <a:t>มันเปิดอ่านเองทุกไฟล์ โดยเราไม่ต้องเปิดสักไฟล์</a:t>
             </a:r>
@@ -2954,9 +2954,9 @@
                 <a:solidFill>
                   <a:srgbClr val="2E2420"/>
                 </a:solidFill>
-                <a:latin typeface="Tahoma" pitchFamily="34" charset="0"/>
-                <a:ea typeface="Tahoma" pitchFamily="34" charset="-122"/>
-                <a:cs typeface="Tahoma" pitchFamily="34" charset="-120"/>
+                <a:latin typeface="Sarabun" pitchFamily="34" charset="0"/>
+                <a:ea typeface="Sarabun" pitchFamily="34" charset="-122"/>
+                <a:cs typeface="Sarabun" pitchFamily="34" charset="-120"/>
               </a:rPr>
               <a:t>2. สรุปอีเมล + ทำตารางนัด</a:t>
             </a:r>
@@ -2993,9 +2993,9 @@
                 <a:solidFill>
                   <a:srgbClr val="AD3A38"/>
                 </a:solidFill>
-                <a:latin typeface="Tahoma" pitchFamily="34" charset="0"/>
-                <a:ea typeface="Tahoma" pitchFamily="34" charset="-122"/>
-                <a:cs typeface="Tahoma" pitchFamily="34" charset="-120"/>
+                <a:latin typeface="Sarabun" pitchFamily="34" charset="0"/>
+                <a:ea typeface="Sarabun" pitchFamily="34" charset="-122"/>
+                <a:cs typeface="Sarabun" pitchFamily="34" charset="-120"/>
               </a:rPr>
               <a:t>“สรุปอีเมล 4 ฉบับ เรียงตามความด่วน แล้วดึงเดดไลน์ทำ schedule.md”</a:t>
             </a:r>
@@ -3032,9 +3032,9 @@
                 <a:solidFill>
                   <a:srgbClr val="8A6F57"/>
                 </a:solidFill>
-                <a:latin typeface="Tahoma" pitchFamily="34" charset="0"/>
-                <a:ea typeface="Tahoma" pitchFamily="34" charset="-122"/>
-                <a:cs typeface="Tahoma" pitchFamily="34" charset="-120"/>
+                <a:latin typeface="Sarabun" pitchFamily="34" charset="0"/>
+                <a:ea typeface="Sarabun" pitchFamily="34" charset="-122"/>
+                <a:cs typeface="Sarabun" pitchFamily="34" charset="-120"/>
               </a:rPr>
               <a:t>มีเดดไลน์ชนกันซ่อนอยู่ — ดูซิว่ามันจับได้ไหม</a:t>
             </a:r>
@@ -3137,9 +3137,9 @@
                 <a:solidFill>
                   <a:srgbClr val="2E2420"/>
                 </a:solidFill>
-                <a:latin typeface="Tahoma" pitchFamily="34" charset="0"/>
-                <a:ea typeface="Tahoma" pitchFamily="34" charset="-122"/>
-                <a:cs typeface="Tahoma" pitchFamily="34" charset="-120"/>
+                <a:latin typeface="Sarabun" pitchFamily="34" charset="0"/>
+                <a:ea typeface="Sarabun" pitchFamily="34" charset="-122"/>
+                <a:cs typeface="Sarabun" pitchFamily="34" charset="-120"/>
               </a:rPr>
               <a:t>3. วิเคราะห์ยอดขาย + สร้างรายงาน</a:t>
             </a:r>
@@ -3176,9 +3176,9 @@
                 <a:solidFill>
                   <a:srgbClr val="AD3A38"/>
                 </a:solidFill>
-                <a:latin typeface="Tahoma" pitchFamily="34" charset="0"/>
-                <a:ea typeface="Tahoma" pitchFamily="34" charset="-122"/>
-                <a:cs typeface="Tahoma" pitchFamily="34" charset="-120"/>
+                <a:latin typeface="Sarabun" pitchFamily="34" charset="0"/>
+                <a:ea typeface="Sarabun" pitchFamily="34" charset="-122"/>
+                <a:cs typeface="Sarabun" pitchFamily="34" charset="-120"/>
               </a:rPr>
               <a:t>“เมนูไหนขายดี? เมนูไหนกำไรดี? ช่องทางไหนโต? สรุปเป็น report.md”</a:t>
             </a:r>
@@ -3215,9 +3215,9 @@
                 <a:solidFill>
                   <a:srgbClr val="8A6F57"/>
                 </a:solidFill>
-                <a:latin typeface="Tahoma" pitchFamily="34" charset="0"/>
-                <a:ea typeface="Tahoma" pitchFamily="34" charset="-122"/>
-                <a:cs typeface="Tahoma" pitchFamily="34" charset="-120"/>
+                <a:latin typeface="Sarabun" pitchFamily="34" charset="0"/>
+                <a:ea typeface="Sarabun" pitchFamily="34" charset="-122"/>
+                <a:cs typeface="Sarabun" pitchFamily="34" charset="-120"/>
               </a:rPr>
               <a:t>เฉลย: ขายดีสุด ≠ กำไรดีสุด</a:t>
             </a:r>
@@ -3326,9 +3326,9 @@
                 <a:solidFill>
                   <a:srgbClr val="AD3A38"/>
                 </a:solidFill>
-                <a:latin typeface="Tahoma" pitchFamily="34" charset="0"/>
-                <a:ea typeface="Tahoma" pitchFamily="34" charset="-122"/>
-                <a:cs typeface="Tahoma" pitchFamily="34" charset="-120"/>
+                <a:latin typeface="Chonburi" pitchFamily="34" charset="0"/>
+                <a:ea typeface="Chonburi" pitchFamily="34" charset="-122"/>
+                <a:cs typeface="Chonburi" pitchFamily="34" charset="-120"/>
               </a:rPr>
               <a:t>ถึงตาคุณ — เวิร์กช็อป 45 นาที</a:t>
             </a:r>
@@ -3385,9 +3385,9 @@
                 <a:solidFill>
                   <a:srgbClr val="FFFFFF"/>
                 </a:solidFill>
-                <a:latin typeface="Tahoma" pitchFamily="34" charset="0"/>
-                <a:ea typeface="Tahoma" pitchFamily="34" charset="-122"/>
-                <a:cs typeface="Tahoma" pitchFamily="34" charset="-120"/>
+                <a:latin typeface="Sarabun" pitchFamily="34" charset="0"/>
+                <a:ea typeface="Sarabun" pitchFamily="34" charset="-122"/>
+                <a:cs typeface="Sarabun" pitchFamily="34" charset="-120"/>
               </a:rPr>
               <a:t>1</a:t>
             </a:r>
@@ -3424,9 +3424,9 @@
                 <a:solidFill>
                   <a:srgbClr val="2E2420"/>
                 </a:solidFill>
-                <a:latin typeface="Tahoma" pitchFamily="34" charset="0"/>
-                <a:ea typeface="Tahoma" pitchFamily="34" charset="-122"/>
-                <a:cs typeface="Tahoma" pitchFamily="34" charset="-120"/>
+                <a:latin typeface="Sarabun" pitchFamily="34" charset="0"/>
+                <a:ea typeface="Sarabun" pitchFamily="34" charset="-122"/>
+                <a:cs typeface="Sarabun" pitchFamily="34" charset="-120"/>
               </a:rPr>
               <a:t>สร้างโฟลเดอร์ my-workshop บน Desktop แล้วลากไฟล์งานของคุณใส่</a:t>
             </a:r>
@@ -3483,9 +3483,9 @@
                 <a:solidFill>
                   <a:srgbClr val="FFFFFF"/>
                 </a:solidFill>
-                <a:latin typeface="Tahoma" pitchFamily="34" charset="0"/>
-                <a:ea typeface="Tahoma" pitchFamily="34" charset="-122"/>
-                <a:cs typeface="Tahoma" pitchFamily="34" charset="-120"/>
+                <a:latin typeface="Sarabun" pitchFamily="34" charset="0"/>
+                <a:ea typeface="Sarabun" pitchFamily="34" charset="-122"/>
+                <a:cs typeface="Sarabun" pitchFamily="34" charset="-120"/>
               </a:rPr>
               <a:t>2</a:t>
             </a:r>
@@ -3522,9 +3522,9 @@
                 <a:solidFill>
                   <a:srgbClr val="2E2420"/>
                 </a:solidFill>
-                <a:latin typeface="Tahoma" pitchFamily="34" charset="0"/>
-                <a:ea typeface="Tahoma" pitchFamily="34" charset="-122"/>
-                <a:cs typeface="Tahoma" pitchFamily="34" charset="-120"/>
+                <a:latin typeface="Sarabun" pitchFamily="34" charset="0"/>
+                <a:ea typeface="Sarabun" pitchFamily="34" charset="-122"/>
+                <a:cs typeface="Sarabun" pitchFamily="34" charset="-120"/>
               </a:rPr>
               <a:t>เปิด Cowork ชี้ไปที่โฟลเดอร์นั้น</a:t>
             </a:r>
@@ -3581,9 +3581,9 @@
                 <a:solidFill>
                   <a:srgbClr val="FFFFFF"/>
                 </a:solidFill>
-                <a:latin typeface="Tahoma" pitchFamily="34" charset="0"/>
-                <a:ea typeface="Tahoma" pitchFamily="34" charset="-122"/>
-                <a:cs typeface="Tahoma" pitchFamily="34" charset="-120"/>
+                <a:latin typeface="Sarabun" pitchFamily="34" charset="0"/>
+                <a:ea typeface="Sarabun" pitchFamily="34" charset="-122"/>
+                <a:cs typeface="Sarabun" pitchFamily="34" charset="-120"/>
               </a:rPr>
               <a:t>3</a:t>
             </a:r>
@@ -3620,9 +3620,9 @@
                 <a:solidFill>
                   <a:srgbClr val="2E2420"/>
                 </a:solidFill>
-                <a:latin typeface="Tahoma" pitchFamily="34" charset="0"/>
-                <a:ea typeface="Tahoma" pitchFamily="34" charset="-122"/>
-                <a:cs typeface="Tahoma" pitchFamily="34" charset="-120"/>
+                <a:latin typeface="Sarabun" pitchFamily="34" charset="0"/>
+                <a:ea typeface="Sarabun" pitchFamily="34" charset="-122"/>
+                <a:cs typeface="Sarabun" pitchFamily="34" charset="-120"/>
               </a:rPr>
               <a:t>prompt แรก: “อ่านไฟล์ในโฟลเดอร์นี้ แล้วบอกว่าช่วยอะไรฉันได้บ้าง”</a:t>
             </a:r>
@@ -3679,9 +3679,9 @@
                 <a:solidFill>
                   <a:srgbClr val="FFFFFF"/>
                 </a:solidFill>
-                <a:latin typeface="Tahoma" pitchFamily="34" charset="0"/>
-                <a:ea typeface="Tahoma" pitchFamily="34" charset="-122"/>
-                <a:cs typeface="Tahoma" pitchFamily="34" charset="-120"/>
+                <a:latin typeface="Sarabun" pitchFamily="34" charset="0"/>
+                <a:ea typeface="Sarabun" pitchFamily="34" charset="-122"/>
+                <a:cs typeface="Sarabun" pitchFamily="34" charset="-120"/>
               </a:rPr>
               <a:t>4</a:t>
             </a:r>
@@ -3718,9 +3718,9 @@
                 <a:solidFill>
                   <a:srgbClr val="2E2420"/>
                 </a:solidFill>
-                <a:latin typeface="Tahoma" pitchFamily="34" charset="0"/>
-                <a:ea typeface="Tahoma" pitchFamily="34" charset="-122"/>
-                <a:cs typeface="Tahoma" pitchFamily="34" charset="-120"/>
+                <a:latin typeface="Sarabun" pitchFamily="34" charset="0"/>
+                <a:ea typeface="Sarabun" pitchFamily="34" charset="-122"/>
+                <a:cs typeface="Sarabun" pitchFamily="34" charset="-120"/>
               </a:rPr>
               <a:t>เลือกไอเดียที่มันเสนอ 1 อย่าง แล้วสั่งด้วยสูตร 4 ส่วน</a:t>
             </a:r>
@@ -3777,9 +3777,9 @@
                 <a:solidFill>
                   <a:srgbClr val="FFFFFF"/>
                 </a:solidFill>
-                <a:latin typeface="Tahoma" pitchFamily="34" charset="0"/>
-                <a:ea typeface="Tahoma" pitchFamily="34" charset="-122"/>
-                <a:cs typeface="Tahoma" pitchFamily="34" charset="-120"/>
+                <a:latin typeface="Sarabun" pitchFamily="34" charset="0"/>
+                <a:ea typeface="Sarabun" pitchFamily="34" charset="-122"/>
+                <a:cs typeface="Sarabun" pitchFamily="34" charset="-120"/>
               </a:rPr>
               <a:t>5</a:t>
             </a:r>
@@ -3816,9 +3816,9 @@
                 <a:solidFill>
                   <a:srgbClr val="2E2420"/>
                 </a:solidFill>
-                <a:latin typeface="Tahoma" pitchFamily="34" charset="0"/>
-                <a:ea typeface="Tahoma" pitchFamily="34" charset="-122"/>
-                <a:cs typeface="Tahoma" pitchFamily="34" charset="-120"/>
+                <a:latin typeface="Sarabun" pitchFamily="34" charset="0"/>
+                <a:ea typeface="Sarabun" pitchFamily="34" charset="-122"/>
+                <a:cs typeface="Sarabun" pitchFamily="34" charset="-120"/>
               </a:rPr>
               <a:t>ไม่ถูกใจ → สั่งแก้อย่างน้อย 2 รอบ</a:t>
             </a:r>
@@ -3875,9 +3875,9 @@
                 <a:solidFill>
                   <a:srgbClr val="FFFFFF"/>
                 </a:solidFill>
-                <a:latin typeface="Tahoma" pitchFamily="34" charset="0"/>
-                <a:ea typeface="Tahoma" pitchFamily="34" charset="-122"/>
-                <a:cs typeface="Tahoma" pitchFamily="34" charset="-120"/>
+                <a:latin typeface="Sarabun" pitchFamily="34" charset="0"/>
+                <a:ea typeface="Sarabun" pitchFamily="34" charset="-122"/>
+                <a:cs typeface="Sarabun" pitchFamily="34" charset="-120"/>
               </a:rPr>
               <a:t>6</a:t>
             </a:r>
@@ -3914,9 +3914,9 @@
                 <a:solidFill>
                   <a:srgbClr val="2E2420"/>
                 </a:solidFill>
-                <a:latin typeface="Tahoma" pitchFamily="34" charset="0"/>
-                <a:ea typeface="Tahoma" pitchFamily="34" charset="-122"/>
-                <a:cs typeface="Tahoma" pitchFamily="34" charset="-120"/>
+                <a:latin typeface="Sarabun" pitchFamily="34" charset="0"/>
+                <a:ea typeface="Sarabun" pitchFamily="34" charset="-122"/>
+                <a:cs typeface="Sarabun" pitchFamily="34" charset="-120"/>
               </a:rPr>
               <a:t>ปิดท้าย: ให้มันสร้างไฟล์ผลลัพธ์เก็บไว้ (รายงาน / Excel)</a:t>
             </a:r>
@@ -3975,9 +3975,9 @@
                 <a:solidFill>
                   <a:srgbClr val="FFCB64"/>
                 </a:solidFill>
-                <a:latin typeface="Tahoma" pitchFamily="34" charset="0"/>
-                <a:ea typeface="Tahoma" pitchFamily="34" charset="-122"/>
-                <a:cs typeface="Tahoma" pitchFamily="34" charset="-120"/>
+                <a:latin typeface="Sarabun" pitchFamily="34" charset="0"/>
+                <a:ea typeface="Sarabun" pitchFamily="34" charset="-122"/>
+                <a:cs typeface="Sarabun" pitchFamily="34" charset="-120"/>
               </a:rPr>
               <a:t>ไม่ได้เอาไฟล์มา?</a:t>
             </a:r>
@@ -4014,9 +4014,9 @@
                 <a:solidFill>
                   <a:srgbClr val="FBEBD0"/>
                 </a:solidFill>
-                <a:latin typeface="Tahoma" pitchFamily="34" charset="0"/>
-                <a:ea typeface="Tahoma" pitchFamily="34" charset="-122"/>
-                <a:cs typeface="Tahoma" pitchFamily="34" charset="-120"/>
+                <a:latin typeface="Sarabun" pitchFamily="34" charset="0"/>
+                <a:ea typeface="Sarabun" pitchFamily="34" charset="-122"/>
+                <a:cs typeface="Sarabun" pitchFamily="34" charset="-120"/>
               </a:rPr>
               <a:t>ใช้โฟลเดอร์ร้านกาแฟได้เลย มีโจทย์ให้ 3 ระดับ:</a:t>
             </a:r>
@@ -4056,9 +4056,9 @@
                 <a:solidFill>
                   <a:srgbClr val="CFE3B8"/>
                 </a:solidFill>
-                <a:latin typeface="Tahoma" pitchFamily="34" charset="0"/>
-                <a:ea typeface="Tahoma" pitchFamily="34" charset="-122"/>
-                <a:cs typeface="Tahoma" pitchFamily="34" charset="-120"/>
+                <a:latin typeface="Sarabun" pitchFamily="34" charset="0"/>
+                <a:ea typeface="Sarabun" pitchFamily="34" charset="-122"/>
+                <a:cs typeface="Sarabun" pitchFamily="34" charset="-120"/>
               </a:rPr>
               <a:t>ง่าย: </a:t>
             </a:r>
@@ -4073,9 +4073,9 @@
                 <a:solidFill>
                   <a:srgbClr val="FBEBD0"/>
                 </a:solidFill>
-                <a:latin typeface="Tahoma" pitchFamily="34" charset="0"/>
-                <a:ea typeface="Tahoma" pitchFamily="34" charset="-122"/>
-                <a:cs typeface="Tahoma" pitchFamily="34" charset="-120"/>
+                <a:latin typeface="Sarabun" pitchFamily="34" charset="0"/>
+                <a:ea typeface="Sarabun" pitchFamily="34" charset="-122"/>
+                <a:cs typeface="Sarabun" pitchFamily="34" charset="-120"/>
               </a:rPr>
               <a:t>ข้อความขอบคุณลูกค้าแต้มสูงสุด 5 คน
 </a:t>
@@ -4091,9 +4091,9 @@
                 <a:solidFill>
                   <a:srgbClr val="FFCB64"/>
                 </a:solidFill>
-                <a:latin typeface="Tahoma" pitchFamily="34" charset="0"/>
-                <a:ea typeface="Tahoma" pitchFamily="34" charset="-122"/>
-                <a:cs typeface="Tahoma" pitchFamily="34" charset="-120"/>
+                <a:latin typeface="Sarabun" pitchFamily="34" charset="0"/>
+                <a:ea typeface="Sarabun" pitchFamily="34" charset="-122"/>
+                <a:cs typeface="Sarabun" pitchFamily="34" charset="-120"/>
               </a:rPr>
               <a:t>กลาง: </a:t>
             </a:r>
@@ -4108,9 +4108,9 @@
                 <a:solidFill>
                   <a:srgbClr val="FBEBD0"/>
                 </a:solidFill>
-                <a:latin typeface="Tahoma" pitchFamily="34" charset="0"/>
-                <a:ea typeface="Tahoma" pitchFamily="34" charset="-122"/>
-                <a:cs typeface="Tahoma" pitchFamily="34" charset="-120"/>
+                <a:latin typeface="Sarabun" pitchFamily="34" charset="0"/>
+                <a:ea typeface="Sarabun" pitchFamily="34" charset="-122"/>
+                <a:cs typeface="Sarabun" pitchFamily="34" charset="-120"/>
               </a:rPr>
               <a:t>ร่างใบเสนอราคาบูธ 18,000 บาท
 </a:t>
@@ -4126,9 +4126,9 @@
                 <a:solidFill>
                   <a:srgbClr val="F3C8B8"/>
                 </a:solidFill>
-                <a:latin typeface="Tahoma" pitchFamily="34" charset="0"/>
-                <a:ea typeface="Tahoma" pitchFamily="34" charset="-122"/>
-                <a:cs typeface="Tahoma" pitchFamily="34" charset="-120"/>
+                <a:latin typeface="Sarabun" pitchFamily="34" charset="0"/>
+                <a:ea typeface="Sarabun" pitchFamily="34" charset="-122"/>
+                <a:cs typeface="Sarabun" pitchFamily="34" charset="-120"/>
               </a:rPr>
               <a:t>ยาก: </a:t>
             </a:r>
@@ -4143,9 +4143,9 @@
                 <a:solidFill>
                   <a:srgbClr val="FBEBD0"/>
                 </a:solidFill>
-                <a:latin typeface="Tahoma" pitchFamily="34" charset="0"/>
-                <a:ea typeface="Tahoma" pitchFamily="34" charset="-122"/>
-                <a:cs typeface="Tahoma" pitchFamily="34" charset="-120"/>
+                <a:latin typeface="Sarabun" pitchFamily="34" charset="0"/>
+                <a:ea typeface="Sarabun" pitchFamily="34" charset="-122"/>
+                <a:cs typeface="Sarabun" pitchFamily="34" charset="-120"/>
               </a:rPr>
               <a:t>ออกแบบโปรฯ ช่วงบ่ายจากข้อมูลจริง</a:t>
             </a:r>
@@ -4182,9 +4182,9 @@
                 <a:solidFill>
                   <a:srgbClr val="C65E52"/>
                 </a:solidFill>
-                <a:latin typeface="Tahoma" pitchFamily="34" charset="0"/>
-                <a:ea typeface="Tahoma" pitchFamily="34" charset="-122"/>
-                <a:cs typeface="Tahoma" pitchFamily="34" charset="-120"/>
+                <a:latin typeface="Sarabun" pitchFamily="34" charset="0"/>
+                <a:ea typeface="Sarabun" pitchFamily="34" charset="-122"/>
+                <a:cs typeface="Sarabun" pitchFamily="34" charset="-120"/>
               </a:rPr>
               <a:t>10 นาทีสุดท้าย: อาสาสมัคร 2–3 คน โชว์ผลงานหน้าห้อง</a:t>
             </a:r>
@@ -4313,9 +4313,9 @@
                 <a:solidFill>
                   <a:srgbClr val="C65E52"/>
                 </a:solidFill>
-                <a:latin typeface="Tahoma" pitchFamily="34" charset="0"/>
-                <a:ea typeface="Tahoma" pitchFamily="34" charset="-122"/>
-                <a:cs typeface="Tahoma" pitchFamily="34" charset="-120"/>
+                <a:latin typeface="Chonburi" pitchFamily="34" charset="0"/>
+                <a:ea typeface="Chonburi" pitchFamily="34" charset="-122"/>
+                <a:cs typeface="Chonburi" pitchFamily="34" charset="-120"/>
               </a:rPr>
               <a:t>ช่วงที่ 3</a:t>
             </a:r>
@@ -4352,9 +4352,9 @@
                 <a:solidFill>
                   <a:srgbClr val="AD3A38"/>
                 </a:solidFill>
-                <a:latin typeface="Tahoma" pitchFamily="34" charset="0"/>
-                <a:ea typeface="Tahoma" pitchFamily="34" charset="-122"/>
-                <a:cs typeface="Tahoma" pitchFamily="34" charset="-120"/>
+                <a:latin typeface="Chonburi" pitchFamily="34" charset="0"/>
+                <a:ea typeface="Chonburi" pitchFamily="34" charset="-122"/>
+                <a:cs typeface="Chonburi" pitchFamily="34" charset="-120"/>
               </a:rPr>
               <a:t>Claude Code: สั่งสร้างระบบเองได้</a:t>
             </a:r>
@@ -4391,9 +4391,9 @@
                 <a:solidFill>
                   <a:srgbClr val="2E2420"/>
                 </a:solidFill>
-                <a:latin typeface="Tahoma" pitchFamily="34" charset="0"/>
-                <a:ea typeface="Tahoma" pitchFamily="34" charset="-122"/>
-                <a:cs typeface="Tahoma" pitchFamily="34" charset="-120"/>
+                <a:latin typeface="Sarabun" pitchFamily="34" charset="0"/>
+                <a:ea typeface="Sarabun" pitchFamily="34" charset="-122"/>
+                <a:cs typeface="Sarabun" pitchFamily="34" charset="-120"/>
               </a:rPr>
               <a:t>เพื่อนเจ้าของร้านกาแฟบ่นว่า “อยากมี Dashboard สวยๆ แบบร้านใหญ่ แต่จ้างคนทำโปรแกรมก็แพง” — งั้นสร้างกันตรงนี้เลย</a:t>
             </a:r>
@@ -4502,9 +4502,9 @@
                 <a:solidFill>
                   <a:srgbClr val="AD3A38"/>
                 </a:solidFill>
-                <a:latin typeface="Tahoma" pitchFamily="34" charset="0"/>
-                <a:ea typeface="Tahoma" pitchFamily="34" charset="-122"/>
-                <a:cs typeface="Tahoma" pitchFamily="34" charset="-120"/>
+                <a:latin typeface="Chonburi" pitchFamily="34" charset="0"/>
+                <a:ea typeface="Chonburi" pitchFamily="34" charset="-122"/>
+                <a:cs typeface="Chonburi" pitchFamily="34" charset="-120"/>
               </a:rPr>
               <a:t>จากไฟล์ Excel ธรรมดา → ระบบใช้งานจริง</a:t>
             </a:r>
@@ -4572,9 +4572,9 @@
                 <a:solidFill>
                   <a:srgbClr val="8A6F57"/>
                 </a:solidFill>
-                <a:latin typeface="Tahoma" pitchFamily="34" charset="0"/>
-                <a:ea typeface="Tahoma" pitchFamily="34" charset="-122"/>
-                <a:cs typeface="Tahoma" pitchFamily="34" charset="-120"/>
+                <a:latin typeface="Sarabun" pitchFamily="34" charset="0"/>
+                <a:ea typeface="Sarabun" pitchFamily="34" charset="-122"/>
+                <a:cs typeface="Sarabun" pitchFamily="34" charset="-120"/>
               </a:rPr>
               <a:t>Dashboard ที่สร้างจากข้อมูลร้านในเดโม่เมื่อกี้ — ของจริง ไม่ใช่ภาพตัวอย่าง</a:t>
             </a:r>
@@ -4655,9 +4655,9 @@
                 <a:solidFill>
                   <a:srgbClr val="2E2420"/>
                 </a:solidFill>
-                <a:latin typeface="Tahoma" pitchFamily="34" charset="0"/>
-                <a:ea typeface="Tahoma" pitchFamily="34" charset="-122"/>
-                <a:cs typeface="Tahoma" pitchFamily="34" charset="-120"/>
+                <a:latin typeface="Sarabun" pitchFamily="34" charset="0"/>
+                <a:ea typeface="Sarabun" pitchFamily="34" charset="-122"/>
+                <a:cs typeface="Sarabun" pitchFamily="34" charset="-120"/>
               </a:rPr>
               <a:t>ใช้เวลา ~15 นาที ไม่เขียนโค้ดเองสักบรรทัด</a:t>
             </a:r>
@@ -4738,9 +4738,9 @@
                 <a:solidFill>
                   <a:srgbClr val="2E2420"/>
                 </a:solidFill>
-                <a:latin typeface="Tahoma" pitchFamily="34" charset="0"/>
-                <a:ea typeface="Tahoma" pitchFamily="34" charset="-122"/>
-                <a:cs typeface="Tahoma" pitchFamily="34" charset="-120"/>
+                <a:latin typeface="Sarabun" pitchFamily="34" charset="0"/>
+                <a:ea typeface="Sarabun" pitchFamily="34" charset="-122"/>
+                <a:cs typeface="Sarabun" pitchFamily="34" charset="-120"/>
               </a:rPr>
               <a:t>สั่งแก้ต่อได้ด้วยภาษาคน: “เพิ่มช่องค้นหาสมาชิก” “เปลี่ยนเป็นโหมดมืด”</a:t>
             </a:r>
@@ -4821,9 +4821,9 @@
                 <a:solidFill>
                   <a:srgbClr val="2E2420"/>
                 </a:solidFill>
-                <a:latin typeface="Tahoma" pitchFamily="34" charset="0"/>
-                <a:ea typeface="Tahoma" pitchFamily="34" charset="-122"/>
-                <a:cs typeface="Tahoma" pitchFamily="34" charset="-120"/>
+                <a:latin typeface="Sarabun" pitchFamily="34" charset="0"/>
+                <a:ea typeface="Sarabun" pitchFamily="34" charset="-122"/>
+                <a:cs typeface="Sarabun" pitchFamily="34" charset="-120"/>
               </a:rPr>
               <a:t>ระบบจริงจังกว่านี้ (เชื่อม POS, หลายสาขา) ก็เริ่มจากการคุยแบบเดียวกัน</a:t>
             </a:r>
@@ -4882,9 +4882,9 @@
                 <a:solidFill>
                   <a:srgbClr val="AD3A38"/>
                 </a:solidFill>
-                <a:latin typeface="Tahoma" pitchFamily="34" charset="0"/>
-                <a:ea typeface="Tahoma" pitchFamily="34" charset="-122"/>
-                <a:cs typeface="Tahoma" pitchFamily="34" charset="-120"/>
+                <a:latin typeface="Sarabun" pitchFamily="34" charset="0"/>
+                <a:ea typeface="Sarabun" pitchFamily="34" charset="-122"/>
+                <a:cs typeface="Sarabun" pitchFamily="34" charset="-120"/>
               </a:rPr>
               <a:t>คำถามกลับบ้าน:
 </a:t>
@@ -4897,9 +4897,9 @@
                 <a:solidFill>
                   <a:srgbClr val="2E2420"/>
                 </a:solidFill>
-                <a:latin typeface="Tahoma" pitchFamily="34" charset="0"/>
-                <a:ea typeface="Tahoma" pitchFamily="34" charset="-122"/>
-                <a:cs typeface="Tahoma" pitchFamily="34" charset="-120"/>
+                <a:latin typeface="Sarabun" pitchFamily="34" charset="0"/>
+                <a:ea typeface="Sarabun" pitchFamily="34" charset="-122"/>
+                <a:cs typeface="Sarabun" pitchFamily="34" charset="-120"/>
               </a:rPr>
               <a:t>“ระบบอะไรในงานของคุณ ที่อยากได้มานาน แต่คิดว่าต้องจ้างคนทำ?”</a:t>
             </a:r>
@@ -5008,9 +5008,9 @@
                 <a:solidFill>
                   <a:srgbClr val="AD3A38"/>
                 </a:solidFill>
-                <a:latin typeface="Tahoma" pitchFamily="34" charset="0"/>
-                <a:ea typeface="Tahoma" pitchFamily="34" charset="-122"/>
-                <a:cs typeface="Tahoma" pitchFamily="34" charset="-120"/>
+                <a:latin typeface="Chonburi" pitchFamily="34" charset="0"/>
+                <a:ea typeface="Chonburi" pitchFamily="34" charset="-122"/>
+                <a:cs typeface="Chonburi" pitchFamily="34" charset="-120"/>
               </a:rPr>
               <a:t>3 อย่างที่ขอให้จำออกไปจากห้องนี้</a:t>
             </a:r>
@@ -5120,9 +5120,9 @@
                 <a:solidFill>
                   <a:srgbClr val="2E2420"/>
                 </a:solidFill>
-                <a:latin typeface="Tahoma" pitchFamily="34" charset="0"/>
-                <a:ea typeface="Tahoma" pitchFamily="34" charset="-122"/>
-                <a:cs typeface="Tahoma" pitchFamily="34" charset="-120"/>
+                <a:latin typeface="Sarabun" pitchFamily="34" charset="0"/>
+                <a:ea typeface="Sarabun" pitchFamily="34" charset="-122"/>
+                <a:cs typeface="Sarabun" pitchFamily="34" charset="-120"/>
               </a:rPr>
               <a:t>สูตร 4 ส่วน</a:t>
             </a:r>
@@ -5159,9 +5159,9 @@
                 <a:solidFill>
                   <a:srgbClr val="8A6F57"/>
                 </a:solidFill>
-                <a:latin typeface="Tahoma" pitchFamily="34" charset="0"/>
-                <a:ea typeface="Tahoma" pitchFamily="34" charset="-122"/>
-                <a:cs typeface="Tahoma" pitchFamily="34" charset="-120"/>
+                <a:latin typeface="Sarabun" pitchFamily="34" charset="0"/>
+                <a:ea typeface="Sarabun" pitchFamily="34" charset="-122"/>
+                <a:cs typeface="Sarabun" pitchFamily="34" charset="-120"/>
               </a:rPr>
               <a:t>บทบาท + งาน + บริบท + รูปแบบผลลัพธ์</a:t>
             </a:r>
@@ -5271,9 +5271,9 @@
                 <a:solidFill>
                   <a:srgbClr val="2E2420"/>
                 </a:solidFill>
-                <a:latin typeface="Tahoma" pitchFamily="34" charset="0"/>
-                <a:ea typeface="Tahoma" pitchFamily="34" charset="-122"/>
-                <a:cs typeface="Tahoma" pitchFamily="34" charset="-120"/>
+                <a:latin typeface="Sarabun" pitchFamily="34" charset="0"/>
+                <a:ea typeface="Sarabun" pitchFamily="34" charset="-122"/>
+                <a:cs typeface="Sarabun" pitchFamily="34" charset="-120"/>
               </a:rPr>
               <a:t>กฎทอง</a:t>
             </a:r>
@@ -5310,9 +5310,9 @@
                 <a:solidFill>
                   <a:srgbClr val="8A6F57"/>
                 </a:solidFill>
-                <a:latin typeface="Tahoma" pitchFamily="34" charset="0"/>
-                <a:ea typeface="Tahoma" pitchFamily="34" charset="-122"/>
-                <a:cs typeface="Tahoma" pitchFamily="34" charset="-120"/>
+                <a:latin typeface="Sarabun" pitchFamily="34" charset="0"/>
+                <a:ea typeface="Sarabun" pitchFamily="34" charset="-122"/>
+                <a:cs typeface="Sarabun" pitchFamily="34" charset="-120"/>
               </a:rPr>
               <a:t>ไม่ถูกใจ → สั่งแก้ต่อ</a:t>
             </a:r>
@@ -5327,9 +5327,9 @@
                 <a:solidFill>
                   <a:srgbClr val="8A6F57"/>
                 </a:solidFill>
-                <a:latin typeface="Tahoma" pitchFamily="34" charset="0"/>
-                <a:ea typeface="Tahoma" pitchFamily="34" charset="-122"/>
-                <a:cs typeface="Tahoma" pitchFamily="34" charset="-120"/>
+                <a:latin typeface="Sarabun" pitchFamily="34" charset="0"/>
+                <a:ea typeface="Sarabun" pitchFamily="34" charset="-122"/>
+                <a:cs typeface="Sarabun" pitchFamily="34" charset="-120"/>
               </a:rPr>
               <a:t>คิดไม่ออก → ถามมันว่าช่วยอะไรได้บ้าง</a:t>
             </a:r>
@@ -5439,9 +5439,9 @@
                 <a:solidFill>
                   <a:srgbClr val="2E2420"/>
                 </a:solidFill>
-                <a:latin typeface="Tahoma" pitchFamily="34" charset="0"/>
-                <a:ea typeface="Tahoma" pitchFamily="34" charset="-122"/>
-                <a:cs typeface="Tahoma" pitchFamily="34" charset="-120"/>
+                <a:latin typeface="Sarabun" pitchFamily="34" charset="0"/>
+                <a:ea typeface="Sarabun" pitchFamily="34" charset="-122"/>
+                <a:cs typeface="Sarabun" pitchFamily="34" charset="-120"/>
               </a:rPr>
               <a:t>ระวัง 3 ข้อ</a:t>
             </a:r>
@@ -5478,9 +5478,9 @@
                 <a:solidFill>
                   <a:srgbClr val="8A6F57"/>
                 </a:solidFill>
-                <a:latin typeface="Tahoma" pitchFamily="34" charset="0"/>
-                <a:ea typeface="Tahoma" pitchFamily="34" charset="-122"/>
-                <a:cs typeface="Tahoma" pitchFamily="34" charset="-120"/>
+                <a:latin typeface="Sarabun" pitchFamily="34" charset="0"/>
+                <a:ea typeface="Sarabun" pitchFamily="34" charset="-122"/>
+                <a:cs typeface="Sarabun" pitchFamily="34" charset="-120"/>
               </a:rPr>
               <a:t>ตรวจก่อนใช้ • คิดก่อนอัปโหลด</a:t>
             </a:r>
@@ -5495,9 +5495,9 @@
                 <a:solidFill>
                   <a:srgbClr val="8A6F57"/>
                 </a:solidFill>
-                <a:latin typeface="Tahoma" pitchFamily="34" charset="0"/>
-                <a:ea typeface="Tahoma" pitchFamily="34" charset="-122"/>
-                <a:cs typeface="Tahoma" pitchFamily="34" charset="-120"/>
+                <a:latin typeface="Sarabun" pitchFamily="34" charset="0"/>
+                <a:ea typeface="Sarabun" pitchFamily="34" charset="-122"/>
+                <a:cs typeface="Sarabun" pitchFamily="34" charset="-120"/>
               </a:rPr>
               <a:t>คนตัดสินใจ ไม่ใช่ AI</a:t>
             </a:r>
@@ -5534,9 +5534,9 @@
                 <a:solidFill>
                   <a:srgbClr val="C65E52"/>
                 </a:solidFill>
-                <a:latin typeface="Tahoma" pitchFamily="34" charset="0"/>
-                <a:ea typeface="Tahoma" pitchFamily="34" charset="-122"/>
-                <a:cs typeface="Tahoma" pitchFamily="34" charset="-120"/>
+                <a:latin typeface="Sarabun" pitchFamily="34" charset="0"/>
+                <a:ea typeface="Sarabun" pitchFamily="34" charset="-122"/>
+                <a:cs typeface="Sarabun" pitchFamily="34" charset="-120"/>
               </a:rPr>
               <a:t>ทั้งหมดนี้อยู่ใน Cheat Sheet ที่แจก — แปะไว้ข้างจอได้เลย</a:t>
             </a:r>
@@ -5705,9 +5705,9 @@
                 <a:solidFill>
                   <a:srgbClr val="AD3A38"/>
                 </a:solidFill>
-                <a:latin typeface="Tahoma" pitchFamily="34" charset="0"/>
-                <a:ea typeface="Tahoma" pitchFamily="34" charset="-122"/>
-                <a:cs typeface="Tahoma" pitchFamily="34" charset="-120"/>
+                <a:latin typeface="Chonburi" pitchFamily="34" charset="0"/>
+                <a:ea typeface="Chonburi" pitchFamily="34" charset="-122"/>
+                <a:cs typeface="Chonburi" pitchFamily="34" charset="-120"/>
               </a:rPr>
               <a:t>การบ้าน</a:t>
             </a:r>
@@ -5744,9 +5744,9 @@
                 <a:solidFill>
                   <a:srgbClr val="2E2420"/>
                 </a:solidFill>
-                <a:latin typeface="Tahoma" pitchFamily="34" charset="0"/>
-                <a:ea typeface="Tahoma" pitchFamily="34" charset="-122"/>
-                <a:cs typeface="Tahoma" pitchFamily="34" charset="-120"/>
+                <a:latin typeface="Sarabun" pitchFamily="34" charset="0"/>
+                <a:ea typeface="Sarabun" pitchFamily="34" charset="-122"/>
+                <a:cs typeface="Sarabun" pitchFamily="34" charset="-120"/>
               </a:rPr>
               <a:t>ใช้ AI กับงานจริงของคุณ 3 ครั้ง ภายในสัปดาห์นี้</a:t>
             </a:r>
@@ -5783,9 +5783,9 @@
                 <a:solidFill>
                   <a:srgbClr val="8A6F57"/>
                 </a:solidFill>
-                <a:latin typeface="Tahoma" pitchFamily="34" charset="0"/>
-                <a:ea typeface="Tahoma" pitchFamily="34" charset="-122"/>
-                <a:cs typeface="Tahoma" pitchFamily="34" charset="-120"/>
+                <a:latin typeface="Sarabun" pitchFamily="34" charset="0"/>
+                <a:ea typeface="Sarabun" pitchFamily="34" charset="-122"/>
+                <a:cs typeface="Sarabun" pitchFamily="34" charset="-120"/>
               </a:rPr>
               <a:t>แล้วมาเล่าในกลุ่มไลน์ว่า อันไหนเวิร์ก อันไหนไม่เวิร์ก — ตัวอย่างจากเพื่อนคือครูที่ดีที่สุด</a:t>
             </a:r>
@@ -5895,9 +5895,9 @@
                 <a:solidFill>
                   <a:srgbClr val="2E2420"/>
                 </a:solidFill>
-                <a:latin typeface="Tahoma" pitchFamily="34" charset="0"/>
-                <a:ea typeface="Tahoma" pitchFamily="34" charset="-122"/>
-                <a:cs typeface="Tahoma" pitchFamily="34" charset="-120"/>
+                <a:latin typeface="Sarabun" pitchFamily="34" charset="0"/>
+                <a:ea typeface="Sarabun" pitchFamily="34" charset="-122"/>
+                <a:cs typeface="Sarabun" pitchFamily="34" charset="-120"/>
               </a:rPr>
               <a:t>เข้ากลุ่มไลน์คลาส</a:t>
             </a:r>
@@ -6007,9 +6007,9 @@
                 <a:solidFill>
                   <a:srgbClr val="2E2420"/>
                 </a:solidFill>
-                <a:latin typeface="Tahoma" pitchFamily="34" charset="0"/>
-                <a:ea typeface="Tahoma" pitchFamily="34" charset="-122"/>
-                <a:cs typeface="Tahoma" pitchFamily="34" charset="-120"/>
+                <a:latin typeface="Sarabun" pitchFamily="34" charset="0"/>
+                <a:ea typeface="Sarabun" pitchFamily="34" charset="-122"/>
+                <a:cs typeface="Sarabun" pitchFamily="34" charset="-120"/>
               </a:rPr>
               <a:t>โหลดโฟลเดอร์เดโม่ไปลองต่อ</a:t>
             </a:r>
@@ -6119,9 +6119,9 @@
                 <a:solidFill>
                   <a:srgbClr val="2E2420"/>
                 </a:solidFill>
-                <a:latin typeface="Tahoma" pitchFamily="34" charset="0"/>
-                <a:ea typeface="Tahoma" pitchFamily="34" charset="-122"/>
-                <a:cs typeface="Tahoma" pitchFamily="34" charset="-120"/>
+                <a:latin typeface="Sarabun" pitchFamily="34" charset="0"/>
+                <a:ea typeface="Sarabun" pitchFamily="34" charset="-122"/>
+                <a:cs typeface="Sarabun" pitchFamily="34" charset="-120"/>
               </a:rPr>
               <a:t>Cheat Sheet อยู่ในมือแล้ว</a:t>
             </a:r>
@@ -6158,9 +6158,9 @@
                 <a:solidFill>
                   <a:srgbClr val="C65E52"/>
                 </a:solidFill>
-                <a:latin typeface="Tahoma" pitchFamily="34" charset="0"/>
-                <a:ea typeface="Tahoma" pitchFamily="34" charset="-122"/>
-                <a:cs typeface="Tahoma" pitchFamily="34" charset="-120"/>
+                <a:latin typeface="Sarabun" pitchFamily="34" charset="0"/>
+                <a:ea typeface="Sarabun" pitchFamily="34" charset="-122"/>
+                <a:cs typeface="Sarabun" pitchFamily="34" charset="-120"/>
               </a:rPr>
               <a:t>ขอบคุณครับ ☕ มีคำถามถามได้เลย</a:t>
             </a:r>
@@ -6269,9 +6269,9 @@
                 <a:solidFill>
                   <a:srgbClr val="AD3A38"/>
                 </a:solidFill>
-                <a:latin typeface="Tahoma" pitchFamily="34" charset="0"/>
-                <a:ea typeface="Tahoma" pitchFamily="34" charset="-122"/>
-                <a:cs typeface="Tahoma" pitchFamily="34" charset="-120"/>
+                <a:latin typeface="Chonburi" pitchFamily="34" charset="0"/>
+                <a:ea typeface="Chonburi" pitchFamily="34" charset="-122"/>
+                <a:cs typeface="Chonburi" pitchFamily="34" charset="-120"/>
               </a:rPr>
               <a:t>วันนี้เราจะทำอะไรกันบ้าง</a:t>
             </a:r>
@@ -6330,9 +6330,9 @@
                 <a:solidFill>
                   <a:srgbClr val="AD3A38"/>
                 </a:solidFill>
-                <a:latin typeface="Tahoma" pitchFamily="34" charset="0"/>
-                <a:ea typeface="Tahoma" pitchFamily="34" charset="-122"/>
-                <a:cs typeface="Tahoma" pitchFamily="34" charset="-120"/>
+                <a:latin typeface="Sarabun" pitchFamily="34" charset="0"/>
+                <a:ea typeface="Sarabun" pitchFamily="34" charset="-122"/>
+                <a:cs typeface="Sarabun" pitchFamily="34" charset="-120"/>
               </a:rPr>
               <a:t>0:00</a:t>
             </a:r>
@@ -6369,9 +6369,9 @@
                 <a:solidFill>
                   <a:srgbClr val="2E2420"/>
                 </a:solidFill>
-                <a:latin typeface="Tahoma" pitchFamily="34" charset="0"/>
-                <a:ea typeface="Tahoma" pitchFamily="34" charset="-122"/>
-                <a:cs typeface="Tahoma" pitchFamily="34" charset="-120"/>
+                <a:latin typeface="Sarabun" pitchFamily="34" charset="0"/>
+                <a:ea typeface="Sarabun" pitchFamily="34" charset="-122"/>
+                <a:cs typeface="Sarabun" pitchFamily="34" charset="-120"/>
               </a:rPr>
               <a:t>ปูพื้นฐาน — โลก AI ตอนนี้เป็นยังไง</a:t>
             </a:r>
@@ -6408,9 +6408,9 @@
                 <a:solidFill>
                   <a:srgbClr val="8A6F57"/>
                 </a:solidFill>
-                <a:latin typeface="Tahoma" pitchFamily="34" charset="0"/>
-                <a:ea typeface="Tahoma" pitchFamily="34" charset="-122"/>
-                <a:cs typeface="Tahoma" pitchFamily="34" charset="-120"/>
+                <a:latin typeface="Sarabun" pitchFamily="34" charset="0"/>
+                <a:ea typeface="Sarabun" pitchFamily="34" charset="-122"/>
+                <a:cs typeface="Sarabun" pitchFamily="34" charset="-120"/>
               </a:rPr>
               <a:t>15 นาที</a:t>
             </a:r>
@@ -6469,9 +6469,9 @@
                 <a:solidFill>
                   <a:srgbClr val="AD3A38"/>
                 </a:solidFill>
-                <a:latin typeface="Tahoma" pitchFamily="34" charset="0"/>
-                <a:ea typeface="Tahoma" pitchFamily="34" charset="-122"/>
-                <a:cs typeface="Tahoma" pitchFamily="34" charset="-120"/>
+                <a:latin typeface="Sarabun" pitchFamily="34" charset="0"/>
+                <a:ea typeface="Sarabun" pitchFamily="34" charset="-122"/>
+                <a:cs typeface="Sarabun" pitchFamily="34" charset="-120"/>
               </a:rPr>
               <a:t>0:15</a:t>
             </a:r>
@@ -6508,9 +6508,9 @@
                 <a:solidFill>
                   <a:srgbClr val="2E2420"/>
                 </a:solidFill>
-                <a:latin typeface="Tahoma" pitchFamily="34" charset="0"/>
-                <a:ea typeface="Tahoma" pitchFamily="34" charset="-122"/>
-                <a:cs typeface="Tahoma" pitchFamily="34" charset="-120"/>
+                <a:latin typeface="Sarabun" pitchFamily="34" charset="0"/>
+                <a:ea typeface="Sarabun" pitchFamily="34" charset="-122"/>
+                <a:cs typeface="Sarabun" pitchFamily="34" charset="-120"/>
               </a:rPr>
               <a:t>รู้จัก Cowork + สูตรสั่งงาน 4 ส่วน</a:t>
             </a:r>
@@ -6547,9 +6547,9 @@
                 <a:solidFill>
                   <a:srgbClr val="8A6F57"/>
                 </a:solidFill>
-                <a:latin typeface="Tahoma" pitchFamily="34" charset="0"/>
-                <a:ea typeface="Tahoma" pitchFamily="34" charset="-122"/>
-                <a:cs typeface="Tahoma" pitchFamily="34" charset="-120"/>
+                <a:latin typeface="Sarabun" pitchFamily="34" charset="0"/>
+                <a:ea typeface="Sarabun" pitchFamily="34" charset="-122"/>
+                <a:cs typeface="Sarabun" pitchFamily="34" charset="-120"/>
               </a:rPr>
               <a:t>15 นาที</a:t>
             </a:r>
@@ -6608,9 +6608,9 @@
                 <a:solidFill>
                   <a:srgbClr val="FFFFFF"/>
                 </a:solidFill>
-                <a:latin typeface="Tahoma" pitchFamily="34" charset="0"/>
-                <a:ea typeface="Tahoma" pitchFamily="34" charset="-122"/>
-                <a:cs typeface="Tahoma" pitchFamily="34" charset="-120"/>
+                <a:latin typeface="Sarabun" pitchFamily="34" charset="0"/>
+                <a:ea typeface="Sarabun" pitchFamily="34" charset="-122"/>
+                <a:cs typeface="Sarabun" pitchFamily="34" charset="-120"/>
               </a:rPr>
               <a:t>0:30</a:t>
             </a:r>
@@ -6647,9 +6647,9 @@
                 <a:solidFill>
                   <a:srgbClr val="2E2420"/>
                 </a:solidFill>
-                <a:latin typeface="Tahoma" pitchFamily="34" charset="0"/>
-                <a:ea typeface="Tahoma" pitchFamily="34" charset="-122"/>
-                <a:cs typeface="Tahoma" pitchFamily="34" charset="-120"/>
+                <a:latin typeface="Sarabun" pitchFamily="34" charset="0"/>
+                <a:ea typeface="Sarabun" pitchFamily="34" charset="-122"/>
+                <a:cs typeface="Sarabun" pitchFamily="34" charset="-120"/>
               </a:rPr>
               <a:t>เดโม่สด: เคสร้านกาแฟ (อีเมล • ตารางนัด • ยอดขาย)</a:t>
             </a:r>
@@ -6686,9 +6686,9 @@
                 <a:solidFill>
                   <a:srgbClr val="8A6F57"/>
                 </a:solidFill>
-                <a:latin typeface="Tahoma" pitchFamily="34" charset="0"/>
-                <a:ea typeface="Tahoma" pitchFamily="34" charset="-122"/>
-                <a:cs typeface="Tahoma" pitchFamily="34" charset="-120"/>
+                <a:latin typeface="Sarabun" pitchFamily="34" charset="0"/>
+                <a:ea typeface="Sarabun" pitchFamily="34" charset="-122"/>
+                <a:cs typeface="Sarabun" pitchFamily="34" charset="-120"/>
               </a:rPr>
               <a:t>45 นาที</a:t>
             </a:r>
@@ -6747,9 +6747,9 @@
                 <a:solidFill>
                   <a:srgbClr val="FFFFFF"/>
                 </a:solidFill>
-                <a:latin typeface="Tahoma" pitchFamily="34" charset="0"/>
-                <a:ea typeface="Tahoma" pitchFamily="34" charset="-122"/>
-                <a:cs typeface="Tahoma" pitchFamily="34" charset="-120"/>
+                <a:latin typeface="Sarabun" pitchFamily="34" charset="0"/>
+                <a:ea typeface="Sarabun" pitchFamily="34" charset="-122"/>
+                <a:cs typeface="Sarabun" pitchFamily="34" charset="-120"/>
               </a:rPr>
               <a:t>1:25</a:t>
             </a:r>
@@ -6786,9 +6786,9 @@
                 <a:solidFill>
                   <a:srgbClr val="2E2420"/>
                 </a:solidFill>
-                <a:latin typeface="Tahoma" pitchFamily="34" charset="0"/>
-                <a:ea typeface="Tahoma" pitchFamily="34" charset="-122"/>
-                <a:cs typeface="Tahoma" pitchFamily="34" charset="-120"/>
+                <a:latin typeface="Sarabun" pitchFamily="34" charset="0"/>
+                <a:ea typeface="Sarabun" pitchFamily="34" charset="-122"/>
+                <a:cs typeface="Sarabun" pitchFamily="34" charset="-120"/>
               </a:rPr>
               <a:t>เวิร์กช็อป: ลองกับไฟล์งานของคุณเอง</a:t>
             </a:r>
@@ -6825,9 +6825,9 @@
                 <a:solidFill>
                   <a:srgbClr val="8A6F57"/>
                 </a:solidFill>
-                <a:latin typeface="Tahoma" pitchFamily="34" charset="0"/>
-                <a:ea typeface="Tahoma" pitchFamily="34" charset="-122"/>
-                <a:cs typeface="Tahoma" pitchFamily="34" charset="-120"/>
+                <a:latin typeface="Sarabun" pitchFamily="34" charset="0"/>
+                <a:ea typeface="Sarabun" pitchFamily="34" charset="-122"/>
+                <a:cs typeface="Sarabun" pitchFamily="34" charset="-120"/>
               </a:rPr>
               <a:t>45 นาที</a:t>
             </a:r>
@@ -6886,9 +6886,9 @@
                 <a:solidFill>
                   <a:srgbClr val="FFFFFF"/>
                 </a:solidFill>
-                <a:latin typeface="Tahoma" pitchFamily="34" charset="0"/>
-                <a:ea typeface="Tahoma" pitchFamily="34" charset="-122"/>
-                <a:cs typeface="Tahoma" pitchFamily="34" charset="-120"/>
+                <a:latin typeface="Sarabun" pitchFamily="34" charset="0"/>
+                <a:ea typeface="Sarabun" pitchFamily="34" charset="-122"/>
+                <a:cs typeface="Sarabun" pitchFamily="34" charset="-120"/>
               </a:rPr>
               <a:t>2:10</a:t>
             </a:r>
@@ -6925,9 +6925,9 @@
                 <a:solidFill>
                   <a:srgbClr val="2E2420"/>
                 </a:solidFill>
-                <a:latin typeface="Tahoma" pitchFamily="34" charset="0"/>
-                <a:ea typeface="Tahoma" pitchFamily="34" charset="-122"/>
-                <a:cs typeface="Tahoma" pitchFamily="34" charset="-120"/>
+                <a:latin typeface="Sarabun" pitchFamily="34" charset="0"/>
+                <a:ea typeface="Sarabun" pitchFamily="34" charset="-122"/>
+                <a:cs typeface="Sarabun" pitchFamily="34" charset="-120"/>
               </a:rPr>
               <a:t>Claude Code: สั่งสร้างระบบ Dashboard</a:t>
             </a:r>
@@ -6964,9 +6964,9 @@
                 <a:solidFill>
                   <a:srgbClr val="8A6F57"/>
                 </a:solidFill>
-                <a:latin typeface="Tahoma" pitchFamily="34" charset="0"/>
-                <a:ea typeface="Tahoma" pitchFamily="34" charset="-122"/>
-                <a:cs typeface="Tahoma" pitchFamily="34" charset="-120"/>
+                <a:latin typeface="Sarabun" pitchFamily="34" charset="0"/>
+                <a:ea typeface="Sarabun" pitchFamily="34" charset="-122"/>
+                <a:cs typeface="Sarabun" pitchFamily="34" charset="-120"/>
               </a:rPr>
               <a:t>40 นาที</a:t>
             </a:r>
@@ -7025,9 +7025,9 @@
                 <a:solidFill>
                   <a:srgbClr val="AD3A38"/>
                 </a:solidFill>
-                <a:latin typeface="Tahoma" pitchFamily="34" charset="0"/>
-                <a:ea typeface="Tahoma" pitchFamily="34" charset="-122"/>
-                <a:cs typeface="Tahoma" pitchFamily="34" charset="-120"/>
+                <a:latin typeface="Sarabun" pitchFamily="34" charset="0"/>
+                <a:ea typeface="Sarabun" pitchFamily="34" charset="-122"/>
+                <a:cs typeface="Sarabun" pitchFamily="34" charset="-120"/>
               </a:rPr>
               <a:t>2:50</a:t>
             </a:r>
@@ -7064,9 +7064,9 @@
                 <a:solidFill>
                   <a:srgbClr val="2E2420"/>
                 </a:solidFill>
-                <a:latin typeface="Tahoma" pitchFamily="34" charset="0"/>
-                <a:ea typeface="Tahoma" pitchFamily="34" charset="-122"/>
-                <a:cs typeface="Tahoma" pitchFamily="34" charset="-120"/>
+                <a:latin typeface="Sarabun" pitchFamily="34" charset="0"/>
+                <a:ea typeface="Sarabun" pitchFamily="34" charset="-122"/>
+                <a:cs typeface="Sarabun" pitchFamily="34" charset="-120"/>
               </a:rPr>
               <a:t>สรุป + แจก Cheat Sheet + Q&amp;A</a:t>
             </a:r>
@@ -7103,9 +7103,9 @@
                 <a:solidFill>
                   <a:srgbClr val="8A6F57"/>
                 </a:solidFill>
-                <a:latin typeface="Tahoma" pitchFamily="34" charset="0"/>
-                <a:ea typeface="Tahoma" pitchFamily="34" charset="-122"/>
-                <a:cs typeface="Tahoma" pitchFamily="34" charset="-120"/>
+                <a:latin typeface="Sarabun" pitchFamily="34" charset="0"/>
+                <a:ea typeface="Sarabun" pitchFamily="34" charset="-122"/>
+                <a:cs typeface="Sarabun" pitchFamily="34" charset="-120"/>
               </a:rPr>
               <a:t>10 นาที</a:t>
             </a:r>
@@ -7164,9 +7164,9 @@
                 <a:solidFill>
                   <a:srgbClr val="FFCB64"/>
                 </a:solidFill>
-                <a:latin typeface="Tahoma" pitchFamily="34" charset="0"/>
-                <a:ea typeface="Tahoma" pitchFamily="34" charset="-122"/>
-                <a:cs typeface="Tahoma" pitchFamily="34" charset="-120"/>
+                <a:latin typeface="Chonburi" pitchFamily="34" charset="0"/>
+                <a:ea typeface="Chonburi" pitchFamily="34" charset="-122"/>
+                <a:cs typeface="Chonburi" pitchFamily="34" charset="-120"/>
               </a:rPr>
               <a:t>3</a:t>
             </a:r>
@@ -7203,9 +7203,9 @@
                 <a:solidFill>
                   <a:srgbClr val="FBEBD0"/>
                 </a:solidFill>
-                <a:latin typeface="Tahoma" pitchFamily="34" charset="0"/>
-                <a:ea typeface="Tahoma" pitchFamily="34" charset="-122"/>
-                <a:cs typeface="Tahoma" pitchFamily="34" charset="-120"/>
+                <a:latin typeface="Sarabun" pitchFamily="34" charset="0"/>
+                <a:ea typeface="Sarabun" pitchFamily="34" charset="-122"/>
+                <a:cs typeface="Sarabun" pitchFamily="34" charset="-120"/>
               </a:rPr>
               <a:t>ชั่วโมง</a:t>
             </a:r>
@@ -7220,9 +7220,9 @@
                 <a:solidFill>
                   <a:srgbClr val="FBEBD0"/>
                 </a:solidFill>
-                <a:latin typeface="Tahoma" pitchFamily="34" charset="0"/>
-                <a:ea typeface="Tahoma" pitchFamily="34" charset="-122"/>
-                <a:cs typeface="Tahoma" pitchFamily="34" charset="-120"/>
+                <a:latin typeface="Sarabun" pitchFamily="34" charset="0"/>
+                <a:ea typeface="Sarabun" pitchFamily="34" charset="-122"/>
+                <a:cs typeface="Sarabun" pitchFamily="34" charset="-120"/>
               </a:rPr>
               <a:t>จบในครั้งเดียว</a:t>
             </a:r>
@@ -7351,9 +7351,9 @@
                 <a:solidFill>
                   <a:srgbClr val="C65E52"/>
                 </a:solidFill>
-                <a:latin typeface="Tahoma" pitchFamily="34" charset="0"/>
-                <a:ea typeface="Tahoma" pitchFamily="34" charset="-122"/>
-                <a:cs typeface="Tahoma" pitchFamily="34" charset="-120"/>
+                <a:latin typeface="Chonburi" pitchFamily="34" charset="0"/>
+                <a:ea typeface="Chonburi" pitchFamily="34" charset="-122"/>
+                <a:cs typeface="Chonburi" pitchFamily="34" charset="-120"/>
               </a:rPr>
               <a:t>ช่วงที่ 1</a:t>
             </a:r>
@@ -7390,9 +7390,9 @@
                 <a:solidFill>
                   <a:srgbClr val="AD3A38"/>
                 </a:solidFill>
-                <a:latin typeface="Tahoma" pitchFamily="34" charset="0"/>
-                <a:ea typeface="Tahoma" pitchFamily="34" charset="-122"/>
-                <a:cs typeface="Tahoma" pitchFamily="34" charset="-120"/>
+                <a:latin typeface="Chonburi" pitchFamily="34" charset="0"/>
+                <a:ea typeface="Chonburi" pitchFamily="34" charset="-122"/>
+                <a:cs typeface="Chonburi" pitchFamily="34" charset="-120"/>
               </a:rPr>
               <a:t>โลก AI ตอนนี้เป็นยังไง</a:t>
             </a:r>
@@ -7429,9 +7429,9 @@
                 <a:solidFill>
                   <a:srgbClr val="2E2420"/>
                 </a:solidFill>
-                <a:latin typeface="Tahoma" pitchFamily="34" charset="0"/>
-                <a:ea typeface="Tahoma" pitchFamily="34" charset="-122"/>
-                <a:cs typeface="Tahoma" pitchFamily="34" charset="-120"/>
+                <a:latin typeface="Sarabun" pitchFamily="34" charset="0"/>
+                <a:ea typeface="Sarabun" pitchFamily="34" charset="-122"/>
+                <a:cs typeface="Sarabun" pitchFamily="34" charset="-120"/>
               </a:rPr>
               <a:t>15 นาที — ไม่มีศัพท์เทคนิค สัญญา</a:t>
             </a:r>
@@ -7540,9 +7540,9 @@
                 <a:solidFill>
                   <a:srgbClr val="AD3A38"/>
                 </a:solidFill>
-                <a:latin typeface="Tahoma" pitchFamily="34" charset="0"/>
-                <a:ea typeface="Tahoma" pitchFamily="34" charset="-122"/>
-                <a:cs typeface="Tahoma" pitchFamily="34" charset="-120"/>
+                <a:latin typeface="Chonburi" pitchFamily="34" charset="0"/>
+                <a:ea typeface="Chonburi" pitchFamily="34" charset="-122"/>
+                <a:cs typeface="Chonburi" pitchFamily="34" charset="-120"/>
               </a:rPr>
               <a:t>AI ยุคนี้ = ผู้ช่วยที่คุยด้วยภาษาคนได้</a:t>
             </a:r>
@@ -7579,9 +7579,9 @@
                 <a:solidFill>
                   <a:srgbClr val="8A6F57"/>
                 </a:solidFill>
-                <a:latin typeface="Tahoma" pitchFamily="34" charset="0"/>
-                <a:ea typeface="Tahoma" pitchFamily="34" charset="-122"/>
-                <a:cs typeface="Tahoma" pitchFamily="34" charset="-120"/>
+                <a:latin typeface="Sarabun" pitchFamily="34" charset="0"/>
+                <a:ea typeface="Sarabun" pitchFamily="34" charset="-122"/>
+                <a:cs typeface="Sarabun" pitchFamily="34" charset="-120"/>
               </a:rPr>
               <a:t>ไม่ใช่หุ่นยนต์ ไม่ใช่ Google — พิมพ์คุยเหมือนคุยกับเพื่อนร่วมงานคนหนึ่ง</a:t>
             </a:r>
@@ -7684,9 +7684,9 @@
                 <a:solidFill>
                   <a:srgbClr val="2E2420"/>
                 </a:solidFill>
-                <a:latin typeface="Tahoma" pitchFamily="34" charset="0"/>
-                <a:ea typeface="Tahoma" pitchFamily="34" charset="-122"/>
-                <a:cs typeface="Tahoma" pitchFamily="34" charset="-120"/>
+                <a:latin typeface="Sarabun" pitchFamily="34" charset="0"/>
+                <a:ea typeface="Sarabun" pitchFamily="34" charset="-122"/>
+                <a:cs typeface="Sarabun" pitchFamily="34" charset="-120"/>
               </a:rPr>
               <a:t>อ่าน</a:t>
             </a:r>
@@ -7723,9 +7723,9 @@
                 <a:solidFill>
                   <a:srgbClr val="8A6F57"/>
                 </a:solidFill>
-                <a:latin typeface="Tahoma" pitchFamily="34" charset="0"/>
-                <a:ea typeface="Tahoma" pitchFamily="34" charset="-122"/>
-                <a:cs typeface="Tahoma" pitchFamily="34" charset="-120"/>
+                <a:latin typeface="Sarabun" pitchFamily="34" charset="0"/>
+                <a:ea typeface="Sarabun" pitchFamily="34" charset="-122"/>
+                <a:cs typeface="Sarabun" pitchFamily="34" charset="-120"/>
               </a:rPr>
               <a:t>เอกสาร สัญญา อีเมล</a:t>
             </a:r>
@@ -7740,9 +7740,9 @@
                 <a:solidFill>
                   <a:srgbClr val="8A6F57"/>
                 </a:solidFill>
-                <a:latin typeface="Tahoma" pitchFamily="34" charset="0"/>
-                <a:ea typeface="Tahoma" pitchFamily="34" charset="-122"/>
-                <a:cs typeface="Tahoma" pitchFamily="34" charset="-120"/>
+                <a:latin typeface="Sarabun" pitchFamily="34" charset="0"/>
+                <a:ea typeface="Sarabun" pitchFamily="34" charset="-122"/>
+                <a:cs typeface="Sarabun" pitchFamily="34" charset="-120"/>
               </a:rPr>
               <a:t>ยาวแค่ไหนก็ไหว</a:t>
             </a:r>
@@ -7845,9 +7845,9 @@
                 <a:solidFill>
                   <a:srgbClr val="2E2420"/>
                 </a:solidFill>
-                <a:latin typeface="Tahoma" pitchFamily="34" charset="0"/>
-                <a:ea typeface="Tahoma" pitchFamily="34" charset="-122"/>
-                <a:cs typeface="Tahoma" pitchFamily="34" charset="-120"/>
+                <a:latin typeface="Sarabun" pitchFamily="34" charset="0"/>
+                <a:ea typeface="Sarabun" pitchFamily="34" charset="-122"/>
+                <a:cs typeface="Sarabun" pitchFamily="34" charset="-120"/>
               </a:rPr>
               <a:t>เขียน</a:t>
             </a:r>
@@ -7884,9 +7884,9 @@
                 <a:solidFill>
                   <a:srgbClr val="8A6F57"/>
                 </a:solidFill>
-                <a:latin typeface="Tahoma" pitchFamily="34" charset="0"/>
-                <a:ea typeface="Tahoma" pitchFamily="34" charset="-122"/>
-                <a:cs typeface="Tahoma" pitchFamily="34" charset="-120"/>
+                <a:latin typeface="Sarabun" pitchFamily="34" charset="0"/>
+                <a:ea typeface="Sarabun" pitchFamily="34" charset="-122"/>
+                <a:cs typeface="Sarabun" pitchFamily="34" charset="-120"/>
               </a:rPr>
               <a:t>สรุป ร่างอีเมล แปลภาษา</a:t>
             </a:r>
@@ -7901,9 +7901,9 @@
                 <a:solidFill>
                   <a:srgbClr val="8A6F57"/>
                 </a:solidFill>
-                <a:latin typeface="Tahoma" pitchFamily="34" charset="0"/>
-                <a:ea typeface="Tahoma" pitchFamily="34" charset="-122"/>
-                <a:cs typeface="Tahoma" pitchFamily="34" charset="-120"/>
+                <a:latin typeface="Sarabun" pitchFamily="34" charset="0"/>
+                <a:ea typeface="Sarabun" pitchFamily="34" charset="-122"/>
+                <a:cs typeface="Sarabun" pitchFamily="34" charset="-120"/>
               </a:rPr>
               <a:t>ปรับโทนได้ตามสั่ง</a:t>
             </a:r>
@@ -8006,9 +8006,9 @@
                 <a:solidFill>
                   <a:srgbClr val="2E2420"/>
                 </a:solidFill>
-                <a:latin typeface="Tahoma" pitchFamily="34" charset="0"/>
-                <a:ea typeface="Tahoma" pitchFamily="34" charset="-122"/>
-                <a:cs typeface="Tahoma" pitchFamily="34" charset="-120"/>
+                <a:latin typeface="Sarabun" pitchFamily="34" charset="0"/>
+                <a:ea typeface="Sarabun" pitchFamily="34" charset="-122"/>
+                <a:cs typeface="Sarabun" pitchFamily="34" charset="-120"/>
               </a:rPr>
               <a:t>คิด</a:t>
             </a:r>
@@ -8045,9 +8045,9 @@
                 <a:solidFill>
                   <a:srgbClr val="8A6F57"/>
                 </a:solidFill>
-                <a:latin typeface="Tahoma" pitchFamily="34" charset="0"/>
-                <a:ea typeface="Tahoma" pitchFamily="34" charset="-122"/>
-                <a:cs typeface="Tahoma" pitchFamily="34" charset="-120"/>
+                <a:latin typeface="Sarabun" pitchFamily="34" charset="0"/>
+                <a:ea typeface="Sarabun" pitchFamily="34" charset="-122"/>
+                <a:cs typeface="Sarabun" pitchFamily="34" charset="-120"/>
               </a:rPr>
               <a:t>วิเคราะห์ข้อมูล เสนอไอเดีย</a:t>
             </a:r>
@@ -8062,9 +8062,9 @@
                 <a:solidFill>
                   <a:srgbClr val="8A6F57"/>
                 </a:solidFill>
-                <a:latin typeface="Tahoma" pitchFamily="34" charset="0"/>
-                <a:ea typeface="Tahoma" pitchFamily="34" charset="-122"/>
-                <a:cs typeface="Tahoma" pitchFamily="34" charset="-120"/>
+                <a:latin typeface="Sarabun" pitchFamily="34" charset="0"/>
+                <a:ea typeface="Sarabun" pitchFamily="34" charset="-122"/>
+                <a:cs typeface="Sarabun" pitchFamily="34" charset="-120"/>
               </a:rPr>
               <a:t>ช่วยตัดสินใจ</a:t>
             </a:r>
@@ -8167,9 +8167,9 @@
                 <a:solidFill>
                   <a:srgbClr val="2E2420"/>
                 </a:solidFill>
-                <a:latin typeface="Tahoma" pitchFamily="34" charset="0"/>
-                <a:ea typeface="Tahoma" pitchFamily="34" charset="-122"/>
-                <a:cs typeface="Tahoma" pitchFamily="34" charset="-120"/>
+                <a:latin typeface="Sarabun" pitchFamily="34" charset="0"/>
+                <a:ea typeface="Sarabun" pitchFamily="34" charset="-122"/>
+                <a:cs typeface="Sarabun" pitchFamily="34" charset="-120"/>
               </a:rPr>
               <a:t>ลงมือทำ</a:t>
             </a:r>
@@ -8206,9 +8206,9 @@
                 <a:solidFill>
                   <a:srgbClr val="8A6F57"/>
                 </a:solidFill>
-                <a:latin typeface="Tahoma" pitchFamily="34" charset="0"/>
-                <a:ea typeface="Tahoma" pitchFamily="34" charset="-122"/>
-                <a:cs typeface="Tahoma" pitchFamily="34" charset="-120"/>
+                <a:latin typeface="Sarabun" pitchFamily="34" charset="0"/>
+                <a:ea typeface="Sarabun" pitchFamily="34" charset="-122"/>
+                <a:cs typeface="Sarabun" pitchFamily="34" charset="-120"/>
               </a:rPr>
               <a:t>จัดไฟล์ สร้างรายงาน</a:t>
             </a:r>
@@ -8223,9 +8223,9 @@
                 <a:solidFill>
                   <a:srgbClr val="8A6F57"/>
                 </a:solidFill>
-                <a:latin typeface="Tahoma" pitchFamily="34" charset="0"/>
-                <a:ea typeface="Tahoma" pitchFamily="34" charset="-122"/>
-                <a:cs typeface="Tahoma" pitchFamily="34" charset="-120"/>
+                <a:latin typeface="Sarabun" pitchFamily="34" charset="0"/>
+                <a:ea typeface="Sarabun" pitchFamily="34" charset="-122"/>
+                <a:cs typeface="Sarabun" pitchFamily="34" charset="-120"/>
               </a:rPr>
               <a:t>เขียนโปรแกรม</a:t>
             </a:r>
@@ -8262,9 +8262,9 @@
                 <a:solidFill>
                   <a:srgbClr val="C65E52"/>
                 </a:solidFill>
-                <a:latin typeface="Tahoma" pitchFamily="34" charset="0"/>
-                <a:ea typeface="Tahoma" pitchFamily="34" charset="-122"/>
-                <a:cs typeface="Tahoma" pitchFamily="34" charset="-120"/>
+                <a:latin typeface="Sarabun" pitchFamily="34" charset="0"/>
+                <a:ea typeface="Sarabun" pitchFamily="34" charset="-122"/>
+                <a:cs typeface="Sarabun" pitchFamily="34" charset="-120"/>
               </a:rPr>
               <a:t>จุดเปลี่ยนสำคัญ: จากที่เราต้องเรียนรู้วิธีใช้โปรแกรม → ตอนนี้โปรแกรมเข้าใจภาษาเรา</a:t>
             </a:r>
@@ -8373,9 +8373,9 @@
                 <a:solidFill>
                   <a:srgbClr val="AD3A38"/>
                 </a:solidFill>
-                <a:latin typeface="Tahoma" pitchFamily="34" charset="0"/>
-                <a:ea typeface="Tahoma" pitchFamily="34" charset="-122"/>
-                <a:cs typeface="Tahoma" pitchFamily="34" charset="-120"/>
+                <a:latin typeface="Chonburi" pitchFamily="34" charset="0"/>
+                <a:ea typeface="Chonburi" pitchFamily="34" charset="-122"/>
+                <a:cs typeface="Chonburi" pitchFamily="34" charset="-120"/>
               </a:rPr>
               <a:t>ค่ายหลักที่ควรรู้จัก</a:t>
             </a:r>
@@ -8441,9 +8441,9 @@
                 <a:solidFill>
                   <a:srgbClr val="FFFFFF"/>
                 </a:solidFill>
-                <a:latin typeface="Tahoma" pitchFamily="34" charset="0"/>
-                <a:ea typeface="Tahoma" pitchFamily="34" charset="-122"/>
-                <a:cs typeface="Tahoma" pitchFamily="34" charset="-120"/>
+                <a:latin typeface="Sarabun" pitchFamily="34" charset="0"/>
+                <a:ea typeface="Sarabun" pitchFamily="34" charset="-122"/>
+                <a:cs typeface="Sarabun" pitchFamily="34" charset="-120"/>
               </a:rPr>
               <a:t>Claude</a:t>
             </a:r>
@@ -8480,9 +8480,9 @@
                 <a:solidFill>
                   <a:srgbClr val="FFCB64"/>
                 </a:solidFill>
-                <a:latin typeface="Tahoma" pitchFamily="34" charset="0"/>
-                <a:ea typeface="Tahoma" pitchFamily="34" charset="-122"/>
-                <a:cs typeface="Tahoma" pitchFamily="34" charset="-120"/>
+                <a:latin typeface="Sarabun" pitchFamily="34" charset="0"/>
+                <a:ea typeface="Sarabun" pitchFamily="34" charset="-122"/>
+                <a:cs typeface="Sarabun" pitchFamily="34" charset="-120"/>
               </a:rPr>
               <a:t>Anthropic</a:t>
             </a:r>
@@ -8519,9 +8519,9 @@
                 <a:solidFill>
                   <a:srgbClr val="FBEBD0"/>
                 </a:solidFill>
-                <a:latin typeface="Tahoma" pitchFamily="34" charset="0"/>
-                <a:ea typeface="Tahoma" pitchFamily="34" charset="-122"/>
-                <a:cs typeface="Tahoma" pitchFamily="34" charset="-120"/>
+                <a:latin typeface="Sarabun" pitchFamily="34" charset="0"/>
+                <a:ea typeface="Sarabun" pitchFamily="34" charset="-122"/>
+                <a:cs typeface="Sarabun" pitchFamily="34" charset="-120"/>
               </a:rPr>
               <a:t>เก่งงานเอกสารและไฟล์</a:t>
             </a:r>
@@ -8536,9 +8536,9 @@
                 <a:solidFill>
                   <a:srgbClr val="FBEBD0"/>
                 </a:solidFill>
-                <a:latin typeface="Tahoma" pitchFamily="34" charset="0"/>
-                <a:ea typeface="Tahoma" pitchFamily="34" charset="-122"/>
-                <a:cs typeface="Tahoma" pitchFamily="34" charset="-120"/>
+                <a:latin typeface="Sarabun" pitchFamily="34" charset="0"/>
+                <a:ea typeface="Sarabun" pitchFamily="34" charset="-122"/>
+                <a:cs typeface="Sarabun" pitchFamily="34" charset="-120"/>
               </a:rPr>
               <a:t>มี Cowork + Claude Code</a:t>
             </a:r>
@@ -8553,9 +8553,9 @@
                 <a:solidFill>
                   <a:srgbClr val="FBEBD0"/>
                 </a:solidFill>
-                <a:latin typeface="Tahoma" pitchFamily="34" charset="0"/>
-                <a:ea typeface="Tahoma" pitchFamily="34" charset="-122"/>
-                <a:cs typeface="Tahoma" pitchFamily="34" charset="-120"/>
+                <a:latin typeface="Sarabun" pitchFamily="34" charset="0"/>
+                <a:ea typeface="Sarabun" pitchFamily="34" charset="-122"/>
+                <a:cs typeface="Sarabun" pitchFamily="34" charset="-120"/>
               </a:rPr>
               <a:t>(ที่เราใช้วันนี้)</a:t>
             </a:r>
@@ -8621,9 +8621,9 @@
                 <a:solidFill>
                   <a:srgbClr val="2E2420"/>
                 </a:solidFill>
-                <a:latin typeface="Tahoma" pitchFamily="34" charset="0"/>
-                <a:ea typeface="Tahoma" pitchFamily="34" charset="-122"/>
-                <a:cs typeface="Tahoma" pitchFamily="34" charset="-120"/>
+                <a:latin typeface="Sarabun" pitchFamily="34" charset="0"/>
+                <a:ea typeface="Sarabun" pitchFamily="34" charset="-122"/>
+                <a:cs typeface="Sarabun" pitchFamily="34" charset="-120"/>
               </a:rPr>
               <a:t>ChatGPT</a:t>
             </a:r>
@@ -8660,9 +8660,9 @@
                 <a:solidFill>
                   <a:srgbClr val="8A6F57"/>
                 </a:solidFill>
-                <a:latin typeface="Tahoma" pitchFamily="34" charset="0"/>
-                <a:ea typeface="Tahoma" pitchFamily="34" charset="-122"/>
-                <a:cs typeface="Tahoma" pitchFamily="34" charset="-120"/>
+                <a:latin typeface="Sarabun" pitchFamily="34" charset="0"/>
+                <a:ea typeface="Sarabun" pitchFamily="34" charset="-122"/>
+                <a:cs typeface="Sarabun" pitchFamily="34" charset="-120"/>
               </a:rPr>
               <a:t>OpenAI</a:t>
             </a:r>
@@ -8699,9 +8699,9 @@
                 <a:solidFill>
                   <a:srgbClr val="2E2420"/>
                 </a:solidFill>
-                <a:latin typeface="Tahoma" pitchFamily="34" charset="0"/>
-                <a:ea typeface="Tahoma" pitchFamily="34" charset="-122"/>
-                <a:cs typeface="Tahoma" pitchFamily="34" charset="-120"/>
+                <a:latin typeface="Sarabun" pitchFamily="34" charset="0"/>
+                <a:ea typeface="Sarabun" pitchFamily="34" charset="-122"/>
+                <a:cs typeface="Sarabun" pitchFamily="34" charset="-120"/>
               </a:rPr>
               <a:t>คนใช้เยอะที่สุด</a:t>
             </a:r>
@@ -8716,9 +8716,9 @@
                 <a:solidFill>
                   <a:srgbClr val="2E2420"/>
                 </a:solidFill>
-                <a:latin typeface="Tahoma" pitchFamily="34" charset="0"/>
-                <a:ea typeface="Tahoma" pitchFamily="34" charset="-122"/>
-                <a:cs typeface="Tahoma" pitchFamily="34" charset="-120"/>
+                <a:latin typeface="Sarabun" pitchFamily="34" charset="0"/>
+                <a:ea typeface="Sarabun" pitchFamily="34" charset="-122"/>
+                <a:cs typeface="Sarabun" pitchFamily="34" charset="-120"/>
               </a:rPr>
               <a:t>รู้จักแพร่หลายที่สุด</a:t>
             </a:r>
@@ -8784,9 +8784,9 @@
                 <a:solidFill>
                   <a:srgbClr val="2E2420"/>
                 </a:solidFill>
-                <a:latin typeface="Tahoma" pitchFamily="34" charset="0"/>
-                <a:ea typeface="Tahoma" pitchFamily="34" charset="-122"/>
-                <a:cs typeface="Tahoma" pitchFamily="34" charset="-120"/>
+                <a:latin typeface="Sarabun" pitchFamily="34" charset="0"/>
+                <a:ea typeface="Sarabun" pitchFamily="34" charset="-122"/>
+                <a:cs typeface="Sarabun" pitchFamily="34" charset="-120"/>
               </a:rPr>
               <a:t>Gemini</a:t>
             </a:r>
@@ -8823,9 +8823,9 @@
                 <a:solidFill>
                   <a:srgbClr val="8A6F57"/>
                 </a:solidFill>
-                <a:latin typeface="Tahoma" pitchFamily="34" charset="0"/>
-                <a:ea typeface="Tahoma" pitchFamily="34" charset="-122"/>
-                <a:cs typeface="Tahoma" pitchFamily="34" charset="-120"/>
+                <a:latin typeface="Sarabun" pitchFamily="34" charset="0"/>
+                <a:ea typeface="Sarabun" pitchFamily="34" charset="-122"/>
+                <a:cs typeface="Sarabun" pitchFamily="34" charset="-120"/>
               </a:rPr>
               <a:t>Google</a:t>
             </a:r>
@@ -8862,9 +8862,9 @@
                 <a:solidFill>
                   <a:srgbClr val="2E2420"/>
                 </a:solidFill>
-                <a:latin typeface="Tahoma" pitchFamily="34" charset="0"/>
-                <a:ea typeface="Tahoma" pitchFamily="34" charset="-122"/>
-                <a:cs typeface="Tahoma" pitchFamily="34" charset="-120"/>
+                <a:latin typeface="Sarabun" pitchFamily="34" charset="0"/>
+                <a:ea typeface="Sarabun" pitchFamily="34" charset="-122"/>
+                <a:cs typeface="Sarabun" pitchFamily="34" charset="-120"/>
               </a:rPr>
               <a:t>ผูกกับ Gmail,</a:t>
             </a:r>
@@ -8879,9 +8879,9 @@
                 <a:solidFill>
                   <a:srgbClr val="2E2420"/>
                 </a:solidFill>
-                <a:latin typeface="Tahoma" pitchFamily="34" charset="0"/>
-                <a:ea typeface="Tahoma" pitchFamily="34" charset="-122"/>
-                <a:cs typeface="Tahoma" pitchFamily="34" charset="-120"/>
+                <a:latin typeface="Sarabun" pitchFamily="34" charset="0"/>
+                <a:ea typeface="Sarabun" pitchFamily="34" charset="-122"/>
+                <a:cs typeface="Sarabun" pitchFamily="34" charset="-120"/>
               </a:rPr>
               <a:t>Google Docs / Sheets</a:t>
             </a:r>
@@ -8947,9 +8947,9 @@
                 <a:solidFill>
                   <a:srgbClr val="2E2420"/>
                 </a:solidFill>
-                <a:latin typeface="Tahoma" pitchFamily="34" charset="0"/>
-                <a:ea typeface="Tahoma" pitchFamily="34" charset="-122"/>
-                <a:cs typeface="Tahoma" pitchFamily="34" charset="-120"/>
+                <a:latin typeface="Sarabun" pitchFamily="34" charset="0"/>
+                <a:ea typeface="Sarabun" pitchFamily="34" charset="-122"/>
+                <a:cs typeface="Sarabun" pitchFamily="34" charset="-120"/>
               </a:rPr>
               <a:t>Copilot</a:t>
             </a:r>
@@ -8986,9 +8986,9 @@
                 <a:solidFill>
                   <a:srgbClr val="8A6F57"/>
                 </a:solidFill>
-                <a:latin typeface="Tahoma" pitchFamily="34" charset="0"/>
-                <a:ea typeface="Tahoma" pitchFamily="34" charset="-122"/>
-                <a:cs typeface="Tahoma" pitchFamily="34" charset="-120"/>
+                <a:latin typeface="Sarabun" pitchFamily="34" charset="0"/>
+                <a:ea typeface="Sarabun" pitchFamily="34" charset="-122"/>
+                <a:cs typeface="Sarabun" pitchFamily="34" charset="-120"/>
               </a:rPr>
               <a:t>Microsoft</a:t>
             </a:r>
@@ -9025,9 +9025,9 @@
                 <a:solidFill>
                   <a:srgbClr val="2E2420"/>
                 </a:solidFill>
-                <a:latin typeface="Tahoma" pitchFamily="34" charset="0"/>
-                <a:ea typeface="Tahoma" pitchFamily="34" charset="-122"/>
-                <a:cs typeface="Tahoma" pitchFamily="34" charset="-120"/>
+                <a:latin typeface="Sarabun" pitchFamily="34" charset="0"/>
+                <a:ea typeface="Sarabun" pitchFamily="34" charset="-122"/>
+                <a:cs typeface="Sarabun" pitchFamily="34" charset="-120"/>
               </a:rPr>
               <a:t>ฝังใน Word, Excel,</a:t>
             </a:r>
@@ -9042,9 +9042,9 @@
                 <a:solidFill>
                   <a:srgbClr val="2E2420"/>
                 </a:solidFill>
-                <a:latin typeface="Tahoma" pitchFamily="34" charset="0"/>
-                <a:ea typeface="Tahoma" pitchFamily="34" charset="-122"/>
-                <a:cs typeface="Tahoma" pitchFamily="34" charset="-120"/>
+                <a:latin typeface="Sarabun" pitchFamily="34" charset="0"/>
+                <a:ea typeface="Sarabun" pitchFamily="34" charset="-122"/>
+                <a:cs typeface="Sarabun" pitchFamily="34" charset="-120"/>
               </a:rPr>
               <a:t>Teams, Windows</a:t>
             </a:r>
@@ -9103,9 +9103,9 @@
                 <a:solidFill>
                   <a:srgbClr val="4B7A3C"/>
                 </a:solidFill>
-                <a:latin typeface="Tahoma" pitchFamily="34" charset="0"/>
-                <a:ea typeface="Tahoma" pitchFamily="34" charset="-122"/>
-                <a:cs typeface="Tahoma" pitchFamily="34" charset="-120"/>
+                <a:latin typeface="Sarabun" pitchFamily="34" charset="0"/>
+                <a:ea typeface="Sarabun" pitchFamily="34" charset="-122"/>
+                <a:cs typeface="Sarabun" pitchFamily="34" charset="-120"/>
               </a:rPr>
               <a:t>ข่าวดี: </a:t>
             </a:r>
@@ -9117,9 +9117,9 @@
                 <a:solidFill>
                   <a:srgbClr val="2E2420"/>
                 </a:solidFill>
-                <a:latin typeface="Tahoma" pitchFamily="34" charset="0"/>
-                <a:ea typeface="Tahoma" pitchFamily="34" charset="-122"/>
-                <a:cs typeface="Tahoma" pitchFamily="34" charset="-120"/>
+                <a:latin typeface="Sarabun" pitchFamily="34" charset="0"/>
+                <a:ea typeface="Sarabun" pitchFamily="34" charset="-122"/>
+                <a:cs typeface="Sarabun" pitchFamily="34" charset="-120"/>
               </a:rPr>
               <a:t>ทุกค่ายใช้หลักการเดียวกัน — เรียนวิธีสั่งงานครั้งเดียว ใช้ได้ทุกค่าย วันนี้เราเรียนผ่าน Claude</a:t>
             </a:r>
@@ -9228,9 +9228,9 @@
                 <a:solidFill>
                   <a:srgbClr val="AD3A38"/>
                 </a:solidFill>
-                <a:latin typeface="Tahoma" pitchFamily="34" charset="0"/>
-                <a:ea typeface="Tahoma" pitchFamily="34" charset="-122"/>
-                <a:cs typeface="Tahoma" pitchFamily="34" charset="-120"/>
+                <a:latin typeface="Chonburi" pitchFamily="34" charset="0"/>
+                <a:ea typeface="Chonburi" pitchFamily="34" charset="-122"/>
+                <a:cs typeface="Chonburi" pitchFamily="34" charset="-120"/>
               </a:rPr>
               <a:t>การใช้ AI มี 3 ระดับ</a:t>
             </a:r>
@@ -9333,9 +9333,9 @@
                 <a:solidFill>
                   <a:srgbClr val="2E2420"/>
                 </a:solidFill>
-                <a:latin typeface="Tahoma" pitchFamily="34" charset="0"/>
-                <a:ea typeface="Tahoma" pitchFamily="34" charset="-122"/>
-                <a:cs typeface="Tahoma" pitchFamily="34" charset="-120"/>
+                <a:latin typeface="Sarabun" pitchFamily="34" charset="0"/>
+                <a:ea typeface="Sarabun" pitchFamily="34" charset="-122"/>
+                <a:cs typeface="Sarabun" pitchFamily="34" charset="-120"/>
               </a:rPr>
               <a:t>ระดับ 1 — ถาม-ตอบ</a:t>
             </a:r>
@@ -9372,9 +9372,9 @@
                 <a:solidFill>
                   <a:srgbClr val="8A6F57"/>
                 </a:solidFill>
-                <a:latin typeface="Tahoma" pitchFamily="34" charset="0"/>
-                <a:ea typeface="Tahoma" pitchFamily="34" charset="-122"/>
-                <a:cs typeface="Tahoma" pitchFamily="34" charset="-120"/>
+                <a:latin typeface="Sarabun" pitchFamily="34" charset="0"/>
+                <a:ea typeface="Sarabun" pitchFamily="34" charset="-122"/>
+                <a:cs typeface="Sarabun" pitchFamily="34" charset="-120"/>
               </a:rPr>
               <a:t>แชทในเว็บ/แอป: แปล สรุป ร่างข้อความ</a:t>
             </a:r>
@@ -9411,9 +9411,9 @@
                 <a:solidFill>
                   <a:srgbClr val="8A6F57"/>
                 </a:solidFill>
-                <a:latin typeface="Tahoma" pitchFamily="34" charset="0"/>
-                <a:ea typeface="Tahoma" pitchFamily="34" charset="-122"/>
-                <a:cs typeface="Tahoma" pitchFamily="34" charset="-120"/>
+                <a:latin typeface="Sarabun" pitchFamily="34" charset="0"/>
+                <a:ea typeface="Sarabun" pitchFamily="34" charset="-122"/>
+                <a:cs typeface="Sarabun" pitchFamily="34" charset="-120"/>
               </a:rPr>
               <a:t>ทุกคนเริ่มตรงนี้</a:t>
             </a:r>
@@ -9516,9 +9516,9 @@
                 <a:solidFill>
                   <a:srgbClr val="2E2420"/>
                 </a:solidFill>
-                <a:latin typeface="Tahoma" pitchFamily="34" charset="0"/>
-                <a:ea typeface="Tahoma" pitchFamily="34" charset="-122"/>
-                <a:cs typeface="Tahoma" pitchFamily="34" charset="-120"/>
+                <a:latin typeface="Sarabun" pitchFamily="34" charset="0"/>
+                <a:ea typeface="Sarabun" pitchFamily="34" charset="-122"/>
+                <a:cs typeface="Sarabun" pitchFamily="34" charset="-120"/>
               </a:rPr>
               <a:t>ระดับ 2 — ทำงานกับไฟล์ในเครื่องเรา</a:t>
             </a:r>
@@ -9555,9 +9555,9 @@
                 <a:solidFill>
                   <a:srgbClr val="4A2C17"/>
                 </a:solidFill>
-                <a:latin typeface="Tahoma" pitchFamily="34" charset="0"/>
-                <a:ea typeface="Tahoma" pitchFamily="34" charset="-122"/>
-                <a:cs typeface="Tahoma" pitchFamily="34" charset="-120"/>
+                <a:latin typeface="Sarabun" pitchFamily="34" charset="0"/>
+                <a:ea typeface="Sarabun" pitchFamily="34" charset="-122"/>
+                <a:cs typeface="Sarabun" pitchFamily="34" charset="-120"/>
               </a:rPr>
               <a:t>Cowork: อ่านโฟลเดอร์ สรุปอีเมล วิเคราะห์ Excel สร้างรายงาน</a:t>
             </a:r>
@@ -9594,9 +9594,9 @@
                 <a:solidFill>
                   <a:srgbClr val="7A2523"/>
                 </a:solidFill>
-                <a:latin typeface="Tahoma" pitchFamily="34" charset="0"/>
-                <a:ea typeface="Tahoma" pitchFamily="34" charset="-122"/>
-                <a:cs typeface="Tahoma" pitchFamily="34" charset="-120"/>
+                <a:latin typeface="Sarabun" pitchFamily="34" charset="0"/>
+                <a:ea typeface="Sarabun" pitchFamily="34" charset="-122"/>
+                <a:cs typeface="Sarabun" pitchFamily="34" charset="-120"/>
               </a:rPr>
               <a:t>★ วันนี้เน้นตรงนี้</a:t>
             </a:r>
@@ -9699,9 +9699,9 @@
                 <a:solidFill>
                   <a:srgbClr val="FFFFFF"/>
                 </a:solidFill>
-                <a:latin typeface="Tahoma" pitchFamily="34" charset="0"/>
-                <a:ea typeface="Tahoma" pitchFamily="34" charset="-122"/>
-                <a:cs typeface="Tahoma" pitchFamily="34" charset="-120"/>
+                <a:latin typeface="Sarabun" pitchFamily="34" charset="0"/>
+                <a:ea typeface="Sarabun" pitchFamily="34" charset="-122"/>
+                <a:cs typeface="Sarabun" pitchFamily="34" charset="-120"/>
               </a:rPr>
               <a:t>ระดับ 3 — สร้างระบบให้เรา</a:t>
             </a:r>
@@ -9738,9 +9738,9 @@
                 <a:solidFill>
                   <a:srgbClr val="FBEBD0"/>
                 </a:solidFill>
-                <a:latin typeface="Tahoma" pitchFamily="34" charset="0"/>
-                <a:ea typeface="Tahoma" pitchFamily="34" charset="-122"/>
-                <a:cs typeface="Tahoma" pitchFamily="34" charset="-120"/>
+                <a:latin typeface="Sarabun" pitchFamily="34" charset="0"/>
+                <a:ea typeface="Sarabun" pitchFamily="34" charset="-122"/>
+                <a:cs typeface="Sarabun" pitchFamily="34" charset="-120"/>
               </a:rPr>
               <a:t>Claude Code: เขียนโปรแกรม สร้าง Dashboard สร้างเว็บ</a:t>
             </a:r>
@@ -9777,9 +9777,9 @@
                 <a:solidFill>
                   <a:srgbClr val="FFCB64"/>
                 </a:solidFill>
-                <a:latin typeface="Tahoma" pitchFamily="34" charset="0"/>
-                <a:ea typeface="Tahoma" pitchFamily="34" charset="-122"/>
-                <a:cs typeface="Tahoma" pitchFamily="34" charset="-120"/>
+                <a:latin typeface="Sarabun" pitchFamily="34" charset="0"/>
+                <a:ea typeface="Sarabun" pitchFamily="34" charset="-122"/>
+                <a:cs typeface="Sarabun" pitchFamily="34" charset="-120"/>
               </a:rPr>
               <a:t>แถมท้ายคลาส</a:t>
             </a:r>
@@ -9816,9 +9816,9 @@
                 <a:solidFill>
                   <a:srgbClr val="C65E52"/>
                 </a:solidFill>
-                <a:latin typeface="Tahoma" pitchFamily="34" charset="0"/>
-                <a:ea typeface="Tahoma" pitchFamily="34" charset="-122"/>
-                <a:cs typeface="Tahoma" pitchFamily="34" charset="-120"/>
+                <a:latin typeface="Sarabun" pitchFamily="34" charset="0"/>
+                <a:ea typeface="Sarabun" pitchFamily="34" charset="-122"/>
+                <a:cs typeface="Sarabun" pitchFamily="34" charset="-120"/>
               </a:rPr>
               <a:t>ยิ่งขึ้นระดับ ยิ่งทำงานแทนเราได้มากขึ้น — แต่วิธีสั่งเหมือนเดิม: พิมพ์ภาษาคน</a:t>
             </a:r>
@@ -9927,9 +9927,9 @@
                 <a:solidFill>
                   <a:srgbClr val="AD3A38"/>
                 </a:solidFill>
-                <a:latin typeface="Tahoma" pitchFamily="34" charset="0"/>
-                <a:ea typeface="Tahoma" pitchFamily="34" charset="-122"/>
-                <a:cs typeface="Tahoma" pitchFamily="34" charset="-120"/>
+                <a:latin typeface="Chonburi" pitchFamily="34" charset="0"/>
+                <a:ea typeface="Chonburi" pitchFamily="34" charset="-122"/>
+                <a:cs typeface="Chonburi" pitchFamily="34" charset="-120"/>
               </a:rPr>
               <a:t>ข้อควรระวัง 3 ข้อ — ท่องไว้ก่อนเริ่มใช้</a:t>
             </a:r>
@@ -10032,9 +10032,9 @@
                 <a:solidFill>
                   <a:srgbClr val="2E2420"/>
                 </a:solidFill>
-                <a:latin typeface="Tahoma" pitchFamily="34" charset="0"/>
-                <a:ea typeface="Tahoma" pitchFamily="34" charset="-122"/>
-                <a:cs typeface="Tahoma" pitchFamily="34" charset="-120"/>
+                <a:latin typeface="Sarabun" pitchFamily="34" charset="0"/>
+                <a:ea typeface="Sarabun" pitchFamily="34" charset="-122"/>
+                <a:cs typeface="Sarabun" pitchFamily="34" charset="-120"/>
               </a:rPr>
               <a:t>AI ตอบผิดได้อย่างมั่นใจ</a:t>
             </a:r>
@@ -10071,9 +10071,9 @@
                 <a:solidFill>
                   <a:srgbClr val="8A6F57"/>
                 </a:solidFill>
-                <a:latin typeface="Tahoma" pitchFamily="34" charset="0"/>
-                <a:ea typeface="Tahoma" pitchFamily="34" charset="-122"/>
-                <a:cs typeface="Tahoma" pitchFamily="34" charset="-120"/>
+                <a:latin typeface="Sarabun" pitchFamily="34" charset="0"/>
+                <a:ea typeface="Sarabun" pitchFamily="34" charset="-122"/>
+                <a:cs typeface="Sarabun" pitchFamily="34" charset="-120"/>
               </a:rPr>
               <a:t>โดยเฉพาะตัวเลข ชื่อคน วันที่ — ตรวจกับไฟล์จริงก่อนใช้เสมอ</a:t>
             </a:r>
@@ -10176,9 +10176,9 @@
                 <a:solidFill>
                   <a:srgbClr val="2E2420"/>
                 </a:solidFill>
-                <a:latin typeface="Tahoma" pitchFamily="34" charset="0"/>
-                <a:ea typeface="Tahoma" pitchFamily="34" charset="-122"/>
-                <a:cs typeface="Tahoma" pitchFamily="34" charset="-120"/>
+                <a:latin typeface="Sarabun" pitchFamily="34" charset="0"/>
+                <a:ea typeface="Sarabun" pitchFamily="34" charset="-122"/>
+                <a:cs typeface="Sarabun" pitchFamily="34" charset="-120"/>
               </a:rPr>
               <a:t>คิดก่อนอัปโหลด</a:t>
             </a:r>
@@ -10215,9 +10215,9 @@
                 <a:solidFill>
                   <a:srgbClr val="8A6F57"/>
                 </a:solidFill>
-                <a:latin typeface="Tahoma" pitchFamily="34" charset="0"/>
-                <a:ea typeface="Tahoma" pitchFamily="34" charset="-122"/>
-                <a:cs typeface="Tahoma" pitchFamily="34" charset="-120"/>
+                <a:latin typeface="Sarabun" pitchFamily="34" charset="0"/>
+                <a:ea typeface="Sarabun" pitchFamily="34" charset="-122"/>
+                <a:cs typeface="Sarabun" pitchFamily="34" charset="-120"/>
               </a:rPr>
               <a:t>ข้อมูลลับ ข้อมูลส่วนตัวลูกค้า เงินเดือน — ใช้ตามนโยบายที่ทำงาน</a:t>
             </a:r>
@@ -10320,9 +10320,9 @@
                 <a:solidFill>
                   <a:srgbClr val="2E2420"/>
                 </a:solidFill>
-                <a:latin typeface="Tahoma" pitchFamily="34" charset="0"/>
-                <a:ea typeface="Tahoma" pitchFamily="34" charset="-122"/>
-                <a:cs typeface="Tahoma" pitchFamily="34" charset="-120"/>
+                <a:latin typeface="Sarabun" pitchFamily="34" charset="0"/>
+                <a:ea typeface="Sarabun" pitchFamily="34" charset="-122"/>
+                <a:cs typeface="Sarabun" pitchFamily="34" charset="-120"/>
               </a:rPr>
               <a:t>คนตัดสินใจ ไม่ใช่ AI</a:t>
             </a:r>
@@ -10359,9 +10359,9 @@
                 <a:solidFill>
                   <a:srgbClr val="8A6F57"/>
                 </a:solidFill>
-                <a:latin typeface="Tahoma" pitchFamily="34" charset="0"/>
-                <a:ea typeface="Tahoma" pitchFamily="34" charset="-122"/>
-                <a:cs typeface="Tahoma" pitchFamily="34" charset="-120"/>
+                <a:latin typeface="Sarabun" pitchFamily="34" charset="0"/>
+                <a:ea typeface="Sarabun" pitchFamily="34" charset="-122"/>
+                <a:cs typeface="Sarabun" pitchFamily="34" charset="-120"/>
               </a:rPr>
               <a:t>AI เตรียมข้อมูลให้ แต่การตัดสินใจและความรับผิดชอบเป็นของเรา</a:t>
             </a:r>
@@ -10398,9 +10398,9 @@
                 <a:solidFill>
                   <a:srgbClr val="8A6F57"/>
                 </a:solidFill>
-                <a:latin typeface="Tahoma" pitchFamily="34" charset="0"/>
-                <a:ea typeface="Tahoma" pitchFamily="34" charset="-122"/>
-                <a:cs typeface="Tahoma" pitchFamily="34" charset="-120"/>
+                <a:latin typeface="Sarabun" pitchFamily="34" charset="0"/>
+                <a:ea typeface="Sarabun" pitchFamily="34" charset="-122"/>
+                <a:cs typeface="Sarabun" pitchFamily="34" charset="-120"/>
               </a:rPr>
               <a:t>เราจะย้ำ 3 ข้อนี้อีกครั้งตอนเดโม่ — เห็นของจริงแล้วจะเข้าใจว่าทำไมสำคัญ</a:t>
             </a:r>
@@ -10509,9 +10509,9 @@
                 <a:solidFill>
                   <a:srgbClr val="AD3A38"/>
                 </a:solidFill>
-                <a:latin typeface="Tahoma" pitchFamily="34" charset="0"/>
-                <a:ea typeface="Tahoma" pitchFamily="34" charset="-122"/>
-                <a:cs typeface="Tahoma" pitchFamily="34" charset="-120"/>
+                <a:latin typeface="Chonburi" pitchFamily="34" charset="0"/>
+                <a:ea typeface="Chonburi" pitchFamily="34" charset="-122"/>
+                <a:cs typeface="Chonburi" pitchFamily="34" charset="-120"/>
               </a:rPr>
               <a:t>สูตรสั่งงาน 4 ส่วน — ท่าเดียวที่ต้องจำ</a:t>
             </a:r>
@@ -10570,9 +10570,9 @@
                 <a:solidFill>
                   <a:srgbClr val="FFFFFF"/>
                 </a:solidFill>
-                <a:latin typeface="Tahoma" pitchFamily="34" charset="0"/>
-                <a:ea typeface="Tahoma" pitchFamily="34" charset="-122"/>
-                <a:cs typeface="Tahoma" pitchFamily="34" charset="-120"/>
+                <a:latin typeface="Sarabun" pitchFamily="34" charset="0"/>
+                <a:ea typeface="Sarabun" pitchFamily="34" charset="-122"/>
+                <a:cs typeface="Sarabun" pitchFamily="34" charset="-120"/>
               </a:rPr>
               <a:t>บทบาท</a:t>
             </a:r>
@@ -10609,9 +10609,9 @@
                 <a:solidFill>
                   <a:srgbClr val="FFFFFF"/>
                 </a:solidFill>
-                <a:latin typeface="Tahoma" pitchFamily="34" charset="0"/>
-                <a:ea typeface="Tahoma" pitchFamily="34" charset="-122"/>
-                <a:cs typeface="Tahoma" pitchFamily="34" charset="-120"/>
+                <a:latin typeface="Sarabun" pitchFamily="34" charset="0"/>
+                <a:ea typeface="Sarabun" pitchFamily="34" charset="-122"/>
+                <a:cs typeface="Sarabun" pitchFamily="34" charset="-120"/>
               </a:rPr>
               <a:t>คุณเป็นใคร</a:t>
             </a:r>
@@ -10626,9 +10626,9 @@
                 <a:solidFill>
                   <a:srgbClr val="FFFFFF"/>
                 </a:solidFill>
-                <a:latin typeface="Tahoma" pitchFamily="34" charset="0"/>
-                <a:ea typeface="Tahoma" pitchFamily="34" charset="-122"/>
-                <a:cs typeface="Tahoma" pitchFamily="34" charset="-120"/>
+                <a:latin typeface="Sarabun" pitchFamily="34" charset="0"/>
+                <a:ea typeface="Sarabun" pitchFamily="34" charset="-122"/>
+                <a:cs typeface="Sarabun" pitchFamily="34" charset="-120"/>
               </a:rPr>
               <a:t>ให้ AI สวมหมวกไหน</a:t>
             </a:r>
@@ -10665,9 +10665,9 @@
                 <a:solidFill>
                   <a:srgbClr val="8A6F57"/>
                 </a:solidFill>
-                <a:latin typeface="Tahoma" pitchFamily="34" charset="0"/>
-                <a:ea typeface="Tahoma" pitchFamily="34" charset="-122"/>
-                <a:cs typeface="Tahoma" pitchFamily="34" charset="-120"/>
+                <a:latin typeface="Sarabun" pitchFamily="34" charset="0"/>
+                <a:ea typeface="Sarabun" pitchFamily="34" charset="-122"/>
+                <a:cs typeface="Sarabun" pitchFamily="34" charset="-120"/>
               </a:rPr>
               <a:t>+</a:t>
             </a:r>
@@ -10726,9 +10726,9 @@
                 <a:solidFill>
                   <a:srgbClr val="FFFFFF"/>
                 </a:solidFill>
-                <a:latin typeface="Tahoma" pitchFamily="34" charset="0"/>
-                <a:ea typeface="Tahoma" pitchFamily="34" charset="-122"/>
-                <a:cs typeface="Tahoma" pitchFamily="34" charset="-120"/>
+                <a:latin typeface="Sarabun" pitchFamily="34" charset="0"/>
+                <a:ea typeface="Sarabun" pitchFamily="34" charset="-122"/>
+                <a:cs typeface="Sarabun" pitchFamily="34" charset="-120"/>
               </a:rPr>
               <a:t>งาน</a:t>
             </a:r>
@@ -10765,9 +10765,9 @@
                 <a:solidFill>
                   <a:srgbClr val="FFFFFF"/>
                 </a:solidFill>
-                <a:latin typeface="Tahoma" pitchFamily="34" charset="0"/>
-                <a:ea typeface="Tahoma" pitchFamily="34" charset="-122"/>
-                <a:cs typeface="Tahoma" pitchFamily="34" charset="-120"/>
+                <a:latin typeface="Sarabun" pitchFamily="34" charset="0"/>
+                <a:ea typeface="Sarabun" pitchFamily="34" charset="-122"/>
+                <a:cs typeface="Sarabun" pitchFamily="34" charset="-120"/>
               </a:rPr>
               <a:t>ให้ทำอะไร</a:t>
             </a:r>
@@ -10782,9 +10782,9 @@
                 <a:solidFill>
                   <a:srgbClr val="FFFFFF"/>
                 </a:solidFill>
-                <a:latin typeface="Tahoma" pitchFamily="34" charset="0"/>
-                <a:ea typeface="Tahoma" pitchFamily="34" charset="-122"/>
-                <a:cs typeface="Tahoma" pitchFamily="34" charset="-120"/>
+                <a:latin typeface="Sarabun" pitchFamily="34" charset="0"/>
+                <a:ea typeface="Sarabun" pitchFamily="34" charset="-122"/>
+                <a:cs typeface="Sarabun" pitchFamily="34" charset="-120"/>
               </a:rPr>
               <a:t>ชัดๆ 1 อย่าง</a:t>
             </a:r>
@@ -10821,9 +10821,9 @@
                 <a:solidFill>
                   <a:srgbClr val="8A6F57"/>
                 </a:solidFill>
-                <a:latin typeface="Tahoma" pitchFamily="34" charset="0"/>
-                <a:ea typeface="Tahoma" pitchFamily="34" charset="-122"/>
-                <a:cs typeface="Tahoma" pitchFamily="34" charset="-120"/>
+                <a:latin typeface="Sarabun" pitchFamily="34" charset="0"/>
+                <a:ea typeface="Sarabun" pitchFamily="34" charset="-122"/>
+                <a:cs typeface="Sarabun" pitchFamily="34" charset="-120"/>
               </a:rPr>
               <a:t>+</a:t>
             </a:r>
@@ -10882,9 +10882,9 @@
                 <a:solidFill>
                   <a:srgbClr val="FFFFFF"/>
                 </a:solidFill>
-                <a:latin typeface="Tahoma" pitchFamily="34" charset="0"/>
-                <a:ea typeface="Tahoma" pitchFamily="34" charset="-122"/>
-                <a:cs typeface="Tahoma" pitchFamily="34" charset="-120"/>
+                <a:latin typeface="Sarabun" pitchFamily="34" charset="0"/>
+                <a:ea typeface="Sarabun" pitchFamily="34" charset="-122"/>
+                <a:cs typeface="Sarabun" pitchFamily="34" charset="-120"/>
               </a:rPr>
               <a:t>บริบท</a:t>
             </a:r>
@@ -10921,9 +10921,9 @@
                 <a:solidFill>
                   <a:srgbClr val="FFFFFF"/>
                 </a:solidFill>
-                <a:latin typeface="Tahoma" pitchFamily="34" charset="0"/>
-                <a:ea typeface="Tahoma" pitchFamily="34" charset="-122"/>
-                <a:cs typeface="Tahoma" pitchFamily="34" charset="-120"/>
+                <a:latin typeface="Sarabun" pitchFamily="34" charset="0"/>
+                <a:ea typeface="Sarabun" pitchFamily="34" charset="-122"/>
+                <a:cs typeface="Sarabun" pitchFamily="34" charset="-120"/>
               </a:rPr>
               <a:t>ทำไปเพื่ออะไร</a:t>
             </a:r>
@@ -10938,9 +10938,9 @@
                 <a:solidFill>
                   <a:srgbClr val="FFFFFF"/>
                 </a:solidFill>
-                <a:latin typeface="Tahoma" pitchFamily="34" charset="0"/>
-                <a:ea typeface="Tahoma" pitchFamily="34" charset="-122"/>
-                <a:cs typeface="Tahoma" pitchFamily="34" charset="-120"/>
+                <a:latin typeface="Sarabun" pitchFamily="34" charset="0"/>
+                <a:ea typeface="Sarabun" pitchFamily="34" charset="-122"/>
+                <a:cs typeface="Sarabun" pitchFamily="34" charset="-120"/>
               </a:rPr>
               <a:t>ใครจะเอาไปใช้</a:t>
             </a:r>
@@ -10977,9 +10977,9 @@
                 <a:solidFill>
                   <a:srgbClr val="8A6F57"/>
                 </a:solidFill>
-                <a:latin typeface="Tahoma" pitchFamily="34" charset="0"/>
-                <a:ea typeface="Tahoma" pitchFamily="34" charset="-122"/>
-                <a:cs typeface="Tahoma" pitchFamily="34" charset="-120"/>
+                <a:latin typeface="Sarabun" pitchFamily="34" charset="0"/>
+                <a:ea typeface="Sarabun" pitchFamily="34" charset="-122"/>
+                <a:cs typeface="Sarabun" pitchFamily="34" charset="-120"/>
               </a:rPr>
               <a:t>+</a:t>
             </a:r>
@@ -11038,9 +11038,9 @@
                 <a:solidFill>
                   <a:srgbClr val="FFFFFF"/>
                 </a:solidFill>
-                <a:latin typeface="Tahoma" pitchFamily="34" charset="0"/>
-                <a:ea typeface="Tahoma" pitchFamily="34" charset="-122"/>
-                <a:cs typeface="Tahoma" pitchFamily="34" charset="-120"/>
+                <a:latin typeface="Sarabun" pitchFamily="34" charset="0"/>
+                <a:ea typeface="Sarabun" pitchFamily="34" charset="-122"/>
+                <a:cs typeface="Sarabun" pitchFamily="34" charset="-120"/>
               </a:rPr>
               <a:t>รูปแบบ</a:t>
             </a:r>
@@ -11077,9 +11077,9 @@
                 <a:solidFill>
                   <a:srgbClr val="FFFFFF"/>
                 </a:solidFill>
-                <a:latin typeface="Tahoma" pitchFamily="34" charset="0"/>
-                <a:ea typeface="Tahoma" pitchFamily="34" charset="-122"/>
-                <a:cs typeface="Tahoma" pitchFamily="34" charset="-120"/>
+                <a:latin typeface="Sarabun" pitchFamily="34" charset="0"/>
+                <a:ea typeface="Sarabun" pitchFamily="34" charset="-122"/>
+                <a:cs typeface="Sarabun" pitchFamily="34" charset="-120"/>
               </a:rPr>
               <a:t>อยากได้หน้าตาแบบไหน</a:t>
             </a:r>
@@ -11094,9 +11094,9 @@
                 <a:solidFill>
                   <a:srgbClr val="FFFFFF"/>
                 </a:solidFill>
-                <a:latin typeface="Tahoma" pitchFamily="34" charset="0"/>
-                <a:ea typeface="Tahoma" pitchFamily="34" charset="-122"/>
-                <a:cs typeface="Tahoma" pitchFamily="34" charset="-120"/>
+                <a:latin typeface="Sarabun" pitchFamily="34" charset="0"/>
+                <a:ea typeface="Sarabun" pitchFamily="34" charset="-122"/>
+                <a:cs typeface="Sarabun" pitchFamily="34" charset="-120"/>
               </a:rPr>
               <a:t>ตาราง? กี่ข้อ? ภาษาอะไร?</a:t>
             </a:r>
@@ -11155,9 +11155,9 @@
                 <a:solidFill>
                   <a:srgbClr val="FFCB64"/>
                 </a:solidFill>
-                <a:latin typeface="Tahoma" pitchFamily="34" charset="0"/>
-                <a:ea typeface="Tahoma" pitchFamily="34" charset="-122"/>
-                <a:cs typeface="Tahoma" pitchFamily="34" charset="-120"/>
+                <a:latin typeface="Sarabun" pitchFamily="34" charset="0"/>
+                <a:ea typeface="Sarabun" pitchFamily="34" charset="-122"/>
+                <a:cs typeface="Sarabun" pitchFamily="34" charset="-120"/>
               </a:rPr>
               <a:t>“คุณเป็นผู้ช่วยเจ้าของร้าน </a:t>
             </a:r>
@@ -11169,9 +11169,9 @@
                 <a:solidFill>
                   <a:srgbClr val="FFFFFF"/>
                 </a:solidFill>
-                <a:latin typeface="Tahoma" pitchFamily="34" charset="0"/>
-                <a:ea typeface="Tahoma" pitchFamily="34" charset="-122"/>
-                <a:cs typeface="Tahoma" pitchFamily="34" charset="-120"/>
+                <a:latin typeface="Sarabun" pitchFamily="34" charset="0"/>
+                <a:ea typeface="Sarabun" pitchFamily="34" charset="-122"/>
+                <a:cs typeface="Sarabun" pitchFamily="34" charset="-120"/>
               </a:rPr>
               <a:t>ช่วยสรุปอีเมลทั้งหมดในโฟลเดอร์นี้ </a:t>
             </a:r>
@@ -11183,9 +11183,9 @@
                 <a:solidFill>
                   <a:srgbClr val="F3C8B8"/>
                 </a:solidFill>
-                <a:latin typeface="Tahoma" pitchFamily="34" charset="0"/>
-                <a:ea typeface="Tahoma" pitchFamily="34" charset="-122"/>
-                <a:cs typeface="Tahoma" pitchFamily="34" charset="-120"/>
+                <a:latin typeface="Sarabun" pitchFamily="34" charset="0"/>
+                <a:ea typeface="Sarabun" pitchFamily="34" charset="-122"/>
+                <a:cs typeface="Sarabun" pitchFamily="34" charset="-120"/>
               </a:rPr>
               <a:t>ผมเป็นเจ้าของร้านกาแฟ ไม่มีเวลาอ่านทีละฉบับ </a:t>
             </a:r>
@@ -11197,9 +11197,9 @@
                 <a:solidFill>
                   <a:srgbClr val="CFE3B8"/>
                 </a:solidFill>
-                <a:latin typeface="Tahoma" pitchFamily="34" charset="0"/>
-                <a:ea typeface="Tahoma" pitchFamily="34" charset="-122"/>
-                <a:cs typeface="Tahoma" pitchFamily="34" charset="-120"/>
+                <a:latin typeface="Sarabun" pitchFamily="34" charset="0"/>
+                <a:ea typeface="Sarabun" pitchFamily="34" charset="-122"/>
+                <a:cs typeface="Sarabun" pitchFamily="34" charset="-120"/>
               </a:rPr>
               <a:t>ขอเป็นตาราง เรียงตามความด่วน พร้อมบอกว่าต้องทำอะไรต่อ”</a:t>
             </a:r>
@@ -11236,9 +11236,9 @@
                 <a:solidFill>
                   <a:srgbClr val="AD3A38"/>
                 </a:solidFill>
-                <a:latin typeface="Tahoma" pitchFamily="34" charset="0"/>
-                <a:ea typeface="Tahoma" pitchFamily="34" charset="-122"/>
-                <a:cs typeface="Tahoma" pitchFamily="34" charset="-120"/>
+                <a:latin typeface="Sarabun" pitchFamily="34" charset="0"/>
+                <a:ea typeface="Sarabun" pitchFamily="34" charset="-122"/>
+                <a:cs typeface="Sarabun" pitchFamily="34" charset="-120"/>
               </a:rPr>
               <a:t>กฎทอง: </a:t>
             </a:r>
@@ -11250,9 +11250,9 @@
                 <a:solidFill>
                   <a:srgbClr val="2E2420"/>
                 </a:solidFill>
-                <a:latin typeface="Tahoma" pitchFamily="34" charset="0"/>
-                <a:ea typeface="Tahoma" pitchFamily="34" charset="-122"/>
-                <a:cs typeface="Tahoma" pitchFamily="34" charset="-120"/>
+                <a:latin typeface="Sarabun" pitchFamily="34" charset="0"/>
+                <a:ea typeface="Sarabun" pitchFamily="34" charset="-122"/>
+                <a:cs typeface="Sarabun" pitchFamily="34" charset="-120"/>
               </a:rPr>
               <a:t>ผลลัพธ์ไม่ถูกใจ → พิมพ์บอกให้แก้ต่อได้เลย ไม่ต้องเริ่มใหม่  |  คิดไม่ออก → ถามมันว่า “ช่วยอะไรฉันได้บ้าง”</a:t>
             </a:r>
@@ -11381,9 +11381,9 @@
                 <a:solidFill>
                   <a:srgbClr val="C65E52"/>
                 </a:solidFill>
-                <a:latin typeface="Tahoma" pitchFamily="34" charset="0"/>
-                <a:ea typeface="Tahoma" pitchFamily="34" charset="-122"/>
-                <a:cs typeface="Tahoma" pitchFamily="34" charset="-120"/>
+                <a:latin typeface="Chonburi" pitchFamily="34" charset="0"/>
+                <a:ea typeface="Chonburi" pitchFamily="34" charset="-122"/>
+                <a:cs typeface="Chonburi" pitchFamily="34" charset="-120"/>
               </a:rPr>
               <a:t>ช่วงที่ 2</a:t>
             </a:r>
@@ -11420,9 +11420,9 @@
                 <a:solidFill>
                   <a:srgbClr val="AD3A38"/>
                 </a:solidFill>
-                <a:latin typeface="Tahoma" pitchFamily="34" charset="0"/>
-                <a:ea typeface="Tahoma" pitchFamily="34" charset="-122"/>
-                <a:cs typeface="Tahoma" pitchFamily="34" charset="-120"/>
+                <a:latin typeface="Chonburi" pitchFamily="34" charset="0"/>
+                <a:ea typeface="Chonburi" pitchFamily="34" charset="-122"/>
+                <a:cs typeface="Chonburi" pitchFamily="34" charset="-120"/>
               </a:rPr>
               <a:t>เดโม่สด: ร้าน “บ้านกาแฟหอมละมุน”</a:t>
             </a:r>
@@ -11459,9 +11459,9 @@
                 <a:solidFill>
                   <a:srgbClr val="2E2420"/>
                 </a:solidFill>
-                <a:latin typeface="Tahoma" pitchFamily="34" charset="0"/>
-                <a:ea typeface="Tahoma" pitchFamily="34" charset="-122"/>
-                <a:cs typeface="Tahoma" pitchFamily="34" charset="-120"/>
+                <a:latin typeface="Sarabun" pitchFamily="34" charset="0"/>
+                <a:ea typeface="Sarabun" pitchFamily="34" charset="-122"/>
+                <a:cs typeface="Sarabun" pitchFamily="34" charset="-120"/>
               </a:rPr>
               <a:t>สมมติว่าเราเป็นเจ้าของร้าน — เช้านี้มีอีเมลค้าง 4 ฉบับ และไม่รู้เลยว่าเดือนที่แล้วร้านเป็นยังไง</a:t>
             </a:r>
@@ -11542,9 +11542,9 @@
                 <a:solidFill>
                   <a:srgbClr val="2E2420"/>
                 </a:solidFill>
-                <a:latin typeface="Tahoma" pitchFamily="34" charset="0"/>
-                <a:ea typeface="Tahoma" pitchFamily="34" charset="-122"/>
-                <a:cs typeface="Tahoma" pitchFamily="34" charset="-120"/>
+                <a:latin typeface="Sarabun" pitchFamily="34" charset="0"/>
+                <a:ea typeface="Sarabun" pitchFamily="34" charset="-122"/>
+                <a:cs typeface="Sarabun" pitchFamily="34" charset="-120"/>
               </a:rPr>
               <a:t>products.xlsx — เมนู 14 รายการ พร้อมต้นทุน-ราคาขาย</a:t>
             </a:r>
@@ -11625,9 +11625,9 @@
                 <a:solidFill>
                   <a:srgbClr val="2E2420"/>
                 </a:solidFill>
-                <a:latin typeface="Tahoma" pitchFamily="34" charset="0"/>
-                <a:ea typeface="Tahoma" pitchFamily="34" charset="-122"/>
-                <a:cs typeface="Tahoma" pitchFamily="34" charset="-120"/>
+                <a:latin typeface="Sarabun" pitchFamily="34" charset="0"/>
+                <a:ea typeface="Sarabun" pitchFamily="34" charset="-122"/>
+                <a:cs typeface="Sarabun" pitchFamily="34" charset="-120"/>
               </a:rPr>
               <a:t>customers.xlsx — สมาชิกสะสมแต้ม 25 คน</a:t>
             </a:r>
@@ -11708,9 +11708,9 @@
                 <a:solidFill>
                   <a:srgbClr val="2E2420"/>
                 </a:solidFill>
-                <a:latin typeface="Tahoma" pitchFamily="34" charset="0"/>
-                <a:ea typeface="Tahoma" pitchFamily="34" charset="-122"/>
-                <a:cs typeface="Tahoma" pitchFamily="34" charset="-120"/>
+                <a:latin typeface="Sarabun" pitchFamily="34" charset="0"/>
+                <a:ea typeface="Sarabun" pitchFamily="34" charset="-122"/>
+                <a:cs typeface="Sarabun" pitchFamily="34" charset="-120"/>
               </a:rPr>
               <a:t>sales.xlsx — ยอดขาย 1,030 บิล (มิ.ย. – ก.ค.)</a:t>
             </a:r>
@@ -11791,9 +11791,9 @@
                 <a:solidFill>
                   <a:srgbClr val="2E2420"/>
                 </a:solidFill>
-                <a:latin typeface="Tahoma" pitchFamily="34" charset="0"/>
-                <a:ea typeface="Tahoma" pitchFamily="34" charset="-122"/>
-                <a:cs typeface="Tahoma" pitchFamily="34" charset="-120"/>
+                <a:latin typeface="Sarabun" pitchFamily="34" charset="0"/>
+                <a:ea typeface="Sarabun" pitchFamily="34" charset="-122"/>
+                <a:cs typeface="Sarabun" pitchFamily="34" charset="-120"/>
               </a:rPr>
               <a:t>emails/ — อีเมลเข้า 4 ฉบับ รอจัดการ</a:t>
             </a:r>
